--- a/docs/submission/ZeroDrift_SIH26169.pptx
+++ b/docs/submission/ZeroDrift_SIH26169.pptx
@@ -6042,6 +6042,30 @@
           </a:prstGeom>
         </p:spPr>
       </p:pic>
+      <p:pic>
+        <p:nvPicPr>
+          <p:cNvPr id="38" name="Picture 37" descr="logo_full.png"/>
+          <p:cNvPicPr>
+            <a:picLocks noChangeAspect="1"/>
+          </p:cNvPicPr>
+          <p:nvPr/>
+        </p:nvPicPr>
+        <p:blipFill>
+          <a:blip r:embed="rId4"/>
+          <a:stretch>
+            <a:fillRect/>
+          </a:stretch>
+        </p:blipFill>
+        <p:spPr>
+          <a:xfrm>
+            <a:off x="6035040" y="5989320"/>
+            <a:ext cx="2040941" cy="658368"/>
+          </a:xfrm>
+          <a:prstGeom prst="rect">
+            <a:avLst/>
+          </a:prstGeom>
+        </p:spPr>
+      </p:pic>
     </p:spTree>
   </p:cSld>
   <p:clrMapOvr>
@@ -6646,7 +6670,7 @@
         <p:spPr>
           <a:xfrm>
             <a:off x="6903720" y="1847088"/>
-            <a:ext cx="4892040" cy="2921635"/>
+            <a:ext cx="4892040" cy="2751772"/>
           </a:xfrm>
           <a:prstGeom prst="rect">
             <a:avLst/>
@@ -6688,7 +6712,7 @@
                 </a:solidFill>
                 <a:latin typeface="Arial"/>
               </a:rPr>
-              <a:t>Live console — real screenshot of our working system</a:t>
+              <a:t>Our console, live: locked on the beacon at 175 µrad</a:t>
             </a:r>
           </a:p>
         </p:txBody>
@@ -8062,7 +8086,7 @@
                 </a:solidFill>
                 <a:latin typeface="Arial"/>
               </a:rPr>
-              <a:t>closed loop — 30 frames per second, faster than real time on a normal laptop</a:t>
+              <a:t>closed loop at the camera’s 30 frames per second — real time on a normal laptop</a:t>
             </a:r>
           </a:p>
         </p:txBody>
@@ -10260,7 +10284,7 @@
                 </a:solidFill>
                 <a:latin typeface="Arial"/>
               </a:rPr>
-              <a:t>A laptop replaces lakhs of rupees of cameras, gimbals and optics. Optional ₹3,000 hardware rig proves the same code drives real motors and a real blinking LED.</a:t>
+              <a:t>A laptop replaces lakhs of rupees of cameras, gimbals and optics — the entire develop–test–validate cycle for FSOC pointing runs in pure software, at zero recurring cost.</a:t>
             </a:r>
           </a:p>
         </p:txBody>

--- a/docs/submission/ZeroDrift_SIH26169.pptx
+++ b/docs/submission/ZeroDrift_SIH26169.pptx
@@ -6059,7 +6059,7 @@
         <p:spPr>
           <a:xfrm>
             <a:off x="6035040" y="5989320"/>
-            <a:ext cx="2040941" cy="658368"/>
+            <a:ext cx="2409444" cy="777240"/>
           </a:xfrm>
           <a:prstGeom prst="rect">
             <a:avLst/>
@@ -6494,7 +6494,7 @@
           <a:lstStyle/>
           <a:p>
             <a:r>
-              <a:rPr sz="1600" b="1" i="0">
+              <a:rPr sz="1800" b="1" i="0">
                 <a:solidFill>
                   <a:srgbClr val="0E7C99"/>
                 </a:solidFill>
@@ -6529,11 +6529,11 @@
           <a:p>
             <a:pPr>
               <a:spcAft>
-                <a:spcPts val="700"/>
+                <a:spcPts val="800"/>
               </a:spcAft>
             </a:pPr>
             <a:r>
-              <a:rPr sz="1250" b="1" i="0">
+              <a:rPr sz="1300" b="1" i="0">
                 <a:solidFill>
                   <a:srgbClr val="0B2545"/>
                 </a:solidFill>
@@ -6542,7 +6542,7 @@
               <a:t>Complete virtual testbed:  </a:t>
             </a:r>
             <a:r>
-              <a:rPr sz="1250" b="0" i="0">
+              <a:rPr sz="1300" b="0" i="0">
                 <a:solidFill>
                   <a:srgbClr val="0B2545"/>
                 </a:solidFill>
@@ -6554,11 +6554,11 @@
           <a:p>
             <a:pPr>
               <a:spcAft>
-                <a:spcPts val="700"/>
+                <a:spcPts val="800"/>
               </a:spcAft>
             </a:pPr>
             <a:r>
-              <a:rPr sz="1250" b="1" i="0">
+              <a:rPr sz="1300" b="1" i="0">
                 <a:solidFill>
                   <a:srgbClr val="0B2545"/>
                 </a:solidFill>
@@ -6567,7 +6567,7 @@
               <a:t>AI-assisted closed-loop tracker:  </a:t>
             </a:r>
             <a:r>
-              <a:rPr sz="1250" b="0" i="0">
+              <a:rPr sz="1300" b="0" i="0">
                 <a:solidFill>
                   <a:srgbClr val="0B2545"/>
                 </a:solidFill>
@@ -6579,11 +6579,11 @@
           <a:p>
             <a:pPr>
               <a:spcAft>
-                <a:spcPts val="700"/>
+                <a:spcPts val="800"/>
               </a:spcAft>
             </a:pPr>
             <a:r>
-              <a:rPr sz="1250" b="1" i="0">
+              <a:rPr sz="1300" b="1" i="0">
                 <a:solidFill>
                   <a:srgbClr val="0B2545"/>
                 </a:solidFill>
@@ -6592,7 +6592,7 @@
               <a:t>Addresses the problem exactly:  </a:t>
             </a:r>
             <a:r>
-              <a:rPr sz="1250" b="0" i="0">
+              <a:rPr sz="1300" b="0" i="0">
                 <a:solidFill>
                   <a:srgbClr val="0B2545"/>
                 </a:solidFill>
@@ -6604,11 +6604,11 @@
           <a:p>
             <a:pPr>
               <a:spcAft>
-                <a:spcPts val="700"/>
+                <a:spcPts val="800"/>
               </a:spcAft>
             </a:pPr>
             <a:r>
-              <a:rPr sz="1250" b="1" i="0">
+              <a:rPr sz="1300" b="1" i="0">
                 <a:solidFill>
                   <a:srgbClr val="0B2545"/>
                 </a:solidFill>
@@ -6617,7 +6617,7 @@
               <a:t>Innovation:  </a:t>
             </a:r>
             <a:r>
-              <a:rPr sz="1250" b="0" i="0">
+              <a:rPr sz="1300" b="0" i="0">
                 <a:solidFill>
                   <a:srgbClr val="0B2545"/>
                 </a:solidFill>
@@ -6629,11 +6629,11 @@
           <a:p>
             <a:pPr>
               <a:spcAft>
-                <a:spcPts val="700"/>
+                <a:spcPts val="800"/>
               </a:spcAft>
             </a:pPr>
             <a:r>
-              <a:rPr sz="1250" b="1" i="0">
+              <a:rPr sz="1300" b="1" i="0">
                 <a:solidFill>
                   <a:srgbClr val="0B2545"/>
                 </a:solidFill>
@@ -6642,13 +6642,13 @@
               <a:t>Not a concept — already built:  </a:t>
             </a:r>
             <a:r>
-              <a:rPr sz="1250" b="0" i="0">
+              <a:rPr sz="1300" b="0" i="0">
                 <a:solidFill>
                   <a:srgbClr val="0B2545"/>
                 </a:solidFill>
                 <a:latin typeface="Arial"/>
               </a:rPr>
-              <a:t>GUI console, standalone app, 73 automated tests, full performance reports.</a:t>
+              <a:t>GUI console, standalone app, 73 automated tests, full performance reports — everything on this slide is measured, not projected.</a:t>
             </a:r>
           </a:p>
         </p:txBody>
@@ -6940,28 +6940,50 @@
           </a:bodyPr>
           <a:lstStyle/>
           <a:p>
-            <a:pPr>
-              <a:spcAft>
-                <a:spcPts val="400"/>
-              </a:spcAft>
-            </a:pPr>
-            <a:r>
-              <a:rPr sz="1150" b="1" i="0">
+            <a:r>
+              <a:rPr sz="1200" b="1" i="0">
                 <a:solidFill>
                   <a:srgbClr val="0B2545"/>
                 </a:solidFill>
                 <a:latin typeface="Arial"/>
               </a:rPr>
-              <a:t>Median pointing error 207 µrad </a:t>
-            </a:r>
-            <a:r>
-              <a:rPr sz="1150" b="0" i="0">
+              <a:t>Median pointing error </a:t>
+            </a:r>
+            <a:r>
+              <a:rPr sz="1300" b="1" i="0">
+                <a:solidFill>
+                  <a:srgbClr val="0E7C99"/>
+                </a:solidFill>
+                <a:latin typeface="Arial"/>
+              </a:rPr>
+              <a:t>207 µrad</a:t>
+            </a:r>
+            <a:r>
+              <a:rPr sz="1200" b="0" i="0">
                 <a:solidFill>
                   <a:srgbClr val="0B2545"/>
                 </a:solidFill>
                 <a:latin typeface="Arial"/>
               </a:rPr>
-              <a:t>— beacon kept inside the field of view 100% of the pass.</a:t>
+              <a:t> — beacon kept inside the field of view </a:t>
+            </a:r>
+            <a:r>
+              <a:rPr sz="1300" b="1" i="0">
+                <a:solidFill>
+                  <a:srgbClr val="1F8A5B"/>
+                </a:solidFill>
+                <a:latin typeface="Arial"/>
+              </a:rPr>
+              <a:t>100%</a:t>
+            </a:r>
+            <a:r>
+              <a:rPr sz="1200" b="0" i="0">
+                <a:solidFill>
+                  <a:srgbClr val="0B2545"/>
+                </a:solidFill>
+                <a:latin typeface="Arial"/>
+              </a:rPr>
+              <a:t> of the pass.</a:t>
             </a:r>
           </a:p>
         </p:txBody>
@@ -7322,8 +7344,8 @@
         </p:nvSpPr>
         <p:spPr>
           <a:xfrm>
-            <a:off x="384048" y="1517904"/>
-            <a:ext cx="11430000" cy="566928"/>
+            <a:off x="384048" y="1481328"/>
+            <a:ext cx="11430000" cy="658368"/>
           </a:xfrm>
           <a:prstGeom prst="rect">
             <a:avLst/>
@@ -7336,13 +7358,8 @@
           </a:bodyPr>
           <a:lstStyle/>
           <a:p>
-            <a:pPr>
-              <a:spcAft>
-                <a:spcPts val="400"/>
-              </a:spcAft>
-            </a:pPr>
-            <a:r>
-              <a:rPr sz="1200" b="1" i="0">
+            <a:r>
+              <a:rPr sz="1300" b="1" i="0">
                 <a:solidFill>
                   <a:srgbClr val="0B2545"/>
                 </a:solidFill>
@@ -7351,13 +7368,42 @@
               <a:t>Stack:  </a:t>
             </a:r>
             <a:r>
-              <a:rPr sz="1200" b="0" i="0">
+              <a:rPr sz="1250" b="0" i="0">
                 <a:solidFill>
                   <a:srgbClr val="0B2545"/>
                 </a:solidFill>
                 <a:latin typeface="Arial"/>
               </a:rPr>
-              <a:t>Python 3.11 · NumPy · OpenCV · PySide6 + pyqtgraph GUI · SGP4 real orbits · from-scratch NumPy neural net · PyInstaller one-click app · pytest (73 tests) · GitHub CI. 100% open source — zero licensing cost.</a:t>
+              <a:t>Python 3.11 · NumPy · OpenCV · PySide6 + pyqtgraph GUI · SGP4 real orbits · from-scratch NumPy neural net · PyInstaller app · pytest (</a:t>
+            </a:r>
+            <a:r>
+              <a:rPr sz="1250" b="1" i="0">
+                <a:solidFill>
+                  <a:srgbClr val="1F8A5B"/>
+                </a:solidFill>
+                <a:latin typeface="Arial"/>
+              </a:rPr>
+              <a:t>73 tests</a:t>
+            </a:r>
+            <a:r>
+              <a:rPr sz="1250" b="0" i="0">
+                <a:solidFill>
+                  <a:srgbClr val="0B2545"/>
+                </a:solidFill>
+                <a:latin typeface="Arial"/>
+              </a:rPr>
+              <a:t>) · GitHub CI</a:t>
+            </a:r>
+          </a:p>
+          <a:p>
+            <a:r>
+              <a:rPr sz="1100" b="0" i="1">
+                <a:solidFill>
+                  <a:srgbClr val="5A6472"/>
+                </a:solidFill>
+                <a:latin typeface="Arial"/>
+              </a:rPr>
+              <a:t>100% open source — zero licensing cost, runs on any laptop</a:t>
             </a:r>
           </a:p>
         </p:txBody>
@@ -8182,7 +8228,51 @@
       </p:sp>
       <p:sp>
         <p:nvSpPr>
-          <p:cNvPr id="17426" name="Rounded Rectangle 17425"/>
+          <p:cNvPr id="17426" name="Right Arrow 17425"/>
+          <p:cNvSpPr/>
+          <p:nvPr/>
+        </p:nvSpPr>
+        <p:spPr>
+          <a:xfrm>
+            <a:off x="1709928" y="4352544"/>
+            <a:ext cx="155448" cy="128016"/>
+          </a:xfrm>
+          <a:prstGeom prst="rightArrow">
+            <a:avLst/>
+          </a:prstGeom>
+          <a:solidFill>
+            <a:srgbClr val="5A6472"/>
+          </a:solidFill>
+          <a:ln>
+            <a:noFill/>
+          </a:ln>
+          <a:effectLst/>
+        </p:spPr>
+        <p:style>
+          <a:lnRef idx="1">
+            <a:schemeClr val="accent1"/>
+          </a:lnRef>
+          <a:fillRef idx="3">
+            <a:schemeClr val="accent1"/>
+          </a:fillRef>
+          <a:effectRef idx="2">
+            <a:schemeClr val="accent1"/>
+          </a:effectRef>
+          <a:fontRef idx="minor">
+            <a:schemeClr val="lt1"/>
+          </a:fontRef>
+        </p:style>
+        <p:txBody>
+          <a:bodyPr rtlCol="0" anchor="ctr"/>
+          <a:lstStyle/>
+          <a:p>
+            <a:pPr algn="ctr"/>
+          </a:p>
+        </p:txBody>
+      </p:sp>
+      <p:sp>
+        <p:nvSpPr>
+          <p:cNvPr id="17427" name="Rounded Rectangle 17426"/>
           <p:cNvSpPr/>
           <p:nvPr/>
         </p:nvSpPr>
@@ -8237,7 +8327,51 @@
       </p:sp>
       <p:sp>
         <p:nvSpPr>
-          <p:cNvPr id="17427" name="Rounded Rectangle 17426"/>
+          <p:cNvPr id="17428" name="Right Arrow 17427"/>
+          <p:cNvSpPr/>
+          <p:nvPr/>
+        </p:nvSpPr>
+        <p:spPr>
+          <a:xfrm>
+            <a:off x="3191256" y="4352544"/>
+            <a:ext cx="155448" cy="128016"/>
+          </a:xfrm>
+          <a:prstGeom prst="rightArrow">
+            <a:avLst/>
+          </a:prstGeom>
+          <a:solidFill>
+            <a:srgbClr val="5A6472"/>
+          </a:solidFill>
+          <a:ln>
+            <a:noFill/>
+          </a:ln>
+          <a:effectLst/>
+        </p:spPr>
+        <p:style>
+          <a:lnRef idx="1">
+            <a:schemeClr val="accent1"/>
+          </a:lnRef>
+          <a:fillRef idx="3">
+            <a:schemeClr val="accent1"/>
+          </a:fillRef>
+          <a:effectRef idx="2">
+            <a:schemeClr val="accent1"/>
+          </a:effectRef>
+          <a:fontRef idx="minor">
+            <a:schemeClr val="lt1"/>
+          </a:fontRef>
+        </p:style>
+        <p:txBody>
+          <a:bodyPr rtlCol="0" anchor="ctr"/>
+          <a:lstStyle/>
+          <a:p>
+            <a:pPr algn="ctr"/>
+          </a:p>
+        </p:txBody>
+      </p:sp>
+      <p:sp>
+        <p:nvSpPr>
+          <p:cNvPr id="17429" name="Rounded Rectangle 17428"/>
           <p:cNvSpPr/>
           <p:nvPr/>
         </p:nvSpPr>
@@ -8292,7 +8426,51 @@
       </p:sp>
       <p:sp>
         <p:nvSpPr>
-          <p:cNvPr id="17428" name="Rounded Rectangle 17427"/>
+          <p:cNvPr id="17430" name="Right Arrow 17429"/>
+          <p:cNvSpPr/>
+          <p:nvPr/>
+        </p:nvSpPr>
+        <p:spPr>
+          <a:xfrm>
+            <a:off x="4672584" y="4352544"/>
+            <a:ext cx="155448" cy="128016"/>
+          </a:xfrm>
+          <a:prstGeom prst="rightArrow">
+            <a:avLst/>
+          </a:prstGeom>
+          <a:solidFill>
+            <a:srgbClr val="5A6472"/>
+          </a:solidFill>
+          <a:ln>
+            <a:noFill/>
+          </a:ln>
+          <a:effectLst/>
+        </p:spPr>
+        <p:style>
+          <a:lnRef idx="1">
+            <a:schemeClr val="accent1"/>
+          </a:lnRef>
+          <a:fillRef idx="3">
+            <a:schemeClr val="accent1"/>
+          </a:fillRef>
+          <a:effectRef idx="2">
+            <a:schemeClr val="accent1"/>
+          </a:effectRef>
+          <a:fontRef idx="minor">
+            <a:schemeClr val="lt1"/>
+          </a:fontRef>
+        </p:style>
+        <p:txBody>
+          <a:bodyPr rtlCol="0" anchor="ctr"/>
+          <a:lstStyle/>
+          <a:p>
+            <a:pPr algn="ctr"/>
+          </a:p>
+        </p:txBody>
+      </p:sp>
+      <p:sp>
+        <p:nvSpPr>
+          <p:cNvPr id="17431" name="Rounded Rectangle 17430"/>
           <p:cNvSpPr/>
           <p:nvPr/>
         </p:nvSpPr>
@@ -8347,7 +8525,51 @@
       </p:sp>
       <p:sp>
         <p:nvSpPr>
-          <p:cNvPr id="17429" name="Rounded Rectangle 17428"/>
+          <p:cNvPr id="17432" name="Right Arrow 17431"/>
+          <p:cNvSpPr/>
+          <p:nvPr/>
+        </p:nvSpPr>
+        <p:spPr>
+          <a:xfrm>
+            <a:off x="6153912" y="4352544"/>
+            <a:ext cx="155448" cy="128016"/>
+          </a:xfrm>
+          <a:prstGeom prst="rightArrow">
+            <a:avLst/>
+          </a:prstGeom>
+          <a:solidFill>
+            <a:srgbClr val="5A6472"/>
+          </a:solidFill>
+          <a:ln>
+            <a:noFill/>
+          </a:ln>
+          <a:effectLst/>
+        </p:spPr>
+        <p:style>
+          <a:lnRef idx="1">
+            <a:schemeClr val="accent1"/>
+          </a:lnRef>
+          <a:fillRef idx="3">
+            <a:schemeClr val="accent1"/>
+          </a:fillRef>
+          <a:effectRef idx="2">
+            <a:schemeClr val="accent1"/>
+          </a:effectRef>
+          <a:fontRef idx="minor">
+            <a:schemeClr val="lt1"/>
+          </a:fontRef>
+        </p:style>
+        <p:txBody>
+          <a:bodyPr rtlCol="0" anchor="ctr"/>
+          <a:lstStyle/>
+          <a:p>
+            <a:pPr algn="ctr"/>
+          </a:p>
+        </p:txBody>
+      </p:sp>
+      <p:sp>
+        <p:nvSpPr>
+          <p:cNvPr id="17433" name="Rounded Rectangle 17432"/>
           <p:cNvSpPr/>
           <p:nvPr/>
         </p:nvSpPr>
@@ -8402,7 +8624,7 @@
       </p:sp>
       <p:sp>
         <p:nvSpPr>
-          <p:cNvPr id="17430" name="TextBox 17429"/>
+          <p:cNvPr id="17434" name="TextBox 17433"/>
           <p:cNvSpPr txBox="1"/>
           <p:nvPr/>
         </p:nvSpPr>
@@ -8450,7 +8672,7 @@
       </p:sp>
       <p:pic>
         <p:nvPicPr>
-          <p:cNvPr id="17431" name="Picture 17430" descr="vid_frame.png"/>
+          <p:cNvPr id="17435" name="Picture 17434" descr="vid_frame.png"/>
           <p:cNvPicPr>
             <a:picLocks noChangeAspect="1"/>
           </p:cNvPicPr>
@@ -8479,7 +8701,7 @@
       </p:pic>
       <p:sp>
         <p:nvSpPr>
-          <p:cNvPr id="17432" name="TextBox 17431"/>
+          <p:cNvPr id="17436" name="TextBox 17435"/>
           <p:cNvSpPr txBox="1"/>
           <p:nvPr/>
         </p:nvSpPr>
@@ -9137,7 +9359,7 @@
               </a:spcAft>
             </a:pPr>
             <a:r>
-              <a:rPr sz="1200" b="1" i="0">
+              <a:rPr sz="1250" b="1" i="0">
                 <a:solidFill>
                   <a:srgbClr val="1F8A5B"/>
                 </a:solidFill>
@@ -9146,7 +9368,7 @@
               <a:t>• </a:t>
             </a:r>
             <a:r>
-              <a:rPr sz="1200" b="0" i="0">
+              <a:rPr sz="1250" b="0" i="0">
                 <a:solidFill>
                   <a:srgbClr val="0B2545"/>
                 </a:solidFill>
@@ -9162,7 +9384,7 @@
               </a:spcAft>
             </a:pPr>
             <a:r>
-              <a:rPr sz="1200" b="1" i="0">
+              <a:rPr sz="1250" b="1" i="0">
                 <a:solidFill>
                   <a:srgbClr val="1F8A5B"/>
                 </a:solidFill>
@@ -9171,7 +9393,7 @@
               <a:t>• </a:t>
             </a:r>
             <a:r>
-              <a:rPr sz="1200" b="0" i="0">
+              <a:rPr sz="1250" b="0" i="0">
                 <a:solidFill>
                   <a:srgbClr val="0B2545"/>
                 </a:solidFill>
@@ -9187,7 +9409,7 @@
               </a:spcAft>
             </a:pPr>
             <a:r>
-              <a:rPr sz="1200" b="1" i="0">
+              <a:rPr sz="1250" b="1" i="0">
                 <a:solidFill>
                   <a:srgbClr val="1F8A5B"/>
                 </a:solidFill>
@@ -9196,7 +9418,7 @@
               <a:t>• </a:t>
             </a:r>
             <a:r>
-              <a:rPr sz="1200" b="0" i="0">
+              <a:rPr sz="1250" b="0" i="0">
                 <a:solidFill>
                   <a:srgbClr val="0B2545"/>
                 </a:solidFill>
@@ -9212,7 +9434,7 @@
               </a:spcAft>
             </a:pPr>
             <a:r>
-              <a:rPr sz="1200" b="1" i="0">
+              <a:rPr sz="1250" b="1" i="0">
                 <a:solidFill>
                   <a:srgbClr val="1F8A5B"/>
                 </a:solidFill>
@@ -9221,7 +9443,7 @@
               <a:t>• </a:t>
             </a:r>
             <a:r>
-              <a:rPr sz="1200" b="0" i="0">
+              <a:rPr sz="1250" b="0" i="0">
                 <a:solidFill>
                   <a:srgbClr val="0B2545"/>
                 </a:solidFill>
@@ -9335,7 +9557,7 @@
               </a:spcAft>
             </a:pPr>
             <a:r>
-              <a:rPr sz="1200" b="1" i="0">
+              <a:rPr sz="1250" b="1" i="0">
                 <a:solidFill>
                   <a:srgbClr val="B06A00"/>
                 </a:solidFill>
@@ -9344,7 +9566,7 @@
               <a:t>• </a:t>
             </a:r>
             <a:r>
-              <a:rPr sz="1200" b="0" i="0">
+              <a:rPr sz="1250" b="0" i="0">
                 <a:solidFill>
                   <a:srgbClr val="0B2545"/>
                 </a:solidFill>
@@ -9360,7 +9582,7 @@
               </a:spcAft>
             </a:pPr>
             <a:r>
-              <a:rPr sz="1200" b="1" i="0">
+              <a:rPr sz="1250" b="1" i="0">
                 <a:solidFill>
                   <a:srgbClr val="B06A00"/>
                 </a:solidFill>
@@ -9369,7 +9591,7 @@
               <a:t>• </a:t>
             </a:r>
             <a:r>
-              <a:rPr sz="1200" b="0" i="0">
+              <a:rPr sz="1250" b="0" i="0">
                 <a:solidFill>
                   <a:srgbClr val="0B2545"/>
                 </a:solidFill>
@@ -9385,7 +9607,7 @@
               </a:spcAft>
             </a:pPr>
             <a:r>
-              <a:rPr sz="1200" b="1" i="0">
+              <a:rPr sz="1250" b="1" i="0">
                 <a:solidFill>
                   <a:srgbClr val="B06A00"/>
                 </a:solidFill>
@@ -9394,7 +9616,7 @@
               <a:t>• </a:t>
             </a:r>
             <a:r>
-              <a:rPr sz="1200" b="0" i="0">
+              <a:rPr sz="1250" b="0" i="0">
                 <a:solidFill>
                   <a:srgbClr val="0B2545"/>
                 </a:solidFill>
@@ -9410,7 +9632,7 @@
               </a:spcAft>
             </a:pPr>
             <a:r>
-              <a:rPr sz="1200" b="1" i="0">
+              <a:rPr sz="1250" b="1" i="0">
                 <a:solidFill>
                   <a:srgbClr val="B06A00"/>
                 </a:solidFill>
@@ -9419,7 +9641,7 @@
               <a:t>• </a:t>
             </a:r>
             <a:r>
-              <a:rPr sz="1200" b="0" i="0">
+              <a:rPr sz="1250" b="0" i="0">
                 <a:solidFill>
                   <a:srgbClr val="0B2545"/>
                 </a:solidFill>
@@ -9533,7 +9755,7 @@
               </a:spcAft>
             </a:pPr>
             <a:r>
-              <a:rPr sz="1200" b="1" i="0">
+              <a:rPr sz="1250" b="1" i="0">
                 <a:solidFill>
                   <a:srgbClr val="0E7C99"/>
                 </a:solidFill>
@@ -9542,7 +9764,7 @@
               <a:t>• </a:t>
             </a:r>
             <a:r>
-              <a:rPr sz="1200" b="0" i="0">
+              <a:rPr sz="1250" b="0" i="0">
                 <a:solidFill>
                   <a:srgbClr val="0B2545"/>
                 </a:solidFill>
@@ -9558,7 +9780,7 @@
               </a:spcAft>
             </a:pPr>
             <a:r>
-              <a:rPr sz="1200" b="1" i="0">
+              <a:rPr sz="1250" b="1" i="0">
                 <a:solidFill>
                   <a:srgbClr val="0E7C99"/>
                 </a:solidFill>
@@ -9567,7 +9789,7 @@
               <a:t>• </a:t>
             </a:r>
             <a:r>
-              <a:rPr sz="1200" b="0" i="0">
+              <a:rPr sz="1250" b="0" i="0">
                 <a:solidFill>
                   <a:srgbClr val="0B2545"/>
                 </a:solidFill>
@@ -9583,7 +9805,7 @@
               </a:spcAft>
             </a:pPr>
             <a:r>
-              <a:rPr sz="1200" b="1" i="0">
+              <a:rPr sz="1250" b="1" i="0">
                 <a:solidFill>
                   <a:srgbClr val="0E7C99"/>
                 </a:solidFill>
@@ -9592,7 +9814,7 @@
               <a:t>• </a:t>
             </a:r>
             <a:r>
-              <a:rPr sz="1200" b="0" i="0">
+              <a:rPr sz="1250" b="0" i="0">
                 <a:solidFill>
                   <a:srgbClr val="0B2545"/>
                 </a:solidFill>
@@ -9608,7 +9830,7 @@
               </a:spcAft>
             </a:pPr>
             <a:r>
-              <a:rPr sz="1200" b="1" i="0">
+              <a:rPr sz="1250" b="1" i="0">
                 <a:solidFill>
                   <a:srgbClr val="0E7C99"/>
                 </a:solidFill>
@@ -9617,7 +9839,7 @@
               <a:t>• </a:t>
             </a:r>
             <a:r>
-              <a:rPr sz="1200" b="0" i="0">
+              <a:rPr sz="1250" b="0" i="0">
                 <a:solidFill>
                   <a:srgbClr val="0B2545"/>
                 </a:solidFill>
@@ -10478,13 +10700,8 @@
             </a:r>
           </a:p>
           <a:p>
-            <a:pPr>
-              <a:spcAft>
-                <a:spcPts val="500"/>
-              </a:spcAft>
-            </a:pPr>
-            <a:r>
-              <a:rPr sz="1200" b="1" i="0">
+            <a:r>
+              <a:rPr sz="1250" b="1" i="0">
                 <a:solidFill>
                   <a:srgbClr val="0B2545"/>
                 </a:solidFill>
@@ -10493,13 +10710,49 @@
               <a:t>The number that matters:  </a:t>
             </a:r>
             <a:r>
-              <a:rPr sz="1200" b="0" i="0">
+              <a:rPr sz="1250" b="0" i="0">
                 <a:solidFill>
                   <a:srgbClr val="0B2545"/>
                 </a:solidFill>
                 <a:latin typeface="Arial"/>
               </a:rPr>
-              <a:t>on a tracked ISS pass our coarse stage + a modelled fine stage closes the optical link 99.3% of the time vs 14.7% without — measured, not asserted.</a:t>
+              <a:t>on a tracked ISS pass, coarse stage + modelled fine stage closes the optical link </a:t>
+            </a:r>
+            <a:r>
+              <a:rPr sz="1400" b="1" i="0">
+                <a:solidFill>
+                  <a:srgbClr val="1F8A5B"/>
+                </a:solidFill>
+                <a:latin typeface="Arial"/>
+              </a:rPr>
+              <a:t>99.3%</a:t>
+            </a:r>
+            <a:r>
+              <a:rPr sz="1250" b="0" i="0">
+                <a:solidFill>
+                  <a:srgbClr val="0B2545"/>
+                </a:solidFill>
+                <a:latin typeface="Arial"/>
+              </a:rPr>
+              <a:t> of the time vs </a:t>
+            </a:r>
+            <a:r>
+              <a:rPr sz="1400" b="1" i="0">
+                <a:solidFill>
+                  <a:srgbClr val="9C2E23"/>
+                </a:solidFill>
+                <a:latin typeface="Arial"/>
+              </a:rPr>
+              <a:t>14.7%</a:t>
+            </a:r>
+            <a:r>
+              <a:rPr sz="1250" b="0" i="0">
+                <a:solidFill>
+                  <a:srgbClr val="0B2545"/>
+                </a:solidFill>
+                <a:latin typeface="Arial"/>
+              </a:rPr>
+              <a:t> without — measured, not asserted.</a:t>
             </a:r>
           </a:p>
         </p:txBody>

--- a/docs/submission/ZeroDrift_SIH26169.pptx
+++ b/docs/submission/ZeroDrift_SIH26169.pptx
@@ -6206,8 +6206,8 @@
         </p:nvSpPr>
         <p:spPr bwMode="auto">
           <a:xfrm>
-            <a:off x="1755648" y="914400"/>
-            <a:ext cx="10058400" cy="786384"/>
+            <a:off x="1755648" y="1170432"/>
+            <a:ext cx="10058400" cy="603504"/>
           </a:xfrm>
           <a:prstGeom prst="rect">
             <a:avLst/>
@@ -6234,7 +6234,7 @@
               <a:buChar char="v"/>
             </a:pPr>
             <a:r>
-              <a:rPr sz="1050" b="0" i="1">
+              <a:rPr sz="950" b="0" i="1">
                 <a:solidFill>
                   <a:srgbClr val="5A6472"/>
                 </a:solidFill>
@@ -6259,7 +6259,7 @@
               <a:buChar char="•"/>
             </a:pPr>
             <a:r>
-              <a:rPr sz="1050" b="0" i="1">
+              <a:rPr sz="950" b="0" i="1">
                 <a:solidFill>
                   <a:srgbClr val="5A6472"/>
                 </a:solidFill>
@@ -6277,7 +6277,7 @@
               <a:buChar char="•"/>
             </a:pPr>
             <a:r>
-              <a:rPr sz="1050" b="0" i="1">
+              <a:rPr sz="950" b="0" i="1">
                 <a:solidFill>
                   <a:srgbClr val="5A6472"/>
                 </a:solidFill>
@@ -6295,7 +6295,7 @@
               <a:buChar char="•"/>
             </a:pPr>
             <a:r>
-              <a:rPr sz="1050" b="0" i="1">
+              <a:rPr sz="950" b="0" i="1">
                 <a:solidFill>
                   <a:srgbClr val="5A6472"/>
                 </a:solidFill>
@@ -6479,7 +6479,7 @@
         </p:nvSpPr>
         <p:spPr>
           <a:xfrm>
-            <a:off x="384048" y="1810512"/>
+            <a:off x="384048" y="1865376"/>
             <a:ext cx="6400800" cy="365760"/>
           </a:xfrm>
           <a:prstGeom prst="rect">
@@ -6513,8 +6513,8 @@
         </p:nvSpPr>
         <p:spPr>
           <a:xfrm>
-            <a:off x="384048" y="2286000"/>
-            <a:ext cx="6309360" cy="2926080"/>
+            <a:off x="384048" y="2340864"/>
+            <a:ext cx="6309360" cy="2834640"/>
           </a:xfrm>
           <a:prstGeom prst="rect">
             <a:avLst/>
@@ -7114,8 +7114,8 @@
         </p:nvSpPr>
         <p:spPr bwMode="auto">
           <a:xfrm>
-            <a:off x="1755648" y="914400"/>
-            <a:ext cx="10058400" cy="566928"/>
+            <a:off x="1755648" y="1170432"/>
+            <a:ext cx="10058400" cy="329184"/>
           </a:xfrm>
           <a:prstGeom prst="rect">
             <a:avLst/>
@@ -7142,7 +7142,7 @@
               <a:buChar char="•"/>
             </a:pPr>
             <a:r>
-              <a:rPr sz="1050" b="0" i="1">
+              <a:rPr sz="950" b="0" i="1">
                 <a:solidFill>
                   <a:srgbClr val="5A6472"/>
                 </a:solidFill>
@@ -7160,7 +7160,7 @@
               <a:buChar char="•"/>
             </a:pPr>
             <a:r>
-              <a:rPr sz="1050" b="0" i="1">
+              <a:rPr sz="950" b="0" i="1">
                 <a:solidFill>
                   <a:srgbClr val="5A6472"/>
                 </a:solidFill>
@@ -7344,7 +7344,7 @@
         </p:nvSpPr>
         <p:spPr>
           <a:xfrm>
-            <a:off x="384048" y="1481328"/>
+            <a:off x="384048" y="1645920"/>
             <a:ext cx="11430000" cy="658368"/>
           </a:xfrm>
           <a:prstGeom prst="rect">
@@ -8875,8 +8875,8 @@
         </p:nvSpPr>
         <p:spPr bwMode="auto">
           <a:xfrm>
-            <a:off x="1755648" y="914400"/>
-            <a:ext cx="10058400" cy="786384"/>
+            <a:off x="1755648" y="1170432"/>
+            <a:ext cx="10058400" cy="475488"/>
           </a:xfrm>
           <a:prstGeom prst="rect">
             <a:avLst/>
@@ -8913,7 +8913,7 @@
               <a:defRPr/>
             </a:pPr>
             <a:r>
-              <a:rPr sz="1050" b="0" i="1">
+              <a:rPr sz="950" b="0" i="1">
                 <a:solidFill>
                   <a:srgbClr val="5A6472"/>
                 </a:solidFill>
@@ -8955,7 +8955,7 @@
               <a:defRPr/>
             </a:pPr>
             <a:r>
-              <a:rPr sz="1050" b="0" i="1">
+              <a:rPr sz="950" b="0" i="1">
                 <a:solidFill>
                   <a:srgbClr val="5A6472"/>
                 </a:solidFill>
@@ -8983,7 +8983,7 @@
               <a:defRPr/>
             </a:pPr>
             <a:r>
-              <a:rPr sz="1050" b="0" i="1">
+              <a:rPr sz="950" b="0" i="1">
                 <a:solidFill>
                   <a:srgbClr val="5A6472"/>
                 </a:solidFill>
@@ -10044,8 +10044,8 @@
         </p:nvSpPr>
         <p:spPr bwMode="auto">
           <a:xfrm>
-            <a:off x="1755648" y="914400"/>
-            <a:ext cx="10058400" cy="603504"/>
+            <a:off x="1755648" y="1170432"/>
+            <a:ext cx="10058400" cy="329184"/>
           </a:xfrm>
           <a:prstGeom prst="rect">
             <a:avLst/>
@@ -10082,7 +10082,7 @@
               <a:defRPr/>
             </a:pPr>
             <a:r>
-              <a:rPr sz="1050" b="0" i="1">
+              <a:rPr sz="950" b="0" i="1">
                 <a:solidFill>
                   <a:srgbClr val="5A6472"/>
                 </a:solidFill>
@@ -10110,7 +10110,7 @@
               <a:defRPr/>
             </a:pPr>
             <a:r>
-              <a:rPr sz="1050" b="0" i="1">
+              <a:rPr sz="950" b="0" i="1">
                 <a:solidFill>
                   <a:srgbClr val="5A6472"/>
                 </a:solidFill>
@@ -10903,8 +10903,8 @@
         </p:nvSpPr>
         <p:spPr bwMode="auto">
           <a:xfrm>
-            <a:off x="1755648" y="914400"/>
-            <a:ext cx="10058400" cy="457200"/>
+            <a:off x="1755648" y="1170432"/>
+            <a:ext cx="10058400" cy="201168"/>
           </a:xfrm>
           <a:prstGeom prst="rect">
             <a:avLst/>
@@ -10941,7 +10941,7 @@
               <a:defRPr/>
             </a:pPr>
             <a:r>
-              <a:rPr sz="1050" b="0" i="1">
+              <a:rPr sz="950" b="0" i="1">
                 <a:solidFill>
                   <a:srgbClr val="5A6472"/>
                 </a:solidFill>

--- a/docs/submission/ZeroDrift_SIH26169.pptx
+++ b/docs/submission/ZeroDrift_SIH26169.pptx
@@ -6044,7 +6044,7 @@
       </p:pic>
       <p:pic>
         <p:nvPicPr>
-          <p:cNvPr id="38" name="Picture 37" descr="logo_full.png"/>
+          <p:cNvPr id="38" name="Picture 37" descr="logo_banner.png"/>
           <p:cNvPicPr>
             <a:picLocks noChangeAspect="1"/>
           </p:cNvPicPr>
@@ -6058,8 +6058,8 @@
         </p:blipFill>
         <p:spPr>
           <a:xfrm>
-            <a:off x="6035040" y="5989320"/>
-            <a:ext cx="2409444" cy="777240"/>
+            <a:off x="5897880" y="5742432"/>
+            <a:ext cx="2251538" cy="960120"/>
           </a:xfrm>
           <a:prstGeom prst="rect">
             <a:avLst/>
@@ -6374,70 +6374,6 @@
                 <a:schemeClr val="bg1"/>
               </a:solidFill>
             </a:endParaRPr>
-          </a:p>
-        </p:txBody>
-      </p:sp>
-      <p:sp>
-        <p:nvSpPr>
-          <p:cNvPr id="10" name="Oval 9" descr="Your startup LOGO">
-            <a:extLst>
-              <a:ext uri="{FF2B5EF4-FFF2-40B4-BE49-F238E27FC236}">
-                <a16:creationId xmlns:a16="http://schemas.microsoft.com/office/drawing/2014/main" id="{5DBCE864-823D-4A13-9607-5DA1F0ED5FB8}"/>
-              </a:ext>
-              <a:ext uri="{C183D7F6-B498-43B3-948B-1728B52AA6E4}">
-                <adec:decorative xmlns:adec="http://schemas.microsoft.com/office/drawing/2017/decorative" xmlns="" val="0"/>
-              </a:ext>
-            </a:extLst>
-          </p:cNvPr>
-          <p:cNvSpPr/>
-          <p:nvPr/>
-        </p:nvSpPr>
-        <p:spPr>
-          <a:xfrm>
-            <a:off x="329773" y="252246"/>
-            <a:ext cx="1251857" cy="807334"/>
-          </a:xfrm>
-          <a:prstGeom prst="ellipse">
-            <a:avLst/>
-          </a:prstGeom>
-          <a:solidFill>
-            <a:srgbClr val="0B2545"/>
-          </a:solidFill>
-          <a:ln w="15875">
-            <a:solidFill>
-              <a:srgbClr val="0E7C99"/>
-            </a:solidFill>
-          </a:ln>
-        </p:spPr>
-        <p:style>
-          <a:lnRef idx="2">
-            <a:schemeClr val="accent4"/>
-          </a:lnRef>
-          <a:fillRef idx="1">
-            <a:schemeClr val="lt1"/>
-          </a:fillRef>
-          <a:effectRef idx="0">
-            <a:schemeClr val="accent4"/>
-          </a:effectRef>
-          <a:fontRef idx="minor">
-            <a:schemeClr val="dk1"/>
-          </a:fontRef>
-        </p:style>
-        <p:txBody>
-          <a:bodyPr rtlCol="0" anchor="ctr"/>
-          <a:lstStyle/>
-          <a:p>
-            <a:pPr algn="ctr"/>
-            <a:r>
-              <a:rPr sz="1200" b="1" i="0">
-                <a:solidFill>
-                  <a:srgbClr val="FFFFFF"/>
-                </a:solidFill>
-                <a:latin typeface="Arial"/>
-              </a:rPr>
-              <a:t>ZeroDrift</a:t>
-            </a:r>
-            <a:endParaRPr lang="en-IN" dirty="0"/>
           </a:p>
         </p:txBody>
       </p:sp>
@@ -6471,9 +6407,76 @@
           </a:prstGeom>
         </p:spPr>
       </p:pic>
-      <p:sp>
-        <p:nvSpPr>
-          <p:cNvPr id="15363" name="TextBox 15362"/>
+      <p:pic>
+        <p:nvPicPr>
+          <p:cNvPr id="15363" name="Picture 15362" descr="logo_scope.png"/>
+          <p:cNvPicPr>
+            <a:picLocks noChangeAspect="1"/>
+          </p:cNvPicPr>
+          <p:nvPr/>
+        </p:nvPicPr>
+        <p:blipFill>
+          <a:blip r:embed="rId4"/>
+          <a:stretch>
+            <a:fillRect/>
+          </a:stretch>
+        </p:blipFill>
+        <p:spPr>
+          <a:xfrm>
+            <a:off x="310896" y="146304"/>
+            <a:ext cx="841248" cy="841248"/>
+          </a:xfrm>
+          <a:prstGeom prst="rect">
+            <a:avLst/>
+          </a:prstGeom>
+        </p:spPr>
+      </p:pic>
+      <p:sp>
+        <p:nvSpPr>
+          <p:cNvPr id="15364" name="TextBox 15363"/>
+          <p:cNvSpPr txBox="1"/>
+          <p:nvPr/>
+        </p:nvSpPr>
+        <p:spPr>
+          <a:xfrm>
+            <a:off x="1225296" y="365760"/>
+            <a:ext cx="1463040" cy="457200"/>
+          </a:xfrm>
+          <a:prstGeom prst="rect">
+            <a:avLst/>
+          </a:prstGeom>
+          <a:noFill/>
+        </p:spPr>
+        <p:txBody>
+          <a:bodyPr wrap="square" anchor="t" lIns="0" rIns="0" tIns="0" bIns="0">
+            <a:spAutoFit/>
+          </a:bodyPr>
+          <a:lstStyle/>
+          <a:p>
+            <a:r>
+              <a:rPr sz="1300" b="1" i="0">
+                <a:solidFill>
+                  <a:srgbClr val="0E7C99"/>
+                </a:solidFill>
+                <a:latin typeface="Arial"/>
+              </a:rPr>
+              <a:t>ZERO</a:t>
+            </a:r>
+            <a:r>
+              <a:rPr sz="1300" b="1" i="0">
+                <a:solidFill>
+                  <a:srgbClr val="0B2545"/>
+                </a:solidFill>
+                <a:latin typeface="Arial"/>
+              </a:rPr>
+              <a:t>DRIFT</a:t>
+            </a:r>
+          </a:p>
+        </p:txBody>
+      </p:sp>
+      <p:sp>
+        <p:nvSpPr>
+          <p:cNvPr id="15365" name="TextBox 15364"/>
           <p:cNvSpPr txBox="1"/>
           <p:nvPr/>
         </p:nvSpPr>
@@ -6507,7 +6510,7 @@
       </p:sp>
       <p:sp>
         <p:nvSpPr>
-          <p:cNvPr id="15364" name="TextBox 15363"/>
+          <p:cNvPr id="15366" name="TextBox 15365"/>
           <p:cNvSpPr txBox="1"/>
           <p:nvPr/>
         </p:nvSpPr>
@@ -6655,14 +6658,14 @@
       </p:sp>
       <p:pic>
         <p:nvPicPr>
-          <p:cNvPr id="15365" name="Picture 15364" descr="gui_shot.png"/>
+          <p:cNvPr id="15367" name="Picture 15366" descr="gui_shot.png"/>
           <p:cNvPicPr>
             <a:picLocks noChangeAspect="1"/>
           </p:cNvPicPr>
           <p:nvPr/>
         </p:nvPicPr>
         <p:blipFill>
-          <a:blip r:embed="rId4"/>
+          <a:blip r:embed="rId5"/>
           <a:stretch>
             <a:fillRect/>
           </a:stretch>
@@ -6684,7 +6687,7 @@
       </p:pic>
       <p:sp>
         <p:nvSpPr>
-          <p:cNvPr id="15366" name="TextBox 15365"/>
+          <p:cNvPr id="15368" name="TextBox 15367"/>
           <p:cNvSpPr txBox="1"/>
           <p:nvPr/>
         </p:nvSpPr>
@@ -6719,7 +6722,7 @@
       </p:sp>
       <p:sp>
         <p:nvSpPr>
-          <p:cNvPr id="15367" name="Rounded Rectangle 15366"/>
+          <p:cNvPr id="15369" name="Rounded Rectangle 15368"/>
           <p:cNvSpPr/>
           <p:nvPr/>
         </p:nvSpPr>
@@ -6786,7 +6789,7 @@
       </p:sp>
       <p:sp>
         <p:nvSpPr>
-          <p:cNvPr id="15368" name="Rounded Rectangle 15367"/>
+          <p:cNvPr id="15370" name="Rounded Rectangle 15369"/>
           <p:cNvSpPr/>
           <p:nvPr/>
         </p:nvSpPr>
@@ -6853,7 +6856,7 @@
       </p:sp>
       <p:sp>
         <p:nvSpPr>
-          <p:cNvPr id="15369" name="Rounded Rectangle 15368"/>
+          <p:cNvPr id="15371" name="Rounded Rectangle 15370"/>
           <p:cNvSpPr/>
           <p:nvPr/>
         </p:nvSpPr>
@@ -6920,7 +6923,7 @@
       </p:sp>
       <p:sp>
         <p:nvSpPr>
-          <p:cNvPr id="15370" name="TextBox 15369"/>
+          <p:cNvPr id="15372" name="TextBox 15371"/>
           <p:cNvSpPr txBox="1"/>
           <p:nvPr/>
         </p:nvSpPr>
@@ -7239,70 +7242,6 @@
                 <a:schemeClr val="bg1"/>
               </a:solidFill>
             </a:endParaRPr>
-          </a:p>
-        </p:txBody>
-      </p:sp>
-      <p:sp>
-        <p:nvSpPr>
-          <p:cNvPr id="11" name="Oval 10" descr="Your startup LOGO">
-            <a:extLst>
-              <a:ext uri="{FF2B5EF4-FFF2-40B4-BE49-F238E27FC236}">
-                <a16:creationId xmlns:a16="http://schemas.microsoft.com/office/drawing/2014/main" id="{5DBCE864-823D-4A13-9607-5DA1F0ED5FB8}"/>
-              </a:ext>
-              <a:ext uri="{C183D7F6-B498-43B3-948B-1728B52AA6E4}">
-                <adec:decorative xmlns:adec="http://schemas.microsoft.com/office/drawing/2017/decorative" xmlns="" val="0"/>
-              </a:ext>
-            </a:extLst>
-          </p:cNvPr>
-          <p:cNvSpPr/>
-          <p:nvPr/>
-        </p:nvSpPr>
-        <p:spPr>
-          <a:xfrm>
-            <a:off x="329773" y="252246"/>
-            <a:ext cx="1251857" cy="807334"/>
-          </a:xfrm>
-          <a:prstGeom prst="ellipse">
-            <a:avLst/>
-          </a:prstGeom>
-          <a:solidFill>
-            <a:srgbClr val="0B2545"/>
-          </a:solidFill>
-          <a:ln w="15875">
-            <a:solidFill>
-              <a:srgbClr val="0E7C99"/>
-            </a:solidFill>
-          </a:ln>
-        </p:spPr>
-        <p:style>
-          <a:lnRef idx="2">
-            <a:schemeClr val="accent4"/>
-          </a:lnRef>
-          <a:fillRef idx="1">
-            <a:schemeClr val="lt1"/>
-          </a:fillRef>
-          <a:effectRef idx="0">
-            <a:schemeClr val="accent4"/>
-          </a:effectRef>
-          <a:fontRef idx="minor">
-            <a:schemeClr val="dk1"/>
-          </a:fontRef>
-        </p:style>
-        <p:txBody>
-          <a:bodyPr rtlCol="0" anchor="ctr"/>
-          <a:lstStyle/>
-          <a:p>
-            <a:pPr algn="ctr"/>
-            <a:r>
-              <a:rPr sz="1200" b="1" i="0">
-                <a:solidFill>
-                  <a:srgbClr val="FFFFFF"/>
-                </a:solidFill>
-                <a:latin typeface="Arial"/>
-              </a:rPr>
-              <a:t>ZeroDrift</a:t>
-            </a:r>
-            <a:endParaRPr lang="en-IN" dirty="0"/>
           </a:p>
         </p:txBody>
       </p:sp>
@@ -7336,9 +7275,76 @@
           </a:prstGeom>
         </p:spPr>
       </p:pic>
-      <p:sp>
-        <p:nvSpPr>
-          <p:cNvPr id="17411" name="TextBox 17410"/>
+      <p:pic>
+        <p:nvPicPr>
+          <p:cNvPr id="17411" name="Picture 17410" descr="logo_scope.png"/>
+          <p:cNvPicPr>
+            <a:picLocks noChangeAspect="1"/>
+          </p:cNvPicPr>
+          <p:nvPr/>
+        </p:nvPicPr>
+        <p:blipFill>
+          <a:blip r:embed="rId4"/>
+          <a:stretch>
+            <a:fillRect/>
+          </a:stretch>
+        </p:blipFill>
+        <p:spPr>
+          <a:xfrm>
+            <a:off x="310896" y="146304"/>
+            <a:ext cx="841248" cy="841248"/>
+          </a:xfrm>
+          <a:prstGeom prst="rect">
+            <a:avLst/>
+          </a:prstGeom>
+        </p:spPr>
+      </p:pic>
+      <p:sp>
+        <p:nvSpPr>
+          <p:cNvPr id="17412" name="TextBox 17411"/>
+          <p:cNvSpPr txBox="1"/>
+          <p:nvPr/>
+        </p:nvSpPr>
+        <p:spPr>
+          <a:xfrm>
+            <a:off x="1225296" y="365760"/>
+            <a:ext cx="1463040" cy="457200"/>
+          </a:xfrm>
+          <a:prstGeom prst="rect">
+            <a:avLst/>
+          </a:prstGeom>
+          <a:noFill/>
+        </p:spPr>
+        <p:txBody>
+          <a:bodyPr wrap="square" anchor="t" lIns="0" rIns="0" tIns="0" bIns="0">
+            <a:spAutoFit/>
+          </a:bodyPr>
+          <a:lstStyle/>
+          <a:p>
+            <a:r>
+              <a:rPr sz="1300" b="1" i="0">
+                <a:solidFill>
+                  <a:srgbClr val="0E7C99"/>
+                </a:solidFill>
+                <a:latin typeface="Arial"/>
+              </a:rPr>
+              <a:t>ZERO</a:t>
+            </a:r>
+            <a:r>
+              <a:rPr sz="1300" b="1" i="0">
+                <a:solidFill>
+                  <a:srgbClr val="0B2545"/>
+                </a:solidFill>
+                <a:latin typeface="Arial"/>
+              </a:rPr>
+              <a:t>DRIFT</a:t>
+            </a:r>
+          </a:p>
+        </p:txBody>
+      </p:sp>
+      <p:sp>
+        <p:nvSpPr>
+          <p:cNvPr id="17413" name="TextBox 17412"/>
           <p:cNvSpPr txBox="1"/>
           <p:nvPr/>
         </p:nvSpPr>
@@ -7410,7 +7416,7 @@
       </p:sp>
       <p:sp>
         <p:nvSpPr>
-          <p:cNvPr id="17412" name="Rounded Rectangle 17411"/>
+          <p:cNvPr id="17414" name="Rounded Rectangle 17413"/>
           <p:cNvSpPr/>
           <p:nvPr/>
         </p:nvSpPr>
@@ -7489,7 +7495,7 @@
       </p:sp>
       <p:sp>
         <p:nvSpPr>
-          <p:cNvPr id="17413" name="Right Arrow 17412"/>
+          <p:cNvPr id="17415" name="Right Arrow 17414"/>
           <p:cNvSpPr/>
           <p:nvPr/>
         </p:nvSpPr>
@@ -7533,7 +7539,7 @@
       </p:sp>
       <p:sp>
         <p:nvSpPr>
-          <p:cNvPr id="17414" name="Rounded Rectangle 17413"/>
+          <p:cNvPr id="17416" name="Rounded Rectangle 17415"/>
           <p:cNvSpPr/>
           <p:nvPr/>
         </p:nvSpPr>
@@ -7612,7 +7618,7 @@
       </p:sp>
       <p:sp>
         <p:nvSpPr>
-          <p:cNvPr id="17415" name="Right Arrow 17414"/>
+          <p:cNvPr id="17417" name="Right Arrow 17416"/>
           <p:cNvSpPr/>
           <p:nvPr/>
         </p:nvSpPr>
@@ -7656,7 +7662,7 @@
       </p:sp>
       <p:sp>
         <p:nvSpPr>
-          <p:cNvPr id="17416" name="Rounded Rectangle 17415"/>
+          <p:cNvPr id="17418" name="Rounded Rectangle 17417"/>
           <p:cNvSpPr/>
           <p:nvPr/>
         </p:nvSpPr>
@@ -7735,7 +7741,7 @@
       </p:sp>
       <p:sp>
         <p:nvSpPr>
-          <p:cNvPr id="17417" name="Right Arrow 17416"/>
+          <p:cNvPr id="17419" name="Right Arrow 17418"/>
           <p:cNvSpPr/>
           <p:nvPr/>
         </p:nvSpPr>
@@ -7779,7 +7785,7 @@
       </p:sp>
       <p:sp>
         <p:nvSpPr>
-          <p:cNvPr id="17418" name="Rounded Rectangle 17417"/>
+          <p:cNvPr id="17420" name="Rounded Rectangle 17419"/>
           <p:cNvSpPr/>
           <p:nvPr/>
         </p:nvSpPr>
@@ -7858,7 +7864,7 @@
       </p:sp>
       <p:sp>
         <p:nvSpPr>
-          <p:cNvPr id="17419" name="Right Arrow 17418"/>
+          <p:cNvPr id="17421" name="Right Arrow 17420"/>
           <p:cNvSpPr/>
           <p:nvPr/>
         </p:nvSpPr>
@@ -7902,7 +7908,7 @@
       </p:sp>
       <p:sp>
         <p:nvSpPr>
-          <p:cNvPr id="17420" name="Rounded Rectangle 17419"/>
+          <p:cNvPr id="17422" name="Rounded Rectangle 17421"/>
           <p:cNvSpPr/>
           <p:nvPr/>
         </p:nvSpPr>
@@ -7981,7 +7987,7 @@
       </p:sp>
       <p:sp>
         <p:nvSpPr>
-          <p:cNvPr id="17421" name="Right Arrow 17420"/>
+          <p:cNvPr id="17423" name="Right Arrow 17422"/>
           <p:cNvSpPr/>
           <p:nvPr/>
         </p:nvSpPr>
@@ -8025,7 +8031,7 @@
       </p:sp>
       <p:sp>
         <p:nvSpPr>
-          <p:cNvPr id="17422" name="Rounded Rectangle 17421"/>
+          <p:cNvPr id="17424" name="Rounded Rectangle 17423"/>
           <p:cNvSpPr/>
           <p:nvPr/>
         </p:nvSpPr>
@@ -8104,7 +8110,7 @@
       </p:sp>
       <p:sp>
         <p:nvSpPr>
-          <p:cNvPr id="17423" name="TextBox 17422"/>
+          <p:cNvPr id="17425" name="TextBox 17424"/>
           <p:cNvSpPr txBox="1"/>
           <p:nvPr/>
         </p:nvSpPr>
@@ -8139,7 +8145,7 @@
       </p:sp>
       <p:sp>
         <p:nvSpPr>
-          <p:cNvPr id="17424" name="TextBox 17423"/>
+          <p:cNvPr id="17426" name="TextBox 17425"/>
           <p:cNvSpPr txBox="1"/>
           <p:nvPr/>
         </p:nvSpPr>
@@ -8173,7 +8179,7 @@
       </p:sp>
       <p:sp>
         <p:nvSpPr>
-          <p:cNvPr id="17425" name="Rounded Rectangle 17424"/>
+          <p:cNvPr id="17427" name="Rounded Rectangle 17426"/>
           <p:cNvSpPr/>
           <p:nvPr/>
         </p:nvSpPr>
@@ -8228,7 +8234,7 @@
       </p:sp>
       <p:sp>
         <p:nvSpPr>
-          <p:cNvPr id="17426" name="Right Arrow 17425"/>
+          <p:cNvPr id="17428" name="Right Arrow 17427"/>
           <p:cNvSpPr/>
           <p:nvPr/>
         </p:nvSpPr>
@@ -8272,7 +8278,7 @@
       </p:sp>
       <p:sp>
         <p:nvSpPr>
-          <p:cNvPr id="17427" name="Rounded Rectangle 17426"/>
+          <p:cNvPr id="17429" name="Rounded Rectangle 17428"/>
           <p:cNvSpPr/>
           <p:nvPr/>
         </p:nvSpPr>
@@ -8327,7 +8333,7 @@
       </p:sp>
       <p:sp>
         <p:nvSpPr>
-          <p:cNvPr id="17428" name="Right Arrow 17427"/>
+          <p:cNvPr id="17430" name="Right Arrow 17429"/>
           <p:cNvSpPr/>
           <p:nvPr/>
         </p:nvSpPr>
@@ -8371,7 +8377,7 @@
       </p:sp>
       <p:sp>
         <p:nvSpPr>
-          <p:cNvPr id="17429" name="Rounded Rectangle 17428"/>
+          <p:cNvPr id="17431" name="Rounded Rectangle 17430"/>
           <p:cNvSpPr/>
           <p:nvPr/>
         </p:nvSpPr>
@@ -8426,7 +8432,7 @@
       </p:sp>
       <p:sp>
         <p:nvSpPr>
-          <p:cNvPr id="17430" name="Right Arrow 17429"/>
+          <p:cNvPr id="17432" name="Right Arrow 17431"/>
           <p:cNvSpPr/>
           <p:nvPr/>
         </p:nvSpPr>
@@ -8470,7 +8476,7 @@
       </p:sp>
       <p:sp>
         <p:nvSpPr>
-          <p:cNvPr id="17431" name="Rounded Rectangle 17430"/>
+          <p:cNvPr id="17433" name="Rounded Rectangle 17432"/>
           <p:cNvSpPr/>
           <p:nvPr/>
         </p:nvSpPr>
@@ -8525,7 +8531,7 @@
       </p:sp>
       <p:sp>
         <p:nvSpPr>
-          <p:cNvPr id="17432" name="Right Arrow 17431"/>
+          <p:cNvPr id="17434" name="Right Arrow 17433"/>
           <p:cNvSpPr/>
           <p:nvPr/>
         </p:nvSpPr>
@@ -8569,7 +8575,7 @@
       </p:sp>
       <p:sp>
         <p:nvSpPr>
-          <p:cNvPr id="17433" name="Rounded Rectangle 17432"/>
+          <p:cNvPr id="17435" name="Rounded Rectangle 17434"/>
           <p:cNvSpPr/>
           <p:nvPr/>
         </p:nvSpPr>
@@ -8624,7 +8630,7 @@
       </p:sp>
       <p:sp>
         <p:nvSpPr>
-          <p:cNvPr id="17434" name="TextBox 17433"/>
+          <p:cNvPr id="17436" name="TextBox 17435"/>
           <p:cNvSpPr txBox="1"/>
           <p:nvPr/>
         </p:nvSpPr>
@@ -8672,14 +8678,14 @@
       </p:sp>
       <p:pic>
         <p:nvPicPr>
-          <p:cNvPr id="17435" name="Picture 17434" descr="vid_frame.png"/>
+          <p:cNvPr id="17437" name="Picture 17436" descr="vid_frame.png"/>
           <p:cNvPicPr>
             <a:picLocks noChangeAspect="1"/>
           </p:cNvPicPr>
           <p:nvPr/>
         </p:nvPicPr>
         <p:blipFill>
-          <a:blip r:embed="rId4"/>
+          <a:blip r:embed="rId5"/>
           <a:stretch>
             <a:fillRect/>
           </a:stretch>
@@ -8701,7 +8707,7 @@
       </p:pic>
       <p:sp>
         <p:nvSpPr>
-          <p:cNvPr id="17436" name="TextBox 17435"/>
+          <p:cNvPr id="17438" name="TextBox 17437"/>
           <p:cNvSpPr txBox="1"/>
           <p:nvPr/>
         </p:nvSpPr>
@@ -9162,70 +9168,6 @@
           </a:p>
         </p:txBody>
       </p:sp>
-      <p:sp>
-        <p:nvSpPr>
-          <p:cNvPr id="12" name="Oval 11" descr="Your startup LOGO">
-            <a:extLst>
-              <a:ext uri="{FF2B5EF4-FFF2-40B4-BE49-F238E27FC236}">
-                <a16:creationId xmlns:a16="http://schemas.microsoft.com/office/drawing/2014/main" id="{5DBCE864-823D-4A13-9607-5DA1F0ED5FB8}"/>
-              </a:ext>
-              <a:ext uri="{C183D7F6-B498-43B3-948B-1728B52AA6E4}">
-                <adec:decorative xmlns:adec="http://schemas.microsoft.com/office/drawing/2017/decorative" xmlns="" val="0"/>
-              </a:ext>
-            </a:extLst>
-          </p:cNvPr>
-          <p:cNvSpPr/>
-          <p:nvPr/>
-        </p:nvSpPr>
-        <p:spPr>
-          <a:xfrm>
-            <a:off x="329773" y="252246"/>
-            <a:ext cx="1251857" cy="807334"/>
-          </a:xfrm>
-          <a:prstGeom prst="ellipse">
-            <a:avLst/>
-          </a:prstGeom>
-          <a:solidFill>
-            <a:srgbClr val="0B2545"/>
-          </a:solidFill>
-          <a:ln w="15875">
-            <a:solidFill>
-              <a:srgbClr val="0E7C99"/>
-            </a:solidFill>
-          </a:ln>
-        </p:spPr>
-        <p:style>
-          <a:lnRef idx="2">
-            <a:schemeClr val="accent4"/>
-          </a:lnRef>
-          <a:fillRef idx="1">
-            <a:schemeClr val="lt1"/>
-          </a:fillRef>
-          <a:effectRef idx="0">
-            <a:schemeClr val="accent4"/>
-          </a:effectRef>
-          <a:fontRef idx="minor">
-            <a:schemeClr val="dk1"/>
-          </a:fontRef>
-        </p:style>
-        <p:txBody>
-          <a:bodyPr rtlCol="0" anchor="ctr"/>
-          <a:lstStyle/>
-          <a:p>
-            <a:pPr algn="ctr"/>
-            <a:r>
-              <a:rPr sz="1200" b="1" i="0">
-                <a:solidFill>
-                  <a:srgbClr val="FFFFFF"/>
-                </a:solidFill>
-                <a:latin typeface="Arial"/>
-              </a:rPr>
-              <a:t>ZeroDrift</a:t>
-            </a:r>
-            <a:endParaRPr lang="en-IN" dirty="0"/>
-          </a:p>
-        </p:txBody>
-      </p:sp>
       <p:pic>
         <p:nvPicPr>
           <p:cNvPr id="11" name="Picture 10"/>
@@ -9256,9 +9198,76 @@
           </a:prstGeom>
         </p:spPr>
       </p:pic>
-      <p:sp>
-        <p:nvSpPr>
-          <p:cNvPr id="17411" name="Rounded Rectangle 17410"/>
+      <p:pic>
+        <p:nvPicPr>
+          <p:cNvPr id="17411" name="Picture 17410" descr="logo_scope.png"/>
+          <p:cNvPicPr>
+            <a:picLocks noChangeAspect="1"/>
+          </p:cNvPicPr>
+          <p:nvPr/>
+        </p:nvPicPr>
+        <p:blipFill>
+          <a:blip r:embed="rId4"/>
+          <a:stretch>
+            <a:fillRect/>
+          </a:stretch>
+        </p:blipFill>
+        <p:spPr>
+          <a:xfrm>
+            <a:off x="310896" y="146304"/>
+            <a:ext cx="841248" cy="841248"/>
+          </a:xfrm>
+          <a:prstGeom prst="rect">
+            <a:avLst/>
+          </a:prstGeom>
+        </p:spPr>
+      </p:pic>
+      <p:sp>
+        <p:nvSpPr>
+          <p:cNvPr id="17412" name="TextBox 17411"/>
+          <p:cNvSpPr txBox="1"/>
+          <p:nvPr/>
+        </p:nvSpPr>
+        <p:spPr>
+          <a:xfrm>
+            <a:off x="1225296" y="365760"/>
+            <a:ext cx="1463040" cy="457200"/>
+          </a:xfrm>
+          <a:prstGeom prst="rect">
+            <a:avLst/>
+          </a:prstGeom>
+          <a:noFill/>
+        </p:spPr>
+        <p:txBody>
+          <a:bodyPr wrap="square" anchor="t" lIns="0" rIns="0" tIns="0" bIns="0">
+            <a:spAutoFit/>
+          </a:bodyPr>
+          <a:lstStyle/>
+          <a:p>
+            <a:r>
+              <a:rPr sz="1300" b="1" i="0">
+                <a:solidFill>
+                  <a:srgbClr val="0E7C99"/>
+                </a:solidFill>
+                <a:latin typeface="Arial"/>
+              </a:rPr>
+              <a:t>ZERO</a:t>
+            </a:r>
+            <a:r>
+              <a:rPr sz="1300" b="1" i="0">
+                <a:solidFill>
+                  <a:srgbClr val="0B2545"/>
+                </a:solidFill>
+                <a:latin typeface="Arial"/>
+              </a:rPr>
+              <a:t>DRIFT</a:t>
+            </a:r>
+          </a:p>
+        </p:txBody>
+      </p:sp>
+      <p:sp>
+        <p:nvSpPr>
+          <p:cNvPr id="17413" name="Rounded Rectangle 17412"/>
           <p:cNvSpPr/>
           <p:nvPr/>
         </p:nvSpPr>
@@ -9313,7 +9322,7 @@
       </p:sp>
       <p:sp>
         <p:nvSpPr>
-          <p:cNvPr id="17412" name="Rounded Rectangle 17411"/>
+          <p:cNvPr id="17414" name="Rounded Rectangle 17413"/>
           <p:cNvSpPr/>
           <p:nvPr/>
         </p:nvSpPr>
@@ -9456,7 +9465,7 @@
       </p:sp>
       <p:sp>
         <p:nvSpPr>
-          <p:cNvPr id="17413" name="Rounded Rectangle 17412"/>
+          <p:cNvPr id="17415" name="Rounded Rectangle 17414"/>
           <p:cNvSpPr/>
           <p:nvPr/>
         </p:nvSpPr>
@@ -9511,7 +9520,7 @@
       </p:sp>
       <p:sp>
         <p:nvSpPr>
-          <p:cNvPr id="17414" name="Rounded Rectangle 17413"/>
+          <p:cNvPr id="17416" name="Rounded Rectangle 17415"/>
           <p:cNvSpPr/>
           <p:nvPr/>
         </p:nvSpPr>
@@ -9654,7 +9663,7 @@
       </p:sp>
       <p:sp>
         <p:nvSpPr>
-          <p:cNvPr id="17415" name="Rounded Rectangle 17414"/>
+          <p:cNvPr id="17417" name="Rounded Rectangle 17416"/>
           <p:cNvSpPr/>
           <p:nvPr/>
         </p:nvSpPr>
@@ -9709,7 +9718,7 @@
       </p:sp>
       <p:sp>
         <p:nvSpPr>
-          <p:cNvPr id="17416" name="Rounded Rectangle 17415"/>
+          <p:cNvPr id="17418" name="Rounded Rectangle 17417"/>
           <p:cNvSpPr/>
           <p:nvPr/>
         </p:nvSpPr>
@@ -9852,7 +9861,7 @@
       </p:sp>
       <p:sp>
         <p:nvSpPr>
-          <p:cNvPr id="17417" name="TextBox 17416"/>
+          <p:cNvPr id="17419" name="TextBox 17418"/>
           <p:cNvSpPr txBox="1"/>
           <p:nvPr/>
         </p:nvSpPr>
@@ -10275,70 +10284,6 @@
           </a:p>
         </p:txBody>
       </p:sp>
-      <p:sp>
-        <p:nvSpPr>
-          <p:cNvPr id="12" name="Oval 11" descr="Your startup LOGO">
-            <a:extLst>
-              <a:ext uri="{FF2B5EF4-FFF2-40B4-BE49-F238E27FC236}">
-                <a16:creationId xmlns:a16="http://schemas.microsoft.com/office/drawing/2014/main" id="{5DBCE864-823D-4A13-9607-5DA1F0ED5FB8}"/>
-              </a:ext>
-              <a:ext uri="{C183D7F6-B498-43B3-948B-1728B52AA6E4}">
-                <adec:decorative xmlns:adec="http://schemas.microsoft.com/office/drawing/2017/decorative" xmlns="" val="0"/>
-              </a:ext>
-            </a:extLst>
-          </p:cNvPr>
-          <p:cNvSpPr/>
-          <p:nvPr/>
-        </p:nvSpPr>
-        <p:spPr>
-          <a:xfrm>
-            <a:off x="329773" y="252246"/>
-            <a:ext cx="1251857" cy="807334"/>
-          </a:xfrm>
-          <a:prstGeom prst="ellipse">
-            <a:avLst/>
-          </a:prstGeom>
-          <a:solidFill>
-            <a:srgbClr val="0B2545"/>
-          </a:solidFill>
-          <a:ln w="15875">
-            <a:solidFill>
-              <a:srgbClr val="0E7C99"/>
-            </a:solidFill>
-          </a:ln>
-        </p:spPr>
-        <p:style>
-          <a:lnRef idx="2">
-            <a:schemeClr val="accent4"/>
-          </a:lnRef>
-          <a:fillRef idx="1">
-            <a:schemeClr val="lt1"/>
-          </a:fillRef>
-          <a:effectRef idx="0">
-            <a:schemeClr val="accent4"/>
-          </a:effectRef>
-          <a:fontRef idx="minor">
-            <a:schemeClr val="dk1"/>
-          </a:fontRef>
-        </p:style>
-        <p:txBody>
-          <a:bodyPr rtlCol="0" anchor="ctr"/>
-          <a:lstStyle/>
-          <a:p>
-            <a:pPr algn="ctr"/>
-            <a:r>
-              <a:rPr sz="1200" b="1" i="0">
-                <a:solidFill>
-                  <a:srgbClr val="FFFFFF"/>
-                </a:solidFill>
-                <a:latin typeface="Arial"/>
-              </a:rPr>
-              <a:t>ZeroDrift</a:t>
-            </a:r>
-            <a:endParaRPr lang="en-IN" dirty="0"/>
-          </a:p>
-        </p:txBody>
-      </p:sp>
       <p:pic>
         <p:nvPicPr>
           <p:cNvPr id="11" name="Picture 10"/>
@@ -10369,9 +10314,76 @@
           </a:prstGeom>
         </p:spPr>
       </p:pic>
-      <p:sp>
-        <p:nvSpPr>
-          <p:cNvPr id="17411" name="Rounded Rectangle 17410"/>
+      <p:pic>
+        <p:nvPicPr>
+          <p:cNvPr id="17411" name="Picture 17410" descr="logo_scope.png"/>
+          <p:cNvPicPr>
+            <a:picLocks noChangeAspect="1"/>
+          </p:cNvPicPr>
+          <p:nvPr/>
+        </p:nvPicPr>
+        <p:blipFill>
+          <a:blip r:embed="rId4"/>
+          <a:stretch>
+            <a:fillRect/>
+          </a:stretch>
+        </p:blipFill>
+        <p:spPr>
+          <a:xfrm>
+            <a:off x="310896" y="146304"/>
+            <a:ext cx="841248" cy="841248"/>
+          </a:xfrm>
+          <a:prstGeom prst="rect">
+            <a:avLst/>
+          </a:prstGeom>
+        </p:spPr>
+      </p:pic>
+      <p:sp>
+        <p:nvSpPr>
+          <p:cNvPr id="17412" name="TextBox 17411"/>
+          <p:cNvSpPr txBox="1"/>
+          <p:nvPr/>
+        </p:nvSpPr>
+        <p:spPr>
+          <a:xfrm>
+            <a:off x="1225296" y="365760"/>
+            <a:ext cx="1463040" cy="457200"/>
+          </a:xfrm>
+          <a:prstGeom prst="rect">
+            <a:avLst/>
+          </a:prstGeom>
+          <a:noFill/>
+        </p:spPr>
+        <p:txBody>
+          <a:bodyPr wrap="square" anchor="t" lIns="0" rIns="0" tIns="0" bIns="0">
+            <a:spAutoFit/>
+          </a:bodyPr>
+          <a:lstStyle/>
+          <a:p>
+            <a:r>
+              <a:rPr sz="1300" b="1" i="0">
+                <a:solidFill>
+                  <a:srgbClr val="0E7C99"/>
+                </a:solidFill>
+                <a:latin typeface="Arial"/>
+              </a:rPr>
+              <a:t>ZERO</a:t>
+            </a:r>
+            <a:r>
+              <a:rPr sz="1300" b="1" i="0">
+                <a:solidFill>
+                  <a:srgbClr val="0B2545"/>
+                </a:solidFill>
+                <a:latin typeface="Arial"/>
+              </a:rPr>
+              <a:t>DRIFT</a:t>
+            </a:r>
+          </a:p>
+        </p:txBody>
+      </p:sp>
+      <p:sp>
+        <p:nvSpPr>
+          <p:cNvPr id="17413" name="Rounded Rectangle 17412"/>
           <p:cNvSpPr/>
           <p:nvPr/>
         </p:nvSpPr>
@@ -10442,7 +10454,7 @@
       </p:sp>
       <p:sp>
         <p:nvSpPr>
-          <p:cNvPr id="17412" name="Rounded Rectangle 17411"/>
+          <p:cNvPr id="17414" name="Rounded Rectangle 17413"/>
           <p:cNvSpPr/>
           <p:nvPr/>
         </p:nvSpPr>
@@ -10513,7 +10525,7 @@
       </p:sp>
       <p:sp>
         <p:nvSpPr>
-          <p:cNvPr id="17413" name="Rounded Rectangle 17412"/>
+          <p:cNvPr id="17415" name="Rounded Rectangle 17414"/>
           <p:cNvSpPr/>
           <p:nvPr/>
         </p:nvSpPr>
@@ -10584,7 +10596,7 @@
       </p:sp>
       <p:sp>
         <p:nvSpPr>
-          <p:cNvPr id="17414" name="Rounded Rectangle 17413"/>
+          <p:cNvPr id="17416" name="Rounded Rectangle 17415"/>
           <p:cNvSpPr/>
           <p:nvPr/>
         </p:nvSpPr>
@@ -10655,7 +10667,7 @@
       </p:sp>
       <p:sp>
         <p:nvSpPr>
-          <p:cNvPr id="17415" name="TextBox 17414"/>
+          <p:cNvPr id="17417" name="TextBox 17416"/>
           <p:cNvSpPr txBox="1"/>
           <p:nvPr/>
         </p:nvSpPr>
@@ -11120,70 +11132,6 @@
           </a:p>
         </p:txBody>
       </p:sp>
-      <p:sp>
-        <p:nvSpPr>
-          <p:cNvPr id="9" name="Oval 8" descr="Your startup LOGO">
-            <a:extLst>
-              <a:ext uri="{FF2B5EF4-FFF2-40B4-BE49-F238E27FC236}">
-                <a16:creationId xmlns:a16="http://schemas.microsoft.com/office/drawing/2014/main" id="{5DBCE864-823D-4A13-9607-5DA1F0ED5FB8}"/>
-              </a:ext>
-              <a:ext uri="{C183D7F6-B498-43B3-948B-1728B52AA6E4}">
-                <adec:decorative xmlns:adec="http://schemas.microsoft.com/office/drawing/2017/decorative" xmlns="" val="0"/>
-              </a:ext>
-            </a:extLst>
-          </p:cNvPr>
-          <p:cNvSpPr/>
-          <p:nvPr/>
-        </p:nvSpPr>
-        <p:spPr>
-          <a:xfrm>
-            <a:off x="329773" y="252246"/>
-            <a:ext cx="1251857" cy="807334"/>
-          </a:xfrm>
-          <a:prstGeom prst="ellipse">
-            <a:avLst/>
-          </a:prstGeom>
-          <a:solidFill>
-            <a:srgbClr val="0B2545"/>
-          </a:solidFill>
-          <a:ln w="15875">
-            <a:solidFill>
-              <a:srgbClr val="0E7C99"/>
-            </a:solidFill>
-          </a:ln>
-        </p:spPr>
-        <p:style>
-          <a:lnRef idx="2">
-            <a:schemeClr val="accent4"/>
-          </a:lnRef>
-          <a:fillRef idx="1">
-            <a:schemeClr val="lt1"/>
-          </a:fillRef>
-          <a:effectRef idx="0">
-            <a:schemeClr val="accent4"/>
-          </a:effectRef>
-          <a:fontRef idx="minor">
-            <a:schemeClr val="dk1"/>
-          </a:fontRef>
-        </p:style>
-        <p:txBody>
-          <a:bodyPr rtlCol="0" anchor="ctr"/>
-          <a:lstStyle/>
-          <a:p>
-            <a:pPr algn="ctr"/>
-            <a:r>
-              <a:rPr sz="1200" b="1" i="0">
-                <a:solidFill>
-                  <a:srgbClr val="FFFFFF"/>
-                </a:solidFill>
-                <a:latin typeface="Arial"/>
-              </a:rPr>
-              <a:t>ZeroDrift</a:t>
-            </a:r>
-            <a:endParaRPr lang="en-IN" dirty="0"/>
-          </a:p>
-        </p:txBody>
-      </p:sp>
       <p:pic>
         <p:nvPicPr>
           <p:cNvPr id="12" name="Picture 11"/>
@@ -11214,9 +11162,76 @@
           </a:prstGeom>
         </p:spPr>
       </p:pic>
-      <p:sp>
-        <p:nvSpPr>
-          <p:cNvPr id="17411" name="TextBox 17410"/>
+      <p:pic>
+        <p:nvPicPr>
+          <p:cNvPr id="17411" name="Picture 17410" descr="logo_scope.png"/>
+          <p:cNvPicPr>
+            <a:picLocks noChangeAspect="1"/>
+          </p:cNvPicPr>
+          <p:nvPr/>
+        </p:nvPicPr>
+        <p:blipFill>
+          <a:blip r:embed="rId4"/>
+          <a:stretch>
+            <a:fillRect/>
+          </a:stretch>
+        </p:blipFill>
+        <p:spPr>
+          <a:xfrm>
+            <a:off x="310896" y="146304"/>
+            <a:ext cx="841248" cy="841248"/>
+          </a:xfrm>
+          <a:prstGeom prst="rect">
+            <a:avLst/>
+          </a:prstGeom>
+        </p:spPr>
+      </p:pic>
+      <p:sp>
+        <p:nvSpPr>
+          <p:cNvPr id="17412" name="TextBox 17411"/>
+          <p:cNvSpPr txBox="1"/>
+          <p:nvPr/>
+        </p:nvSpPr>
+        <p:spPr>
+          <a:xfrm>
+            <a:off x="1225296" y="365760"/>
+            <a:ext cx="1463040" cy="457200"/>
+          </a:xfrm>
+          <a:prstGeom prst="rect">
+            <a:avLst/>
+          </a:prstGeom>
+          <a:noFill/>
+        </p:spPr>
+        <p:txBody>
+          <a:bodyPr wrap="square" anchor="t" lIns="0" rIns="0" tIns="0" bIns="0">
+            <a:spAutoFit/>
+          </a:bodyPr>
+          <a:lstStyle/>
+          <a:p>
+            <a:r>
+              <a:rPr sz="1300" b="1" i="0">
+                <a:solidFill>
+                  <a:srgbClr val="0E7C99"/>
+                </a:solidFill>
+                <a:latin typeface="Arial"/>
+              </a:rPr>
+              <a:t>ZERO</a:t>
+            </a:r>
+            <a:r>
+              <a:rPr sz="1300" b="1" i="0">
+                <a:solidFill>
+                  <a:srgbClr val="0B2545"/>
+                </a:solidFill>
+                <a:latin typeface="Arial"/>
+              </a:rPr>
+              <a:t>DRIFT</a:t>
+            </a:r>
+          </a:p>
+        </p:txBody>
+      </p:sp>
+      <p:sp>
+        <p:nvSpPr>
+          <p:cNvPr id="17413" name="TextBox 17412"/>
           <p:cNvSpPr txBox="1"/>
           <p:nvPr/>
         </p:nvSpPr>
@@ -11250,7 +11265,7 @@
       </p:sp>
       <p:sp>
         <p:nvSpPr>
-          <p:cNvPr id="17412" name="TextBox 17411"/>
+          <p:cNvPr id="17414" name="TextBox 17413"/>
           <p:cNvSpPr txBox="1"/>
           <p:nvPr/>
         </p:nvSpPr>
@@ -11448,7 +11463,7 @@
       </p:sp>
       <p:sp>
         <p:nvSpPr>
-          <p:cNvPr id="17413" name="TextBox 17412"/>
+          <p:cNvPr id="17415" name="TextBox 17414"/>
           <p:cNvSpPr txBox="1"/>
           <p:nvPr/>
         </p:nvSpPr>
@@ -11482,7 +11497,7 @@
       </p:sp>
       <p:sp>
         <p:nvSpPr>
-          <p:cNvPr id="17414" name="TextBox 17413"/>
+          <p:cNvPr id="17416" name="TextBox 17415"/>
           <p:cNvSpPr txBox="1"/>
           <p:nvPr/>
         </p:nvSpPr>
@@ -11580,7 +11595,7 @@
       </p:sp>
       <p:sp>
         <p:nvSpPr>
-          <p:cNvPr id="17415" name="Rounded Rectangle 17414"/>
+          <p:cNvPr id="17417" name="Rounded Rectangle 17416"/>
           <p:cNvSpPr/>
           <p:nvPr/>
         </p:nvSpPr>

--- a/docs/submission/ZeroDrift_SIH26169.pptx
+++ b/docs/submission/ZeroDrift_SIH26169.pptx
@@ -11306,7 +11306,17 @@
                 </a:solidFill>
                 <a:latin typeface="Arial"/>
               </a:rPr>
-              <a:t>“A Survey on Acquisition, Tracking and Pointing Mechanisms for Mobile FSO,” IEEE Comm. Surveys &amp; Tutorials, 2018.</a:t>
+              <a:t>“A Survey on Acquisition, Tracking and Pointing Mechanisms for Mobile FSO,” IEEE Comm. Surveys &amp; Tutorials, 2018.  </a:t>
+            </a:r>
+            <a:r>
+              <a:rPr sz="1000" u="sng">
+                <a:solidFill>
+                  <a:srgbClr val="0E7C99"/>
+                </a:solidFill>
+                <a:latin typeface="Arial"/>
+                <a:hlinkClick r:id="rId5"/>
+              </a:rPr>
+              <a:t>[link]</a:t>
             </a:r>
           </a:p>
           <a:p>
@@ -11331,7 +11341,17 @@
                 </a:solidFill>
                 <a:latin typeface="Arial"/>
               </a:rPr>
-              <a:t>“Optical Communication in Space: Challenges and Mitigation Techniques,” IEEE Comm. Surveys &amp; Tutorials, 2017.</a:t>
+              <a:t>“Optical Communication in Space: Challenges and Mitigation Techniques,” IEEE Comm. Surveys &amp; Tutorials, 2017.  </a:t>
+            </a:r>
+            <a:r>
+              <a:rPr sz="1000" u="sng">
+                <a:solidFill>
+                  <a:srgbClr val="0E7C99"/>
+                </a:solidFill>
+                <a:latin typeface="Arial"/>
+                <a:hlinkClick r:id="rId6"/>
+              </a:rPr>
+              <a:t>[link]</a:t>
             </a:r>
           </a:p>
           <a:p>
@@ -11356,7 +11376,17 @@
                 </a:solidFill>
                 <a:latin typeface="Arial"/>
               </a:rPr>
-              <a:t>Design and Analysis of Modern Tracking Systems — IMM filtering, CFAR detection, track management.</a:t>
+              <a:t>Design and Analysis of Modern Tracking Systems — IMM filtering, CFAR detection, track management.  </a:t>
+            </a:r>
+            <a:r>
+              <a:rPr sz="1000" u="sng">
+                <a:solidFill>
+                  <a:srgbClr val="0E7C99"/>
+                </a:solidFill>
+                <a:latin typeface="Arial"/>
+                <a:hlinkClick r:id="rId7"/>
+              </a:rPr>
+              <a:t>[link]</a:t>
             </a:r>
           </a:p>
           <a:p>
@@ -11381,7 +11411,17 @@
                 </a:solidFill>
                 <a:latin typeface="Arial"/>
               </a:rPr>
-              <a:t>Estimation with Applications to Tracking and Navigation — Kalman/IMM theory.</a:t>
+              <a:t>Estimation with Applications to Tracking and Navigation — Kalman/IMM theory.  </a:t>
+            </a:r>
+            <a:r>
+              <a:rPr sz="1000" u="sng">
+                <a:solidFill>
+                  <a:srgbClr val="0E7C99"/>
+                </a:solidFill>
+                <a:latin typeface="Arial"/>
+                <a:hlinkClick r:id="rId8"/>
+              </a:rPr>
+              <a:t>[link]</a:t>
             </a:r>
           </a:p>
           <a:p>
@@ -11406,7 +11446,17 @@
                 </a:solidFill>
                 <a:latin typeface="Arial"/>
               </a:rPr>
-              <a:t>“Closer Control of Loops with Dead Time” — the Smith predictor, 1957.</a:t>
+              <a:t>“Closer Control of Loops with Dead Time” — the Smith predictor, 1957.  </a:t>
+            </a:r>
+            <a:r>
+              <a:rPr sz="1000" u="sng">
+                <a:solidFill>
+                  <a:srgbClr val="0E7C99"/>
+                </a:solidFill>
+                <a:latin typeface="Arial"/>
+                <a:hlinkClick r:id="rId9"/>
+              </a:rPr>
+              <a:t>[link]</a:t>
             </a:r>
           </a:p>
           <a:p>
@@ -11431,7 +11481,17 @@
                 </a:solidFill>
                 <a:latin typeface="Arial"/>
               </a:rPr>
-              <a:t>“SGP4 Orbit Determination” — AIAA 2008; real ISS TLE propagation.</a:t>
+              <a:t>“SGP4 Orbit Determination” — AIAA 2008; real ISS TLE propagation.  </a:t>
+            </a:r>
+            <a:r>
+              <a:rPr sz="1000" u="sng">
+                <a:solidFill>
+                  <a:srgbClr val="0E7C99"/>
+                </a:solidFill>
+                <a:latin typeface="Arial"/>
+                <a:hlinkClick r:id="rId10"/>
+              </a:rPr>
+              <a:t>[link]</a:t>
             </a:r>
           </a:p>
           <a:p>
@@ -11456,7 +11516,17 @@
                 </a:solidFill>
                 <a:latin typeface="Arial"/>
               </a:rPr>
-              <a:t>Laser Beam Propagation through Random Media — turbulence &amp; scintillation models.</a:t>
+              <a:t>Laser Beam Propagation through Random Media — turbulence &amp; scintillation models.  </a:t>
+            </a:r>
+            <a:r>
+              <a:rPr sz="1000" u="sng">
+                <a:solidFill>
+                  <a:srgbClr val="0E7C99"/>
+                </a:solidFill>
+                <a:latin typeface="Arial"/>
+                <a:hlinkClick r:id="rId11"/>
+              </a:rPr>
+              <a:t>[link]</a:t>
             </a:r>
           </a:p>
         </p:txBody>
@@ -11532,11 +11602,12 @@
               <a:t>Repository:  </a:t>
             </a:r>
             <a:r>
-              <a:rPr sz="1100" b="0" i="0">
-                <a:solidFill>
-                  <a:srgbClr val="0B2545"/>
-                </a:solidFill>
-                <a:latin typeface="Arial"/>
+              <a:rPr sz="1100" u="sng">
+                <a:solidFill>
+                  <a:srgbClr val="0E7C99"/>
+                </a:solidFill>
+                <a:latin typeface="Arial"/>
+                <a:hlinkClick r:id="rId12"/>
               </a:rPr>
               <a:t>github.com/pranshukesavmishra/SIH-2026</a:t>
             </a:r>

--- a/docs/submission/ZeroDrift_SIH26169.pptx
+++ b/docs/submission/ZeroDrift_SIH26169.pptx
@@ -6377,6 +6377,70 @@
           </a:p>
         </p:txBody>
       </p:sp>
+      <p:sp>
+        <p:nvSpPr>
+          <p:cNvPr id="10" name="Oval 9" descr="Your startup LOGO">
+            <a:extLst>
+              <a:ext uri="{FF2B5EF4-FFF2-40B4-BE49-F238E27FC236}">
+                <a16:creationId xmlns:a16="http://schemas.microsoft.com/office/drawing/2014/main" id="{5DBCE864-823D-4A13-9607-5DA1F0ED5FB8}"/>
+              </a:ext>
+              <a:ext uri="{C183D7F6-B498-43B3-948B-1728B52AA6E4}">
+                <adec:decorative xmlns:adec="http://schemas.microsoft.com/office/drawing/2017/decorative" xmlns="" val="0"/>
+              </a:ext>
+            </a:extLst>
+          </p:cNvPr>
+          <p:cNvSpPr/>
+          <p:nvPr/>
+        </p:nvSpPr>
+        <p:spPr>
+          <a:xfrm>
+            <a:off x="329773" y="252246"/>
+            <a:ext cx="1251857" cy="807334"/>
+          </a:xfrm>
+          <a:prstGeom prst="ellipse">
+            <a:avLst/>
+          </a:prstGeom>
+          <a:solidFill>
+            <a:srgbClr val="0B2545"/>
+          </a:solidFill>
+          <a:ln w="15875">
+            <a:solidFill>
+              <a:srgbClr val="0E7C99"/>
+            </a:solidFill>
+          </a:ln>
+        </p:spPr>
+        <p:style>
+          <a:lnRef idx="2">
+            <a:schemeClr val="accent4"/>
+          </a:lnRef>
+          <a:fillRef idx="1">
+            <a:schemeClr val="lt1"/>
+          </a:fillRef>
+          <a:effectRef idx="0">
+            <a:schemeClr val="accent4"/>
+          </a:effectRef>
+          <a:fontRef idx="minor">
+            <a:schemeClr val="dk1"/>
+          </a:fontRef>
+        </p:style>
+        <p:txBody>
+          <a:bodyPr rtlCol="0" anchor="ctr"/>
+          <a:lstStyle/>
+          <a:p>
+            <a:pPr algn="ctr"/>
+            <a:r>
+              <a:rPr sz="1200" b="1" i="0">
+                <a:solidFill>
+                  <a:srgbClr val="FFFFFF"/>
+                </a:solidFill>
+                <a:latin typeface="Arial"/>
+              </a:rPr>
+              <a:t>ZeroDrift</a:t>
+            </a:r>
+            <a:endParaRPr lang="en-IN" dirty="0"/>
+          </a:p>
+        </p:txBody>
+      </p:sp>
       <p:pic>
         <p:nvPicPr>
           <p:cNvPr id="11" name="Picture 10"/>
@@ -6407,76 +6471,9 @@
           </a:prstGeom>
         </p:spPr>
       </p:pic>
-      <p:pic>
-        <p:nvPicPr>
-          <p:cNvPr id="15363" name="Picture 15362" descr="logo_scope.png"/>
-          <p:cNvPicPr>
-            <a:picLocks noChangeAspect="1"/>
-          </p:cNvPicPr>
-          <p:nvPr/>
-        </p:nvPicPr>
-        <p:blipFill>
-          <a:blip r:embed="rId4"/>
-          <a:stretch>
-            <a:fillRect/>
-          </a:stretch>
-        </p:blipFill>
-        <p:spPr>
-          <a:xfrm>
-            <a:off x="310896" y="146304"/>
-            <a:ext cx="841248" cy="841248"/>
-          </a:xfrm>
-          <a:prstGeom prst="rect">
-            <a:avLst/>
-          </a:prstGeom>
-        </p:spPr>
-      </p:pic>
-      <p:sp>
-        <p:nvSpPr>
-          <p:cNvPr id="15364" name="TextBox 15363"/>
-          <p:cNvSpPr txBox="1"/>
-          <p:nvPr/>
-        </p:nvSpPr>
-        <p:spPr>
-          <a:xfrm>
-            <a:off x="1225296" y="365760"/>
-            <a:ext cx="1463040" cy="457200"/>
-          </a:xfrm>
-          <a:prstGeom prst="rect">
-            <a:avLst/>
-          </a:prstGeom>
-          <a:noFill/>
-        </p:spPr>
-        <p:txBody>
-          <a:bodyPr wrap="square" anchor="t" lIns="0" rIns="0" tIns="0" bIns="0">
-            <a:spAutoFit/>
-          </a:bodyPr>
-          <a:lstStyle/>
-          <a:p>
-            <a:r>
-              <a:rPr sz="1300" b="1" i="0">
-                <a:solidFill>
-                  <a:srgbClr val="0E7C99"/>
-                </a:solidFill>
-                <a:latin typeface="Arial"/>
-              </a:rPr>
-              <a:t>ZERO</a:t>
-            </a:r>
-            <a:r>
-              <a:rPr sz="1300" b="1" i="0">
-                <a:solidFill>
-                  <a:srgbClr val="0B2545"/>
-                </a:solidFill>
-                <a:latin typeface="Arial"/>
-              </a:rPr>
-              <a:t>DRIFT</a:t>
-            </a:r>
-          </a:p>
-        </p:txBody>
-      </p:sp>
-      <p:sp>
-        <p:nvSpPr>
-          <p:cNvPr id="15365" name="TextBox 15364"/>
+      <p:sp>
+        <p:nvSpPr>
+          <p:cNvPr id="15363" name="TextBox 15362"/>
           <p:cNvSpPr txBox="1"/>
           <p:nvPr/>
         </p:nvSpPr>
@@ -6510,7 +6507,7 @@
       </p:sp>
       <p:sp>
         <p:nvSpPr>
-          <p:cNvPr id="15366" name="TextBox 15365"/>
+          <p:cNvPr id="15364" name="TextBox 15363"/>
           <p:cNvSpPr txBox="1"/>
           <p:nvPr/>
         </p:nvSpPr>
@@ -6658,14 +6655,14 @@
       </p:sp>
       <p:pic>
         <p:nvPicPr>
-          <p:cNvPr id="15367" name="Picture 15366" descr="gui_shot.png"/>
+          <p:cNvPr id="15365" name="Picture 15364" descr="gui_shot.png"/>
           <p:cNvPicPr>
             <a:picLocks noChangeAspect="1"/>
           </p:cNvPicPr>
           <p:nvPr/>
         </p:nvPicPr>
         <p:blipFill>
-          <a:blip r:embed="rId5"/>
+          <a:blip r:embed="rId4"/>
           <a:stretch>
             <a:fillRect/>
           </a:stretch>
@@ -6687,7 +6684,7 @@
       </p:pic>
       <p:sp>
         <p:nvSpPr>
-          <p:cNvPr id="15368" name="TextBox 15367"/>
+          <p:cNvPr id="15366" name="TextBox 15365"/>
           <p:cNvSpPr txBox="1"/>
           <p:nvPr/>
         </p:nvSpPr>
@@ -6722,7 +6719,7 @@
       </p:sp>
       <p:sp>
         <p:nvSpPr>
-          <p:cNvPr id="15369" name="Rounded Rectangle 15368"/>
+          <p:cNvPr id="15367" name="Rounded Rectangle 15366"/>
           <p:cNvSpPr/>
           <p:nvPr/>
         </p:nvSpPr>
@@ -6789,7 +6786,7 @@
       </p:sp>
       <p:sp>
         <p:nvSpPr>
-          <p:cNvPr id="15370" name="Rounded Rectangle 15369"/>
+          <p:cNvPr id="15368" name="Rounded Rectangle 15367"/>
           <p:cNvSpPr/>
           <p:nvPr/>
         </p:nvSpPr>
@@ -6856,7 +6853,7 @@
       </p:sp>
       <p:sp>
         <p:nvSpPr>
-          <p:cNvPr id="15371" name="Rounded Rectangle 15370"/>
+          <p:cNvPr id="15369" name="Rounded Rectangle 15368"/>
           <p:cNvSpPr/>
           <p:nvPr/>
         </p:nvSpPr>
@@ -6923,7 +6920,7 @@
       </p:sp>
       <p:sp>
         <p:nvSpPr>
-          <p:cNvPr id="15372" name="TextBox 15371"/>
+          <p:cNvPr id="15370" name="TextBox 15369"/>
           <p:cNvSpPr txBox="1"/>
           <p:nvPr/>
         </p:nvSpPr>
@@ -7242,6 +7239,70 @@
                 <a:schemeClr val="bg1"/>
               </a:solidFill>
             </a:endParaRPr>
+          </a:p>
+        </p:txBody>
+      </p:sp>
+      <p:sp>
+        <p:nvSpPr>
+          <p:cNvPr id="11" name="Oval 10" descr="Your startup LOGO">
+            <a:extLst>
+              <a:ext uri="{FF2B5EF4-FFF2-40B4-BE49-F238E27FC236}">
+                <a16:creationId xmlns:a16="http://schemas.microsoft.com/office/drawing/2014/main" id="{5DBCE864-823D-4A13-9607-5DA1F0ED5FB8}"/>
+              </a:ext>
+              <a:ext uri="{C183D7F6-B498-43B3-948B-1728B52AA6E4}">
+                <adec:decorative xmlns:adec="http://schemas.microsoft.com/office/drawing/2017/decorative" xmlns="" val="0"/>
+              </a:ext>
+            </a:extLst>
+          </p:cNvPr>
+          <p:cNvSpPr/>
+          <p:nvPr/>
+        </p:nvSpPr>
+        <p:spPr>
+          <a:xfrm>
+            <a:off x="329773" y="252246"/>
+            <a:ext cx="1251857" cy="807334"/>
+          </a:xfrm>
+          <a:prstGeom prst="ellipse">
+            <a:avLst/>
+          </a:prstGeom>
+          <a:solidFill>
+            <a:srgbClr val="0B2545"/>
+          </a:solidFill>
+          <a:ln w="15875">
+            <a:solidFill>
+              <a:srgbClr val="0E7C99"/>
+            </a:solidFill>
+          </a:ln>
+        </p:spPr>
+        <p:style>
+          <a:lnRef idx="2">
+            <a:schemeClr val="accent4"/>
+          </a:lnRef>
+          <a:fillRef idx="1">
+            <a:schemeClr val="lt1"/>
+          </a:fillRef>
+          <a:effectRef idx="0">
+            <a:schemeClr val="accent4"/>
+          </a:effectRef>
+          <a:fontRef idx="minor">
+            <a:schemeClr val="dk1"/>
+          </a:fontRef>
+        </p:style>
+        <p:txBody>
+          <a:bodyPr rtlCol="0" anchor="ctr"/>
+          <a:lstStyle/>
+          <a:p>
+            <a:pPr algn="ctr"/>
+            <a:r>
+              <a:rPr sz="1200" b="1" i="0">
+                <a:solidFill>
+                  <a:srgbClr val="FFFFFF"/>
+                </a:solidFill>
+                <a:latin typeface="Arial"/>
+              </a:rPr>
+              <a:t>ZeroDrift</a:t>
+            </a:r>
+            <a:endParaRPr lang="en-IN" dirty="0"/>
           </a:p>
         </p:txBody>
       </p:sp>
@@ -7275,76 +7336,9 @@
           </a:prstGeom>
         </p:spPr>
       </p:pic>
-      <p:pic>
-        <p:nvPicPr>
-          <p:cNvPr id="17411" name="Picture 17410" descr="logo_scope.png"/>
-          <p:cNvPicPr>
-            <a:picLocks noChangeAspect="1"/>
-          </p:cNvPicPr>
-          <p:nvPr/>
-        </p:nvPicPr>
-        <p:blipFill>
-          <a:blip r:embed="rId4"/>
-          <a:stretch>
-            <a:fillRect/>
-          </a:stretch>
-        </p:blipFill>
-        <p:spPr>
-          <a:xfrm>
-            <a:off x="310896" y="146304"/>
-            <a:ext cx="841248" cy="841248"/>
-          </a:xfrm>
-          <a:prstGeom prst="rect">
-            <a:avLst/>
-          </a:prstGeom>
-        </p:spPr>
-      </p:pic>
-      <p:sp>
-        <p:nvSpPr>
-          <p:cNvPr id="17412" name="TextBox 17411"/>
-          <p:cNvSpPr txBox="1"/>
-          <p:nvPr/>
-        </p:nvSpPr>
-        <p:spPr>
-          <a:xfrm>
-            <a:off x="1225296" y="365760"/>
-            <a:ext cx="1463040" cy="457200"/>
-          </a:xfrm>
-          <a:prstGeom prst="rect">
-            <a:avLst/>
-          </a:prstGeom>
-          <a:noFill/>
-        </p:spPr>
-        <p:txBody>
-          <a:bodyPr wrap="square" anchor="t" lIns="0" rIns="0" tIns="0" bIns="0">
-            <a:spAutoFit/>
-          </a:bodyPr>
-          <a:lstStyle/>
-          <a:p>
-            <a:r>
-              <a:rPr sz="1300" b="1" i="0">
-                <a:solidFill>
-                  <a:srgbClr val="0E7C99"/>
-                </a:solidFill>
-                <a:latin typeface="Arial"/>
-              </a:rPr>
-              <a:t>ZERO</a:t>
-            </a:r>
-            <a:r>
-              <a:rPr sz="1300" b="1" i="0">
-                <a:solidFill>
-                  <a:srgbClr val="0B2545"/>
-                </a:solidFill>
-                <a:latin typeface="Arial"/>
-              </a:rPr>
-              <a:t>DRIFT</a:t>
-            </a:r>
-          </a:p>
-        </p:txBody>
-      </p:sp>
-      <p:sp>
-        <p:nvSpPr>
-          <p:cNvPr id="17413" name="TextBox 17412"/>
+      <p:sp>
+        <p:nvSpPr>
+          <p:cNvPr id="17411" name="TextBox 17410"/>
           <p:cNvSpPr txBox="1"/>
           <p:nvPr/>
         </p:nvSpPr>
@@ -7416,7 +7410,7 @@
       </p:sp>
       <p:sp>
         <p:nvSpPr>
-          <p:cNvPr id="17414" name="Rounded Rectangle 17413"/>
+          <p:cNvPr id="17412" name="Rounded Rectangle 17411"/>
           <p:cNvSpPr/>
           <p:nvPr/>
         </p:nvSpPr>
@@ -7495,7 +7489,7 @@
       </p:sp>
       <p:sp>
         <p:nvSpPr>
-          <p:cNvPr id="17415" name="Right Arrow 17414"/>
+          <p:cNvPr id="17413" name="Right Arrow 17412"/>
           <p:cNvSpPr/>
           <p:nvPr/>
         </p:nvSpPr>
@@ -7539,7 +7533,7 @@
       </p:sp>
       <p:sp>
         <p:nvSpPr>
-          <p:cNvPr id="17416" name="Rounded Rectangle 17415"/>
+          <p:cNvPr id="17414" name="Rounded Rectangle 17413"/>
           <p:cNvSpPr/>
           <p:nvPr/>
         </p:nvSpPr>
@@ -7618,7 +7612,7 @@
       </p:sp>
       <p:sp>
         <p:nvSpPr>
-          <p:cNvPr id="17417" name="Right Arrow 17416"/>
+          <p:cNvPr id="17415" name="Right Arrow 17414"/>
           <p:cNvSpPr/>
           <p:nvPr/>
         </p:nvSpPr>
@@ -7662,7 +7656,7 @@
       </p:sp>
       <p:sp>
         <p:nvSpPr>
-          <p:cNvPr id="17418" name="Rounded Rectangle 17417"/>
+          <p:cNvPr id="17416" name="Rounded Rectangle 17415"/>
           <p:cNvSpPr/>
           <p:nvPr/>
         </p:nvSpPr>
@@ -7741,7 +7735,7 @@
       </p:sp>
       <p:sp>
         <p:nvSpPr>
-          <p:cNvPr id="17419" name="Right Arrow 17418"/>
+          <p:cNvPr id="17417" name="Right Arrow 17416"/>
           <p:cNvSpPr/>
           <p:nvPr/>
         </p:nvSpPr>
@@ -7785,7 +7779,7 @@
       </p:sp>
       <p:sp>
         <p:nvSpPr>
-          <p:cNvPr id="17420" name="Rounded Rectangle 17419"/>
+          <p:cNvPr id="17418" name="Rounded Rectangle 17417"/>
           <p:cNvSpPr/>
           <p:nvPr/>
         </p:nvSpPr>
@@ -7864,7 +7858,7 @@
       </p:sp>
       <p:sp>
         <p:nvSpPr>
-          <p:cNvPr id="17421" name="Right Arrow 17420"/>
+          <p:cNvPr id="17419" name="Right Arrow 17418"/>
           <p:cNvSpPr/>
           <p:nvPr/>
         </p:nvSpPr>
@@ -7908,7 +7902,7 @@
       </p:sp>
       <p:sp>
         <p:nvSpPr>
-          <p:cNvPr id="17422" name="Rounded Rectangle 17421"/>
+          <p:cNvPr id="17420" name="Rounded Rectangle 17419"/>
           <p:cNvSpPr/>
           <p:nvPr/>
         </p:nvSpPr>
@@ -7987,7 +7981,7 @@
       </p:sp>
       <p:sp>
         <p:nvSpPr>
-          <p:cNvPr id="17423" name="Right Arrow 17422"/>
+          <p:cNvPr id="17421" name="Right Arrow 17420"/>
           <p:cNvSpPr/>
           <p:nvPr/>
         </p:nvSpPr>
@@ -8031,7 +8025,7 @@
       </p:sp>
       <p:sp>
         <p:nvSpPr>
-          <p:cNvPr id="17424" name="Rounded Rectangle 17423"/>
+          <p:cNvPr id="17422" name="Rounded Rectangle 17421"/>
           <p:cNvSpPr/>
           <p:nvPr/>
         </p:nvSpPr>
@@ -8110,7 +8104,7 @@
       </p:sp>
       <p:sp>
         <p:nvSpPr>
-          <p:cNvPr id="17425" name="TextBox 17424"/>
+          <p:cNvPr id="17423" name="TextBox 17422"/>
           <p:cNvSpPr txBox="1"/>
           <p:nvPr/>
         </p:nvSpPr>
@@ -8145,13 +8139,13 @@
       </p:sp>
       <p:sp>
         <p:nvSpPr>
-          <p:cNvPr id="17426" name="TextBox 17425"/>
+          <p:cNvPr id="17424" name="TextBox 17423"/>
           <p:cNvSpPr txBox="1"/>
           <p:nvPr/>
         </p:nvSpPr>
         <p:spPr>
           <a:xfrm>
-            <a:off x="384048" y="3895344"/>
+            <a:off x="384048" y="3858768"/>
             <a:ext cx="3108960" cy="274320"/>
           </a:xfrm>
           <a:prstGeom prst="rect">
@@ -8179,13 +8173,13 @@
       </p:sp>
       <p:sp>
         <p:nvSpPr>
-          <p:cNvPr id="17427" name="Rounded Rectangle 17426"/>
+          <p:cNvPr id="17425" name="Rounded Rectangle 17424"/>
           <p:cNvSpPr/>
           <p:nvPr/>
         </p:nvSpPr>
         <p:spPr>
           <a:xfrm>
-            <a:off x="384048" y="4187952"/>
+            <a:off x="384048" y="4151376"/>
             <a:ext cx="1325880" cy="457200"/>
           </a:xfrm>
           <a:prstGeom prst="roundRect">
@@ -8234,13 +8228,13 @@
       </p:sp>
       <p:sp>
         <p:nvSpPr>
-          <p:cNvPr id="17428" name="Right Arrow 17427"/>
+          <p:cNvPr id="17426" name="Right Arrow 17425"/>
           <p:cNvSpPr/>
           <p:nvPr/>
         </p:nvSpPr>
         <p:spPr>
           <a:xfrm>
-            <a:off x="1709928" y="4352544"/>
+            <a:off x="1709928" y="4315968"/>
             <a:ext cx="155448" cy="128016"/>
           </a:xfrm>
           <a:prstGeom prst="rightArrow">
@@ -8278,13 +8272,13 @@
       </p:sp>
       <p:sp>
         <p:nvSpPr>
-          <p:cNvPr id="17429" name="Rounded Rectangle 17428"/>
+          <p:cNvPr id="17427" name="Rounded Rectangle 17426"/>
           <p:cNvSpPr/>
           <p:nvPr/>
         </p:nvSpPr>
         <p:spPr>
           <a:xfrm>
-            <a:off x="1865376" y="4187952"/>
+            <a:off x="1865376" y="4151376"/>
             <a:ext cx="1325880" cy="457200"/>
           </a:xfrm>
           <a:prstGeom prst="roundRect">
@@ -8333,13 +8327,13 @@
       </p:sp>
       <p:sp>
         <p:nvSpPr>
-          <p:cNvPr id="17430" name="Right Arrow 17429"/>
+          <p:cNvPr id="17428" name="Right Arrow 17427"/>
           <p:cNvSpPr/>
           <p:nvPr/>
         </p:nvSpPr>
         <p:spPr>
           <a:xfrm>
-            <a:off x="3191256" y="4352544"/>
+            <a:off x="3191256" y="4315968"/>
             <a:ext cx="155448" cy="128016"/>
           </a:xfrm>
           <a:prstGeom prst="rightArrow">
@@ -8377,13 +8371,13 @@
       </p:sp>
       <p:sp>
         <p:nvSpPr>
-          <p:cNvPr id="17431" name="Rounded Rectangle 17430"/>
+          <p:cNvPr id="17429" name="Rounded Rectangle 17428"/>
           <p:cNvSpPr/>
           <p:nvPr/>
         </p:nvSpPr>
         <p:spPr>
           <a:xfrm>
-            <a:off x="3346704" y="4187952"/>
+            <a:off x="3346704" y="4151376"/>
             <a:ext cx="1325880" cy="457200"/>
           </a:xfrm>
           <a:prstGeom prst="roundRect">
@@ -8432,13 +8426,13 @@
       </p:sp>
       <p:sp>
         <p:nvSpPr>
-          <p:cNvPr id="17432" name="Right Arrow 17431"/>
+          <p:cNvPr id="17430" name="Right Arrow 17429"/>
           <p:cNvSpPr/>
           <p:nvPr/>
         </p:nvSpPr>
         <p:spPr>
           <a:xfrm>
-            <a:off x="4672584" y="4352544"/>
+            <a:off x="4672584" y="4315968"/>
             <a:ext cx="155448" cy="128016"/>
           </a:xfrm>
           <a:prstGeom prst="rightArrow">
@@ -8476,13 +8470,13 @@
       </p:sp>
       <p:sp>
         <p:nvSpPr>
-          <p:cNvPr id="17433" name="Rounded Rectangle 17432"/>
+          <p:cNvPr id="17431" name="Rounded Rectangle 17430"/>
           <p:cNvSpPr/>
           <p:nvPr/>
         </p:nvSpPr>
         <p:spPr>
           <a:xfrm>
-            <a:off x="4828032" y="4187952"/>
+            <a:off x="4828032" y="4151376"/>
             <a:ext cx="1325880" cy="457200"/>
           </a:xfrm>
           <a:prstGeom prst="roundRect">
@@ -8531,13 +8525,13 @@
       </p:sp>
       <p:sp>
         <p:nvSpPr>
-          <p:cNvPr id="17434" name="Right Arrow 17433"/>
+          <p:cNvPr id="17432" name="Right Arrow 17431"/>
           <p:cNvSpPr/>
           <p:nvPr/>
         </p:nvSpPr>
         <p:spPr>
           <a:xfrm>
-            <a:off x="6153912" y="4352544"/>
+            <a:off x="6153912" y="4315968"/>
             <a:ext cx="155448" cy="128016"/>
           </a:xfrm>
           <a:prstGeom prst="rightArrow">
@@ -8575,13 +8569,13 @@
       </p:sp>
       <p:sp>
         <p:nvSpPr>
-          <p:cNvPr id="17435" name="Rounded Rectangle 17434"/>
+          <p:cNvPr id="17433" name="Rounded Rectangle 17432"/>
           <p:cNvSpPr/>
           <p:nvPr/>
         </p:nvSpPr>
         <p:spPr>
           <a:xfrm>
-            <a:off x="6309360" y="4187952"/>
+            <a:off x="6309360" y="4151376"/>
             <a:ext cx="1325880" cy="457200"/>
           </a:xfrm>
           <a:prstGeom prst="roundRect">
@@ -8630,14 +8624,14 @@
       </p:sp>
       <p:sp>
         <p:nvSpPr>
-          <p:cNvPr id="17436" name="TextBox 17435"/>
+          <p:cNvPr id="17434" name="TextBox 17433"/>
           <p:cNvSpPr txBox="1"/>
           <p:nvPr/>
         </p:nvSpPr>
         <p:spPr>
           <a:xfrm>
-            <a:off x="384048" y="4718304"/>
-            <a:ext cx="7315200" cy="566928"/>
+            <a:off x="7882127" y="6053328"/>
+            <a:ext cx="3931920" cy="274320"/>
           </a:xfrm>
           <a:prstGeom prst="rect">
             <a:avLst/>
@@ -8656,7 +8650,7 @@
               </a:spcAft>
             </a:pPr>
             <a:r>
-              <a:rPr sz="1100" b="1" i="0">
+              <a:rPr sz="950" b="1" i="0">
                 <a:solidFill>
                   <a:srgbClr val="0B2545"/>
                 </a:solidFill>
@@ -8665,81 +8659,436 @@
               <a:t/>
             </a:r>
             <a:r>
-              <a:rPr sz="1100" b="0" i="0">
+              <a:rPr sz="950" b="0" i="0">
                 <a:solidFill>
                   <a:srgbClr val="0B2545"/>
                 </a:solidFill>
                 <a:latin typeface="Arial"/>
               </a:rPr>
-              <a:t>Spiral search over the uncertainty cone → lock → coast through beacon blinks → automatic recovery. Verified: recovers the true beacon even when started 5° off-target among decoys.</a:t>
+              <a:t>Search → lock → coast → auto-recovery, even 5° off-target among decoys.</a:t>
+            </a:r>
+          </a:p>
+        </p:txBody>
+      </p:sp>
+      <p:sp>
+        <p:nvSpPr>
+          <p:cNvPr id="17435" name="TextBox 17434"/>
+          <p:cNvSpPr txBox="1"/>
+          <p:nvPr/>
+        </p:nvSpPr>
+        <p:spPr>
+          <a:xfrm>
+            <a:off x="7882127" y="3895344"/>
+            <a:ext cx="3931920" cy="274320"/>
+          </a:xfrm>
+          <a:prstGeom prst="rect">
+            <a:avLst/>
+          </a:prstGeom>
+          <a:noFill/>
+        </p:spPr>
+        <p:txBody>
+          <a:bodyPr wrap="square" anchor="t" lIns="0" rIns="0" tIns="0" bIns="0">
+            <a:spAutoFit/>
+          </a:bodyPr>
+          <a:lstStyle/>
+          <a:p>
+            <a:r>
+              <a:rPr sz="1200" b="1" i="0">
+                <a:solidFill>
+                  <a:srgbClr val="0B2545"/>
+                </a:solidFill>
+                <a:latin typeface="Arial"/>
+              </a:rPr>
+              <a:t>Inside one 33 ms cycle — measured</a:t>
+            </a:r>
+          </a:p>
+        </p:txBody>
+      </p:sp>
+      <p:sp>
+        <p:nvSpPr>
+          <p:cNvPr id="17436" name="Rounded Rectangle 17435"/>
+          <p:cNvSpPr/>
+          <p:nvPr/>
+        </p:nvSpPr>
+        <p:spPr>
+          <a:xfrm>
+            <a:off x="7882127" y="4206240"/>
+            <a:ext cx="868680" cy="384048"/>
+          </a:xfrm>
+          <a:prstGeom prst="roundRect">
+            <a:avLst>
+              <a:gd name="adj" fmla="val 6000"/>
+            </a:avLst>
+          </a:prstGeom>
+          <a:solidFill>
+            <a:srgbClr val="0E7C99"/>
+          </a:solidFill>
+          <a:ln>
+            <a:noFill/>
+          </a:ln>
+          <a:effectLst/>
+        </p:spPr>
+        <p:style>
+          <a:lnRef idx="1">
+            <a:schemeClr val="accent1"/>
+          </a:lnRef>
+          <a:fillRef idx="3">
+            <a:schemeClr val="accent1"/>
+          </a:fillRef>
+          <a:effectRef idx="2">
+            <a:schemeClr val="accent1"/>
+          </a:effectRef>
+          <a:fontRef idx="minor">
+            <a:schemeClr val="lt1"/>
+          </a:fontRef>
+        </p:style>
+        <p:txBody>
+          <a:bodyPr rtlCol="0" anchor="ctr" wrap="square" lIns="109728" rIns="109728" tIns="73152" bIns="73152"/>
+          <a:lstStyle/>
+          <a:p>
+            <a:pPr algn="ctr"/>
+            <a:r>
+              <a:rPr sz="950" b="1" i="0">
+                <a:solidFill>
+                  <a:srgbClr val="FFFFFF"/>
+                </a:solidFill>
+                <a:latin typeface="Arial"/>
+              </a:rPr>
+              <a:t>IN</a:t>
+            </a:r>
+          </a:p>
+        </p:txBody>
+      </p:sp>
+      <p:sp>
+        <p:nvSpPr>
+          <p:cNvPr id="17437" name="TextBox 17436"/>
+          <p:cNvSpPr txBox="1"/>
+          <p:nvPr/>
+        </p:nvSpPr>
+        <p:spPr>
+          <a:xfrm>
+            <a:off x="8869680" y="4270248"/>
+            <a:ext cx="2971800" cy="329184"/>
+          </a:xfrm>
+          <a:prstGeom prst="rect">
+            <a:avLst/>
+          </a:prstGeom>
+          <a:noFill/>
+        </p:spPr>
+        <p:txBody>
+          <a:bodyPr wrap="square" anchor="t" lIns="0" rIns="0" tIns="0" bIns="0">
+            <a:spAutoFit/>
+          </a:bodyPr>
+          <a:lstStyle/>
+          <a:p>
+            <a:r>
+              <a:rPr sz="1050" b="0" i="0">
+                <a:solidFill>
+                  <a:srgbClr val="0B2545"/>
+                </a:solidFill>
+                <a:latin typeface="Arial"/>
+              </a:rPr>
+              <a:t>1 frame · 307,200 px (9.2 MPx/s at 30 fps)</a:t>
+            </a:r>
+          </a:p>
+        </p:txBody>
+      </p:sp>
+      <p:sp>
+        <p:nvSpPr>
+          <p:cNvPr id="17438" name="Rounded Rectangle 17437"/>
+          <p:cNvSpPr/>
+          <p:nvPr/>
+        </p:nvSpPr>
+        <p:spPr>
+          <a:xfrm>
+            <a:off x="7882127" y="4681727"/>
+            <a:ext cx="868680" cy="384048"/>
+          </a:xfrm>
+          <a:prstGeom prst="roundRect">
+            <a:avLst>
+              <a:gd name="adj" fmla="val 6000"/>
+            </a:avLst>
+          </a:prstGeom>
+          <a:solidFill>
+            <a:srgbClr val="0E7C99"/>
+          </a:solidFill>
+          <a:ln>
+            <a:noFill/>
+          </a:ln>
+          <a:effectLst/>
+        </p:spPr>
+        <p:style>
+          <a:lnRef idx="1">
+            <a:schemeClr val="accent1"/>
+          </a:lnRef>
+          <a:fillRef idx="3">
+            <a:schemeClr val="accent1"/>
+          </a:fillRef>
+          <a:effectRef idx="2">
+            <a:schemeClr val="accent1"/>
+          </a:effectRef>
+          <a:fontRef idx="minor">
+            <a:schemeClr val="lt1"/>
+          </a:fontRef>
+        </p:style>
+        <p:txBody>
+          <a:bodyPr rtlCol="0" anchor="ctr" wrap="square" lIns="109728" rIns="109728" tIns="73152" bIns="73152"/>
+          <a:lstStyle/>
+          <a:p>
+            <a:pPr algn="ctr"/>
+            <a:r>
+              <a:rPr sz="950" b="1" i="0">
+                <a:solidFill>
+                  <a:srgbClr val="FFFFFF"/>
+                </a:solidFill>
+                <a:latin typeface="Arial"/>
+              </a:rPr>
+              <a:t>SCREEN</a:t>
+            </a:r>
+          </a:p>
+        </p:txBody>
+      </p:sp>
+      <p:sp>
+        <p:nvSpPr>
+          <p:cNvPr id="17439" name="TextBox 17438"/>
+          <p:cNvSpPr txBox="1"/>
+          <p:nvPr/>
+        </p:nvSpPr>
+        <p:spPr>
+          <a:xfrm>
+            <a:off x="8869680" y="4745736"/>
+            <a:ext cx="2971800" cy="329184"/>
+          </a:xfrm>
+          <a:prstGeom prst="rect">
+            <a:avLst/>
+          </a:prstGeom>
+          <a:noFill/>
+        </p:spPr>
+        <p:txBody>
+          <a:bodyPr wrap="square" anchor="t" lIns="0" rIns="0" tIns="0" bIns="0">
+            <a:spAutoFit/>
+          </a:bodyPr>
+          <a:lstStyle/>
+          <a:p>
+            <a:r>
+              <a:rPr sz="1050" b="0" i="0">
+                <a:solidFill>
+                  <a:srgbClr val="0B2545"/>
+                </a:solidFill>
+                <a:latin typeface="Arial"/>
+              </a:rPr>
+              <a:t>≈ 5–6 candidate detections pass CFAR</a:t>
+            </a:r>
+          </a:p>
+        </p:txBody>
+      </p:sp>
+      <p:sp>
+        <p:nvSpPr>
+          <p:cNvPr id="17440" name="Rounded Rectangle 17439"/>
+          <p:cNvSpPr/>
+          <p:nvPr/>
+        </p:nvSpPr>
+        <p:spPr>
+          <a:xfrm>
+            <a:off x="7882127" y="5157215"/>
+            <a:ext cx="868680" cy="384048"/>
+          </a:xfrm>
+          <a:prstGeom prst="roundRect">
+            <a:avLst>
+              <a:gd name="adj" fmla="val 6000"/>
+            </a:avLst>
+          </a:prstGeom>
+          <a:solidFill>
+            <a:srgbClr val="1F8A5B"/>
+          </a:solidFill>
+          <a:ln>
+            <a:noFill/>
+          </a:ln>
+          <a:effectLst/>
+        </p:spPr>
+        <p:style>
+          <a:lnRef idx="1">
+            <a:schemeClr val="accent1"/>
+          </a:lnRef>
+          <a:fillRef idx="3">
+            <a:schemeClr val="accent1"/>
+          </a:fillRef>
+          <a:effectRef idx="2">
+            <a:schemeClr val="accent1"/>
+          </a:effectRef>
+          <a:fontRef idx="minor">
+            <a:schemeClr val="lt1"/>
+          </a:fontRef>
+        </p:style>
+        <p:txBody>
+          <a:bodyPr rtlCol="0" anchor="ctr" wrap="square" lIns="109728" rIns="109728" tIns="73152" bIns="73152"/>
+          <a:lstStyle/>
+          <a:p>
+            <a:pPr algn="ctr"/>
+            <a:r>
+              <a:rPr sz="950" b="1" i="0">
+                <a:solidFill>
+                  <a:srgbClr val="FFFFFF"/>
+                </a:solidFill>
+                <a:latin typeface="Arial"/>
+              </a:rPr>
+              <a:t>DECIDE</a:t>
+            </a:r>
+          </a:p>
+        </p:txBody>
+      </p:sp>
+      <p:sp>
+        <p:nvSpPr>
+          <p:cNvPr id="17441" name="TextBox 17440"/>
+          <p:cNvSpPr txBox="1"/>
+          <p:nvPr/>
+        </p:nvSpPr>
+        <p:spPr>
+          <a:xfrm>
+            <a:off x="8869680" y="5221223"/>
+            <a:ext cx="2971800" cy="329184"/>
+          </a:xfrm>
+          <a:prstGeom prst="rect">
+            <a:avLst/>
+          </a:prstGeom>
+          <a:noFill/>
+        </p:spPr>
+        <p:txBody>
+          <a:bodyPr wrap="square" anchor="t" lIns="0" rIns="0" tIns="0" bIns="0">
+            <a:spAutoFit/>
+          </a:bodyPr>
+          <a:lstStyle/>
+          <a:p>
+            <a:r>
+              <a:rPr sz="1050" b="0" i="0">
+                <a:solidFill>
+                  <a:srgbClr val="0B2545"/>
+                </a:solidFill>
+                <a:latin typeface="Arial"/>
+              </a:rPr>
+              <a:t>1 beacon confirmed · decoys rejected</a:t>
+            </a:r>
+          </a:p>
+        </p:txBody>
+      </p:sp>
+      <p:sp>
+        <p:nvSpPr>
+          <p:cNvPr id="17442" name="Rounded Rectangle 17441"/>
+          <p:cNvSpPr/>
+          <p:nvPr/>
+        </p:nvSpPr>
+        <p:spPr>
+          <a:xfrm>
+            <a:off x="7882127" y="5632703"/>
+            <a:ext cx="868680" cy="384048"/>
+          </a:xfrm>
+          <a:prstGeom prst="roundRect">
+            <a:avLst>
+              <a:gd name="adj" fmla="val 6000"/>
+            </a:avLst>
+          </a:prstGeom>
+          <a:solidFill>
+            <a:srgbClr val="1F8A5B"/>
+          </a:solidFill>
+          <a:ln>
+            <a:noFill/>
+          </a:ln>
+          <a:effectLst/>
+        </p:spPr>
+        <p:style>
+          <a:lnRef idx="1">
+            <a:schemeClr val="accent1"/>
+          </a:lnRef>
+          <a:fillRef idx="3">
+            <a:schemeClr val="accent1"/>
+          </a:fillRef>
+          <a:effectRef idx="2">
+            <a:schemeClr val="accent1"/>
+          </a:effectRef>
+          <a:fontRef idx="minor">
+            <a:schemeClr val="lt1"/>
+          </a:fontRef>
+        </p:style>
+        <p:txBody>
+          <a:bodyPr rtlCol="0" anchor="ctr" wrap="square" lIns="109728" rIns="109728" tIns="73152" bIns="73152"/>
+          <a:lstStyle/>
+          <a:p>
+            <a:pPr algn="ctr"/>
+            <a:r>
+              <a:rPr sz="950" b="1" i="0">
+                <a:solidFill>
+                  <a:srgbClr val="FFFFFF"/>
+                </a:solidFill>
+                <a:latin typeface="Arial"/>
+              </a:rPr>
+              <a:t>OUT</a:t>
+            </a:r>
+          </a:p>
+        </p:txBody>
+      </p:sp>
+      <p:sp>
+        <p:nvSpPr>
+          <p:cNvPr id="17443" name="TextBox 17442"/>
+          <p:cNvSpPr txBox="1"/>
+          <p:nvPr/>
+        </p:nvSpPr>
+        <p:spPr>
+          <a:xfrm>
+            <a:off x="8869680" y="5696711"/>
+            <a:ext cx="2971800" cy="329184"/>
+          </a:xfrm>
+          <a:prstGeom prst="rect">
+            <a:avLst/>
+          </a:prstGeom>
+          <a:noFill/>
+        </p:spPr>
+        <p:txBody>
+          <a:bodyPr wrap="square" anchor="t" lIns="0" rIns="0" tIns="0" bIns="0">
+            <a:spAutoFit/>
+          </a:bodyPr>
+          <a:lstStyle/>
+          <a:p>
+            <a:r>
+              <a:rPr sz="1050" b="0" i="0">
+                <a:solidFill>
+                  <a:srgbClr val="0B2545"/>
+                </a:solidFill>
+                <a:latin typeface="Arial"/>
+              </a:rPr>
+              <a:t>1 pointing command · 14 ms used of 33</a:t>
             </a:r>
           </a:p>
         </p:txBody>
       </p:sp>
       <p:pic>
         <p:nvPicPr>
-          <p:cNvPr id="17437" name="Picture 17436" descr="vid_frame.png"/>
+          <p:cNvPr id="17444" name="Picture 17443" descr="chart_convergence.png"/>
           <p:cNvPicPr>
             <a:picLocks noChangeAspect="1"/>
           </p:cNvPicPr>
           <p:nvPr/>
         </p:nvPicPr>
         <p:blipFill>
-          <a:blip r:embed="rId5"/>
+          <a:blip r:embed="rId4"/>
           <a:stretch>
             <a:fillRect/>
           </a:stretch>
         </p:blipFill>
         <p:spPr>
           <a:xfrm>
-            <a:off x="7882127" y="3895344"/>
-            <a:ext cx="3931920" cy="1887322"/>
+            <a:off x="384048" y="4700016"/>
+            <a:ext cx="7223760" cy="1589227"/>
           </a:xfrm>
           <a:prstGeom prst="rect">
             <a:avLst/>
           </a:prstGeom>
           <a:ln w="9525">
             <a:solidFill>
-              <a:srgbClr val="5A6472"/>
+              <a:srgbClr val="D5DDE5"/>
             </a:solidFill>
           </a:ln>
         </p:spPr>
       </p:pic>
-      <p:sp>
-        <p:nvSpPr>
-          <p:cNvPr id="17438" name="TextBox 17437"/>
-          <p:cNvSpPr txBox="1"/>
-          <p:nvPr/>
-        </p:nvSpPr>
-        <p:spPr>
-          <a:xfrm>
-            <a:off x="7882127" y="5833872"/>
-            <a:ext cx="3931920" cy="274320"/>
-          </a:xfrm>
-          <a:prstGeom prst="rect">
-            <a:avLst/>
-          </a:prstGeom>
-          <a:noFill/>
-        </p:spPr>
-        <p:txBody>
-          <a:bodyPr wrap="square" anchor="t" lIns="0" rIns="0" tIns="0" bIns="0">
-            <a:spAutoFit/>
-          </a:bodyPr>
-          <a:lstStyle/>
-          <a:p>
-            <a:pPr algn="ctr"/>
-            <a:r>
-              <a:rPr sz="1000" b="0" i="1">
-                <a:solidFill>
-                  <a:srgbClr val="5A6472"/>
-                </a:solidFill>
-                <a:latin typeface="Arial"/>
-              </a:rPr>
-              <a:t>Working prototype — tracking a satellite pass</a:t>
-            </a:r>
-          </a:p>
-        </p:txBody>
-      </p:sp>
     </p:spTree>
   </p:cSld>
   <p:clrMapOvr>
@@ -9168,6 +9517,70 @@
           </a:p>
         </p:txBody>
       </p:sp>
+      <p:sp>
+        <p:nvSpPr>
+          <p:cNvPr id="12" name="Oval 11" descr="Your startup LOGO">
+            <a:extLst>
+              <a:ext uri="{FF2B5EF4-FFF2-40B4-BE49-F238E27FC236}">
+                <a16:creationId xmlns:a16="http://schemas.microsoft.com/office/drawing/2014/main" id="{5DBCE864-823D-4A13-9607-5DA1F0ED5FB8}"/>
+              </a:ext>
+              <a:ext uri="{C183D7F6-B498-43B3-948B-1728B52AA6E4}">
+                <adec:decorative xmlns:adec="http://schemas.microsoft.com/office/drawing/2017/decorative" xmlns="" val="0"/>
+              </a:ext>
+            </a:extLst>
+          </p:cNvPr>
+          <p:cNvSpPr/>
+          <p:nvPr/>
+        </p:nvSpPr>
+        <p:spPr>
+          <a:xfrm>
+            <a:off x="329773" y="252246"/>
+            <a:ext cx="1251857" cy="807334"/>
+          </a:xfrm>
+          <a:prstGeom prst="ellipse">
+            <a:avLst/>
+          </a:prstGeom>
+          <a:solidFill>
+            <a:srgbClr val="0B2545"/>
+          </a:solidFill>
+          <a:ln w="15875">
+            <a:solidFill>
+              <a:srgbClr val="0E7C99"/>
+            </a:solidFill>
+          </a:ln>
+        </p:spPr>
+        <p:style>
+          <a:lnRef idx="2">
+            <a:schemeClr val="accent4"/>
+          </a:lnRef>
+          <a:fillRef idx="1">
+            <a:schemeClr val="lt1"/>
+          </a:fillRef>
+          <a:effectRef idx="0">
+            <a:schemeClr val="accent4"/>
+          </a:effectRef>
+          <a:fontRef idx="minor">
+            <a:schemeClr val="dk1"/>
+          </a:fontRef>
+        </p:style>
+        <p:txBody>
+          <a:bodyPr rtlCol="0" anchor="ctr"/>
+          <a:lstStyle/>
+          <a:p>
+            <a:pPr algn="ctr"/>
+            <a:r>
+              <a:rPr sz="1200" b="1" i="0">
+                <a:solidFill>
+                  <a:srgbClr val="FFFFFF"/>
+                </a:solidFill>
+                <a:latin typeface="Arial"/>
+              </a:rPr>
+              <a:t>ZeroDrift</a:t>
+            </a:r>
+            <a:endParaRPr lang="en-IN" dirty="0"/>
+          </a:p>
+        </p:txBody>
+      </p:sp>
       <p:pic>
         <p:nvPicPr>
           <p:cNvPr id="11" name="Picture 10"/>
@@ -9198,76 +9611,9 @@
           </a:prstGeom>
         </p:spPr>
       </p:pic>
-      <p:pic>
-        <p:nvPicPr>
-          <p:cNvPr id="17411" name="Picture 17410" descr="logo_scope.png"/>
-          <p:cNvPicPr>
-            <a:picLocks noChangeAspect="1"/>
-          </p:cNvPicPr>
-          <p:nvPr/>
-        </p:nvPicPr>
-        <p:blipFill>
-          <a:blip r:embed="rId4"/>
-          <a:stretch>
-            <a:fillRect/>
-          </a:stretch>
-        </p:blipFill>
-        <p:spPr>
-          <a:xfrm>
-            <a:off x="310896" y="146304"/>
-            <a:ext cx="841248" cy="841248"/>
-          </a:xfrm>
-          <a:prstGeom prst="rect">
-            <a:avLst/>
-          </a:prstGeom>
-        </p:spPr>
-      </p:pic>
-      <p:sp>
-        <p:nvSpPr>
-          <p:cNvPr id="17412" name="TextBox 17411"/>
-          <p:cNvSpPr txBox="1"/>
-          <p:nvPr/>
-        </p:nvSpPr>
-        <p:spPr>
-          <a:xfrm>
-            <a:off x="1225296" y="365760"/>
-            <a:ext cx="1463040" cy="457200"/>
-          </a:xfrm>
-          <a:prstGeom prst="rect">
-            <a:avLst/>
-          </a:prstGeom>
-          <a:noFill/>
-        </p:spPr>
-        <p:txBody>
-          <a:bodyPr wrap="square" anchor="t" lIns="0" rIns="0" tIns="0" bIns="0">
-            <a:spAutoFit/>
-          </a:bodyPr>
-          <a:lstStyle/>
-          <a:p>
-            <a:r>
-              <a:rPr sz="1300" b="1" i="0">
-                <a:solidFill>
-                  <a:srgbClr val="0E7C99"/>
-                </a:solidFill>
-                <a:latin typeface="Arial"/>
-              </a:rPr>
-              <a:t>ZERO</a:t>
-            </a:r>
-            <a:r>
-              <a:rPr sz="1300" b="1" i="0">
-                <a:solidFill>
-                  <a:srgbClr val="0B2545"/>
-                </a:solidFill>
-                <a:latin typeface="Arial"/>
-              </a:rPr>
-              <a:t>DRIFT</a:t>
-            </a:r>
-          </a:p>
-        </p:txBody>
-      </p:sp>
-      <p:sp>
-        <p:nvSpPr>
-          <p:cNvPr id="17413" name="Rounded Rectangle 17412"/>
+      <p:sp>
+        <p:nvSpPr>
+          <p:cNvPr id="17411" name="Rounded Rectangle 17410"/>
           <p:cNvSpPr/>
           <p:nvPr/>
         </p:nvSpPr>
@@ -9322,7 +9668,7 @@
       </p:sp>
       <p:sp>
         <p:nvSpPr>
-          <p:cNvPr id="17414" name="Rounded Rectangle 17413"/>
+          <p:cNvPr id="17412" name="Rounded Rectangle 17411"/>
           <p:cNvSpPr/>
           <p:nvPr/>
         </p:nvSpPr>
@@ -9465,7 +9811,7 @@
       </p:sp>
       <p:sp>
         <p:nvSpPr>
-          <p:cNvPr id="17415" name="Rounded Rectangle 17414"/>
+          <p:cNvPr id="17413" name="Rounded Rectangle 17412"/>
           <p:cNvSpPr/>
           <p:nvPr/>
         </p:nvSpPr>
@@ -9520,7 +9866,7 @@
       </p:sp>
       <p:sp>
         <p:nvSpPr>
-          <p:cNvPr id="17416" name="Rounded Rectangle 17415"/>
+          <p:cNvPr id="17414" name="Rounded Rectangle 17413"/>
           <p:cNvSpPr/>
           <p:nvPr/>
         </p:nvSpPr>
@@ -9663,7 +10009,7 @@
       </p:sp>
       <p:sp>
         <p:nvSpPr>
-          <p:cNvPr id="17417" name="Rounded Rectangle 17416"/>
+          <p:cNvPr id="17415" name="Rounded Rectangle 17414"/>
           <p:cNvSpPr/>
           <p:nvPr/>
         </p:nvSpPr>
@@ -9718,7 +10064,7 @@
       </p:sp>
       <p:sp>
         <p:nvSpPr>
-          <p:cNvPr id="17418" name="Rounded Rectangle 17417"/>
+          <p:cNvPr id="17416" name="Rounded Rectangle 17415"/>
           <p:cNvSpPr/>
           <p:nvPr/>
         </p:nvSpPr>
@@ -9861,7 +10207,7 @@
       </p:sp>
       <p:sp>
         <p:nvSpPr>
-          <p:cNvPr id="17419" name="TextBox 17418"/>
+          <p:cNvPr id="17417" name="TextBox 17416"/>
           <p:cNvSpPr txBox="1"/>
           <p:nvPr/>
         </p:nvSpPr>
@@ -10284,6 +10630,70 @@
           </a:p>
         </p:txBody>
       </p:sp>
+      <p:sp>
+        <p:nvSpPr>
+          <p:cNvPr id="12" name="Oval 11" descr="Your startup LOGO">
+            <a:extLst>
+              <a:ext uri="{FF2B5EF4-FFF2-40B4-BE49-F238E27FC236}">
+                <a16:creationId xmlns:a16="http://schemas.microsoft.com/office/drawing/2014/main" id="{5DBCE864-823D-4A13-9607-5DA1F0ED5FB8}"/>
+              </a:ext>
+              <a:ext uri="{C183D7F6-B498-43B3-948B-1728B52AA6E4}">
+                <adec:decorative xmlns:adec="http://schemas.microsoft.com/office/drawing/2017/decorative" xmlns="" val="0"/>
+              </a:ext>
+            </a:extLst>
+          </p:cNvPr>
+          <p:cNvSpPr/>
+          <p:nvPr/>
+        </p:nvSpPr>
+        <p:spPr>
+          <a:xfrm>
+            <a:off x="329773" y="252246"/>
+            <a:ext cx="1251857" cy="807334"/>
+          </a:xfrm>
+          <a:prstGeom prst="ellipse">
+            <a:avLst/>
+          </a:prstGeom>
+          <a:solidFill>
+            <a:srgbClr val="0B2545"/>
+          </a:solidFill>
+          <a:ln w="15875">
+            <a:solidFill>
+              <a:srgbClr val="0E7C99"/>
+            </a:solidFill>
+          </a:ln>
+        </p:spPr>
+        <p:style>
+          <a:lnRef idx="2">
+            <a:schemeClr val="accent4"/>
+          </a:lnRef>
+          <a:fillRef idx="1">
+            <a:schemeClr val="lt1"/>
+          </a:fillRef>
+          <a:effectRef idx="0">
+            <a:schemeClr val="accent4"/>
+          </a:effectRef>
+          <a:fontRef idx="minor">
+            <a:schemeClr val="dk1"/>
+          </a:fontRef>
+        </p:style>
+        <p:txBody>
+          <a:bodyPr rtlCol="0" anchor="ctr"/>
+          <a:lstStyle/>
+          <a:p>
+            <a:pPr algn="ctr"/>
+            <a:r>
+              <a:rPr sz="1200" b="1" i="0">
+                <a:solidFill>
+                  <a:srgbClr val="FFFFFF"/>
+                </a:solidFill>
+                <a:latin typeface="Arial"/>
+              </a:rPr>
+              <a:t>ZeroDrift</a:t>
+            </a:r>
+            <a:endParaRPr lang="en-IN" dirty="0"/>
+          </a:p>
+        </p:txBody>
+      </p:sp>
       <p:pic>
         <p:nvPicPr>
           <p:cNvPr id="11" name="Picture 10"/>
@@ -10314,76 +10724,9 @@
           </a:prstGeom>
         </p:spPr>
       </p:pic>
-      <p:pic>
-        <p:nvPicPr>
-          <p:cNvPr id="17411" name="Picture 17410" descr="logo_scope.png"/>
-          <p:cNvPicPr>
-            <a:picLocks noChangeAspect="1"/>
-          </p:cNvPicPr>
-          <p:nvPr/>
-        </p:nvPicPr>
-        <p:blipFill>
-          <a:blip r:embed="rId4"/>
-          <a:stretch>
-            <a:fillRect/>
-          </a:stretch>
-        </p:blipFill>
-        <p:spPr>
-          <a:xfrm>
-            <a:off x="310896" y="146304"/>
-            <a:ext cx="841248" cy="841248"/>
-          </a:xfrm>
-          <a:prstGeom prst="rect">
-            <a:avLst/>
-          </a:prstGeom>
-        </p:spPr>
-      </p:pic>
-      <p:sp>
-        <p:nvSpPr>
-          <p:cNvPr id="17412" name="TextBox 17411"/>
-          <p:cNvSpPr txBox="1"/>
-          <p:nvPr/>
-        </p:nvSpPr>
-        <p:spPr>
-          <a:xfrm>
-            <a:off x="1225296" y="365760"/>
-            <a:ext cx="1463040" cy="457200"/>
-          </a:xfrm>
-          <a:prstGeom prst="rect">
-            <a:avLst/>
-          </a:prstGeom>
-          <a:noFill/>
-        </p:spPr>
-        <p:txBody>
-          <a:bodyPr wrap="square" anchor="t" lIns="0" rIns="0" tIns="0" bIns="0">
-            <a:spAutoFit/>
-          </a:bodyPr>
-          <a:lstStyle/>
-          <a:p>
-            <a:r>
-              <a:rPr sz="1300" b="1" i="0">
-                <a:solidFill>
-                  <a:srgbClr val="0E7C99"/>
-                </a:solidFill>
-                <a:latin typeface="Arial"/>
-              </a:rPr>
-              <a:t>ZERO</a:t>
-            </a:r>
-            <a:r>
-              <a:rPr sz="1300" b="1" i="0">
-                <a:solidFill>
-                  <a:srgbClr val="0B2545"/>
-                </a:solidFill>
-                <a:latin typeface="Arial"/>
-              </a:rPr>
-              <a:t>DRIFT</a:t>
-            </a:r>
-          </a:p>
-        </p:txBody>
-      </p:sp>
-      <p:sp>
-        <p:nvSpPr>
-          <p:cNvPr id="17413" name="Rounded Rectangle 17412"/>
+      <p:sp>
+        <p:nvSpPr>
+          <p:cNvPr id="17411" name="Rounded Rectangle 17410"/>
           <p:cNvSpPr/>
           <p:nvPr/>
         </p:nvSpPr>
@@ -10454,7 +10797,7 @@
       </p:sp>
       <p:sp>
         <p:nvSpPr>
-          <p:cNvPr id="17414" name="Rounded Rectangle 17413"/>
+          <p:cNvPr id="17412" name="Rounded Rectangle 17411"/>
           <p:cNvSpPr/>
           <p:nvPr/>
         </p:nvSpPr>
@@ -10525,7 +10868,7 @@
       </p:sp>
       <p:sp>
         <p:nvSpPr>
-          <p:cNvPr id="17415" name="Rounded Rectangle 17414"/>
+          <p:cNvPr id="17413" name="Rounded Rectangle 17412"/>
           <p:cNvSpPr/>
           <p:nvPr/>
         </p:nvSpPr>
@@ -10596,7 +10939,7 @@
       </p:sp>
       <p:sp>
         <p:nvSpPr>
-          <p:cNvPr id="17416" name="Rounded Rectangle 17415"/>
+          <p:cNvPr id="17414" name="Rounded Rectangle 17413"/>
           <p:cNvSpPr/>
           <p:nvPr/>
         </p:nvSpPr>
@@ -10667,7 +11010,7 @@
       </p:sp>
       <p:sp>
         <p:nvSpPr>
-          <p:cNvPr id="17417" name="TextBox 17416"/>
+          <p:cNvPr id="17415" name="TextBox 17414"/>
           <p:cNvSpPr txBox="1"/>
           <p:nvPr/>
         </p:nvSpPr>
@@ -11132,6 +11475,70 @@
           </a:p>
         </p:txBody>
       </p:sp>
+      <p:sp>
+        <p:nvSpPr>
+          <p:cNvPr id="9" name="Oval 8" descr="Your startup LOGO">
+            <a:extLst>
+              <a:ext uri="{FF2B5EF4-FFF2-40B4-BE49-F238E27FC236}">
+                <a16:creationId xmlns:a16="http://schemas.microsoft.com/office/drawing/2014/main" id="{5DBCE864-823D-4A13-9607-5DA1F0ED5FB8}"/>
+              </a:ext>
+              <a:ext uri="{C183D7F6-B498-43B3-948B-1728B52AA6E4}">
+                <adec:decorative xmlns:adec="http://schemas.microsoft.com/office/drawing/2017/decorative" xmlns="" val="0"/>
+              </a:ext>
+            </a:extLst>
+          </p:cNvPr>
+          <p:cNvSpPr/>
+          <p:nvPr/>
+        </p:nvSpPr>
+        <p:spPr>
+          <a:xfrm>
+            <a:off x="329773" y="252246"/>
+            <a:ext cx="1251857" cy="807334"/>
+          </a:xfrm>
+          <a:prstGeom prst="ellipse">
+            <a:avLst/>
+          </a:prstGeom>
+          <a:solidFill>
+            <a:srgbClr val="0B2545"/>
+          </a:solidFill>
+          <a:ln w="15875">
+            <a:solidFill>
+              <a:srgbClr val="0E7C99"/>
+            </a:solidFill>
+          </a:ln>
+        </p:spPr>
+        <p:style>
+          <a:lnRef idx="2">
+            <a:schemeClr val="accent4"/>
+          </a:lnRef>
+          <a:fillRef idx="1">
+            <a:schemeClr val="lt1"/>
+          </a:fillRef>
+          <a:effectRef idx="0">
+            <a:schemeClr val="accent4"/>
+          </a:effectRef>
+          <a:fontRef idx="minor">
+            <a:schemeClr val="dk1"/>
+          </a:fontRef>
+        </p:style>
+        <p:txBody>
+          <a:bodyPr rtlCol="0" anchor="ctr"/>
+          <a:lstStyle/>
+          <a:p>
+            <a:pPr algn="ctr"/>
+            <a:r>
+              <a:rPr sz="1200" b="1" i="0">
+                <a:solidFill>
+                  <a:srgbClr val="FFFFFF"/>
+                </a:solidFill>
+                <a:latin typeface="Arial"/>
+              </a:rPr>
+              <a:t>ZeroDrift</a:t>
+            </a:r>
+            <a:endParaRPr lang="en-IN" dirty="0"/>
+          </a:p>
+        </p:txBody>
+      </p:sp>
       <p:pic>
         <p:nvPicPr>
           <p:cNvPr id="12" name="Picture 11"/>
@@ -11162,76 +11569,9 @@
           </a:prstGeom>
         </p:spPr>
       </p:pic>
-      <p:pic>
-        <p:nvPicPr>
-          <p:cNvPr id="17411" name="Picture 17410" descr="logo_scope.png"/>
-          <p:cNvPicPr>
-            <a:picLocks noChangeAspect="1"/>
-          </p:cNvPicPr>
-          <p:nvPr/>
-        </p:nvPicPr>
-        <p:blipFill>
-          <a:blip r:embed="rId4"/>
-          <a:stretch>
-            <a:fillRect/>
-          </a:stretch>
-        </p:blipFill>
-        <p:spPr>
-          <a:xfrm>
-            <a:off x="310896" y="146304"/>
-            <a:ext cx="841248" cy="841248"/>
-          </a:xfrm>
-          <a:prstGeom prst="rect">
-            <a:avLst/>
-          </a:prstGeom>
-        </p:spPr>
-      </p:pic>
-      <p:sp>
-        <p:nvSpPr>
-          <p:cNvPr id="17412" name="TextBox 17411"/>
-          <p:cNvSpPr txBox="1"/>
-          <p:nvPr/>
-        </p:nvSpPr>
-        <p:spPr>
-          <a:xfrm>
-            <a:off x="1225296" y="365760"/>
-            <a:ext cx="1463040" cy="457200"/>
-          </a:xfrm>
-          <a:prstGeom prst="rect">
-            <a:avLst/>
-          </a:prstGeom>
-          <a:noFill/>
-        </p:spPr>
-        <p:txBody>
-          <a:bodyPr wrap="square" anchor="t" lIns="0" rIns="0" tIns="0" bIns="0">
-            <a:spAutoFit/>
-          </a:bodyPr>
-          <a:lstStyle/>
-          <a:p>
-            <a:r>
-              <a:rPr sz="1300" b="1" i="0">
-                <a:solidFill>
-                  <a:srgbClr val="0E7C99"/>
-                </a:solidFill>
-                <a:latin typeface="Arial"/>
-              </a:rPr>
-              <a:t>ZERO</a:t>
-            </a:r>
-            <a:r>
-              <a:rPr sz="1300" b="1" i="0">
-                <a:solidFill>
-                  <a:srgbClr val="0B2545"/>
-                </a:solidFill>
-                <a:latin typeface="Arial"/>
-              </a:rPr>
-              <a:t>DRIFT</a:t>
-            </a:r>
-          </a:p>
-        </p:txBody>
-      </p:sp>
-      <p:sp>
-        <p:nvSpPr>
-          <p:cNvPr id="17413" name="TextBox 17412"/>
+      <p:sp>
+        <p:nvSpPr>
+          <p:cNvPr id="17411" name="TextBox 17410"/>
           <p:cNvSpPr txBox="1"/>
           <p:nvPr/>
         </p:nvSpPr>
@@ -11265,7 +11605,7 @@
       </p:sp>
       <p:sp>
         <p:nvSpPr>
-          <p:cNvPr id="17414" name="TextBox 17413"/>
+          <p:cNvPr id="17412" name="TextBox 17411"/>
           <p:cNvSpPr txBox="1"/>
           <p:nvPr/>
         </p:nvSpPr>
@@ -11314,7 +11654,7 @@
                   <a:srgbClr val="0E7C99"/>
                 </a:solidFill>
                 <a:latin typeface="Arial"/>
-                <a:hlinkClick r:id="rId5"/>
+                <a:hlinkClick r:id="rId4"/>
               </a:rPr>
               <a:t>[link]</a:t>
             </a:r>
@@ -11349,7 +11689,7 @@
                   <a:srgbClr val="0E7C99"/>
                 </a:solidFill>
                 <a:latin typeface="Arial"/>
-                <a:hlinkClick r:id="rId6"/>
+                <a:hlinkClick r:id="rId5"/>
               </a:rPr>
               <a:t>[link]</a:t>
             </a:r>
@@ -11384,7 +11724,7 @@
                   <a:srgbClr val="0E7C99"/>
                 </a:solidFill>
                 <a:latin typeface="Arial"/>
-                <a:hlinkClick r:id="rId7"/>
+                <a:hlinkClick r:id="rId6"/>
               </a:rPr>
               <a:t>[link]</a:t>
             </a:r>
@@ -11419,7 +11759,7 @@
                   <a:srgbClr val="0E7C99"/>
                 </a:solidFill>
                 <a:latin typeface="Arial"/>
-                <a:hlinkClick r:id="rId8"/>
+                <a:hlinkClick r:id="rId7"/>
               </a:rPr>
               <a:t>[link]</a:t>
             </a:r>
@@ -11454,7 +11794,7 @@
                   <a:srgbClr val="0E7C99"/>
                 </a:solidFill>
                 <a:latin typeface="Arial"/>
-                <a:hlinkClick r:id="rId9"/>
+                <a:hlinkClick r:id="rId8"/>
               </a:rPr>
               <a:t>[link]</a:t>
             </a:r>
@@ -11489,7 +11829,7 @@
                   <a:srgbClr val="0E7C99"/>
                 </a:solidFill>
                 <a:latin typeface="Arial"/>
-                <a:hlinkClick r:id="rId10"/>
+                <a:hlinkClick r:id="rId9"/>
               </a:rPr>
               <a:t>[link]</a:t>
             </a:r>
@@ -11524,7 +11864,7 @@
                   <a:srgbClr val="0E7C99"/>
                 </a:solidFill>
                 <a:latin typeface="Arial"/>
-                <a:hlinkClick r:id="rId11"/>
+                <a:hlinkClick r:id="rId10"/>
               </a:rPr>
               <a:t>[link]</a:t>
             </a:r>
@@ -11533,7 +11873,7 @@
       </p:sp>
       <p:sp>
         <p:nvSpPr>
-          <p:cNvPr id="17415" name="TextBox 17414"/>
+          <p:cNvPr id="17413" name="TextBox 17412"/>
           <p:cNvSpPr txBox="1"/>
           <p:nvPr/>
         </p:nvSpPr>
@@ -11567,7 +11907,7 @@
       </p:sp>
       <p:sp>
         <p:nvSpPr>
-          <p:cNvPr id="17416" name="TextBox 17415"/>
+          <p:cNvPr id="17414" name="TextBox 17413"/>
           <p:cNvSpPr txBox="1"/>
           <p:nvPr/>
         </p:nvSpPr>
@@ -11607,7 +11947,7 @@
                   <a:srgbClr val="0E7C99"/>
                 </a:solidFill>
                 <a:latin typeface="Arial"/>
-                <a:hlinkClick r:id="rId12"/>
+                <a:hlinkClick r:id="rId11"/>
               </a:rPr>
               <a:t>github.com/pranshukesavmishra/SIH-2026</a:t>
             </a:r>
@@ -11666,7 +12006,7 @@
       </p:sp>
       <p:sp>
         <p:nvSpPr>
-          <p:cNvPr id="17417" name="Rounded Rectangle 17416"/>
+          <p:cNvPr id="17415" name="Rounded Rectangle 17414"/>
           <p:cNvSpPr/>
           <p:nvPr/>
         </p:nvSpPr>

--- a/docs/submission/ZeroDrift_SIH26169.pptx
+++ b/docs/submission/ZeroDrift_SIH26169.pptx
@@ -6690,7 +6690,7 @@
         </p:nvSpPr>
         <p:spPr>
           <a:xfrm>
-            <a:off x="6903720" y="4846320"/>
+            <a:off x="6903720" y="4645152"/>
             <a:ext cx="4892040" cy="274320"/>
           </a:xfrm>
           <a:prstGeom prst="rect">
@@ -6926,8 +6926,8 @@
         </p:nvSpPr>
         <p:spPr>
           <a:xfrm>
-            <a:off x="6903720" y="5257800"/>
-            <a:ext cx="4892040" cy="822960"/>
+            <a:off x="6903720" y="4901184"/>
+            <a:ext cx="4892040" cy="237744"/>
           </a:xfrm>
           <a:prstGeom prst="rect">
             <a:avLst/>
@@ -6941,34 +6941,34 @@
           <a:lstStyle/>
           <a:p>
             <a:r>
-              <a:rPr sz="1200" b="1" i="0">
+              <a:rPr sz="1100" b="1" i="0">
                 <a:solidFill>
                   <a:srgbClr val="0B2545"/>
                 </a:solidFill>
                 <a:latin typeface="Arial"/>
               </a:rPr>
-              <a:t>Median pointing error </a:t>
-            </a:r>
-            <a:r>
-              <a:rPr sz="1300" b="1" i="0">
+              <a:t>Measured: </a:t>
+            </a:r>
+            <a:r>
+              <a:rPr sz="1100" b="1" i="0">
                 <a:solidFill>
                   <a:srgbClr val="0E7C99"/>
                 </a:solidFill>
                 <a:latin typeface="Arial"/>
               </a:rPr>
-              <a:t>207 µrad</a:t>
-            </a:r>
-            <a:r>
-              <a:rPr sz="1200" b="0" i="0">
+              <a:t>median 223 µrad</a:t>
+            </a:r>
+            <a:r>
+              <a:rPr sz="1100" b="0" i="0">
                 <a:solidFill>
                   <a:srgbClr val="0B2545"/>
                 </a:solidFill>
                 <a:latin typeface="Arial"/>
               </a:rPr>
-              <a:t> — beacon kept inside the field of view </a:t>
-            </a:r>
-            <a:r>
-              <a:rPr sz="1300" b="1" i="0">
+              <a:t> in lock · in-FOV </a:t>
+            </a:r>
+            <a:r>
+              <a:rPr sz="1100" b="1" i="0">
                 <a:solidFill>
                   <a:srgbClr val="1F8A5B"/>
                 </a:solidFill>
@@ -6977,17 +6977,46 @@
               <a:t>100%</a:t>
             </a:r>
             <a:r>
-              <a:rPr sz="1200" b="0" i="0">
+              <a:rPr sz="1100" b="0" i="0">
                 <a:solidFill>
                   <a:srgbClr val="0B2545"/>
                 </a:solidFill>
                 <a:latin typeface="Arial"/>
               </a:rPr>
-              <a:t> of the pass.</a:t>
-            </a:r>
-          </a:p>
-        </p:txBody>
-      </p:sp>
+              <a:t> of the pass</a:t>
+            </a:r>
+          </a:p>
+        </p:txBody>
+      </p:sp>
+      <p:pic>
+        <p:nvPicPr>
+          <p:cNvPr id="15371" name="Picture 15370" descr="chart_convergence.png"/>
+          <p:cNvPicPr>
+            <a:picLocks noChangeAspect="1"/>
+          </p:cNvPicPr>
+          <p:nvPr/>
+        </p:nvPicPr>
+        <p:blipFill>
+          <a:blip r:embed="rId5"/>
+          <a:stretch>
+            <a:fillRect/>
+          </a:stretch>
+        </p:blipFill>
+        <p:spPr>
+          <a:xfrm>
+            <a:off x="6903720" y="5138928"/>
+            <a:ext cx="4892040" cy="1076249"/>
+          </a:xfrm>
+          <a:prstGeom prst="rect">
+            <a:avLst/>
+          </a:prstGeom>
+          <a:ln w="9525">
+            <a:solidFill>
+              <a:srgbClr val="D5DDE5"/>
+            </a:solidFill>
+          </a:ln>
+        </p:spPr>
+      </p:pic>
     </p:spTree>
   </p:cSld>
   <p:clrMapOvr>
@@ -7344,8 +7373,8 @@
         </p:nvSpPr>
         <p:spPr>
           <a:xfrm>
-            <a:off x="384048" y="1645920"/>
-            <a:ext cx="11430000" cy="658368"/>
+            <a:off x="384048" y="1591056"/>
+            <a:ext cx="3017520" cy="310896"/>
           </a:xfrm>
           <a:prstGeom prst="rect">
             <a:avLst/>
@@ -7359,65 +7388,61 @@
           <a:lstStyle/>
           <a:p>
             <a:r>
-              <a:rPr sz="1300" b="1" i="0">
+              <a:rPr sz="1600" b="1" i="0">
                 <a:solidFill>
                   <a:srgbClr val="0B2545"/>
                 </a:solidFill>
                 <a:latin typeface="Arial"/>
               </a:rPr>
-              <a:t>Stack:  </a:t>
-            </a:r>
-            <a:r>
-              <a:rPr sz="1250" b="0" i="0">
-                <a:solidFill>
-                  <a:srgbClr val="0B2545"/>
-                </a:solidFill>
-                <a:latin typeface="Arial"/>
-              </a:rPr>
-              <a:t>Python 3.11 · NumPy · OpenCV · PySide6 + pyqtgraph GUI · SGP4 real orbits · from-scratch NumPy neural net · PyInstaller app · pytest (</a:t>
-            </a:r>
-            <a:r>
-              <a:rPr sz="1250" b="1" i="0">
-                <a:solidFill>
-                  <a:srgbClr val="1F8A5B"/>
-                </a:solidFill>
-                <a:latin typeface="Arial"/>
-              </a:rPr>
-              <a:t>73 tests</a:t>
-            </a:r>
-            <a:r>
-              <a:rPr sz="1250" b="0" i="0">
-                <a:solidFill>
-                  <a:srgbClr val="0B2545"/>
-                </a:solidFill>
-                <a:latin typeface="Arial"/>
-              </a:rPr>
-              <a:t>) · GitHub CI</a:t>
-            </a:r>
-          </a:p>
-          <a:p>
-            <a:r>
-              <a:rPr sz="1100" b="0" i="1">
+              <a:t>TECH STACK</a:t>
+            </a:r>
+          </a:p>
+        </p:txBody>
+      </p:sp>
+      <p:sp>
+        <p:nvSpPr>
+          <p:cNvPr id="17412" name="TextBox 17411"/>
+          <p:cNvSpPr txBox="1"/>
+          <p:nvPr/>
+        </p:nvSpPr>
+        <p:spPr>
+          <a:xfrm>
+            <a:off x="384048" y="1975104"/>
+            <a:ext cx="3017520" cy="219456"/>
+          </a:xfrm>
+          <a:prstGeom prst="rect">
+            <a:avLst/>
+          </a:prstGeom>
+          <a:noFill/>
+        </p:spPr>
+        <p:txBody>
+          <a:bodyPr wrap="square" anchor="t" lIns="0" rIns="0" tIns="0" bIns="0">
+            <a:spAutoFit/>
+          </a:bodyPr>
+          <a:lstStyle/>
+          <a:p>
+            <a:r>
+              <a:rPr sz="1000" b="1" i="0">
                 <a:solidFill>
                   <a:srgbClr val="5A6472"/>
                 </a:solidFill>
                 <a:latin typeface="Arial"/>
               </a:rPr>
-              <a:t>100% open source — zero licensing cost, runs on any laptop</a:t>
-            </a:r>
-          </a:p>
-        </p:txBody>
-      </p:sp>
-      <p:sp>
-        <p:nvSpPr>
-          <p:cNvPr id="17412" name="Rounded Rectangle 17411"/>
+              <a:t>CORE</a:t>
+            </a:r>
+          </a:p>
+        </p:txBody>
+      </p:sp>
+      <p:sp>
+        <p:nvSpPr>
+          <p:cNvPr id="17413" name="Rounded Rectangle 17412"/>
           <p:cNvSpPr/>
           <p:nvPr/>
         </p:nvSpPr>
         <p:spPr>
           <a:xfrm>
-            <a:off x="384048" y="2395728"/>
-            <a:ext cx="1755648" cy="1078992"/>
+            <a:off x="384048" y="2212848"/>
+            <a:ext cx="402336" cy="329184"/>
           </a:xfrm>
           <a:prstGeom prst="roundRect">
             <a:avLst>
@@ -7447,62 +7472,40 @@
           </a:fontRef>
         </p:style>
         <p:txBody>
-          <a:bodyPr rtlCol="0" anchor="ctr" wrap="square" lIns="109728" rIns="109728" tIns="73152" bIns="73152"/>
+          <a:bodyPr rtlCol="0" anchor="ctr" wrap="none" lIns="109728" rIns="109728" tIns="73152" bIns="73152"/>
           <a:lstStyle/>
           <a:p>
             <a:pPr algn="ctr"/>
             <a:r>
-              <a:rPr sz="1150" b="1" i="0">
+              <a:rPr sz="950" b="1" i="0">
                 <a:solidFill>
                   <a:srgbClr val="FFFFFF"/>
                 </a:solidFill>
                 <a:latin typeface="Arial"/>
               </a:rPr>
-              <a:t>VIRTUAL WORLD</a:t>
-            </a:r>
-          </a:p>
-          <a:p>
-            <a:pPr algn="ctr"/>
-            <a:r>
-              <a:rPr sz="850" b="0" i="0">
-                <a:solidFill>
-                  <a:srgbClr val="D5E3EC"/>
-                </a:solidFill>
-                <a:latin typeface="Arial"/>
-              </a:rPr>
-              <a:t>sky · stars · clutter</a:t>
-            </a:r>
-          </a:p>
-          <a:p>
-            <a:pPr algn="ctr"/>
-            <a:r>
-              <a:rPr sz="850" b="0" i="0">
-                <a:solidFill>
-                  <a:srgbClr val="D5E3EC"/>
-                </a:solidFill>
-                <a:latin typeface="Arial"/>
-              </a:rPr>
-              <a:t>turbulence · vibration</a:t>
-            </a:r>
-          </a:p>
-        </p:txBody>
-      </p:sp>
-      <p:sp>
-        <p:nvSpPr>
-          <p:cNvPr id="17413" name="Right Arrow 17412"/>
+              <a:t>Py</a:t>
+            </a:r>
+          </a:p>
+        </p:txBody>
+      </p:sp>
+      <p:sp>
+        <p:nvSpPr>
+          <p:cNvPr id="17414" name="Rounded Rectangle 17413"/>
           <p:cNvSpPr/>
           <p:nvPr/>
         </p:nvSpPr>
         <p:spPr>
           <a:xfrm>
-            <a:off x="2121408" y="2852928"/>
-            <a:ext cx="169164" cy="164592"/>
-          </a:xfrm>
-          <a:prstGeom prst="rightArrow">
-            <a:avLst/>
+            <a:off x="877824" y="2212848"/>
+            <a:ext cx="402336" cy="329184"/>
+          </a:xfrm>
+          <a:prstGeom prst="roundRect">
+            <a:avLst>
+              <a:gd name="adj" fmla="val 6000"/>
+            </a:avLst>
           </a:prstGeom>
           <a:solidFill>
-            <a:srgbClr val="5A6472"/>
+            <a:srgbClr val="0E7C99"/>
           </a:solidFill>
           <a:ln>
             <a:noFill/>
@@ -7524,23 +7527,32 @@
           </a:fontRef>
         </p:style>
         <p:txBody>
-          <a:bodyPr rtlCol="0" anchor="ctr"/>
+          <a:bodyPr rtlCol="0" anchor="ctr" wrap="none" lIns="109728" rIns="109728" tIns="73152" bIns="73152"/>
           <a:lstStyle/>
           <a:p>
             <a:pPr algn="ctr"/>
-          </a:p>
-        </p:txBody>
-      </p:sp>
-      <p:sp>
-        <p:nvSpPr>
-          <p:cNvPr id="17414" name="Rounded Rectangle 17413"/>
+            <a:r>
+              <a:rPr sz="950" b="1" i="0">
+                <a:solidFill>
+                  <a:srgbClr val="FFFFFF"/>
+                </a:solidFill>
+                <a:latin typeface="Arial"/>
+              </a:rPr>
+              <a:t>NP</a:t>
+            </a:r>
+          </a:p>
+        </p:txBody>
+      </p:sp>
+      <p:sp>
+        <p:nvSpPr>
+          <p:cNvPr id="17415" name="Rounded Rectangle 17414"/>
           <p:cNvSpPr/>
           <p:nvPr/>
         </p:nvSpPr>
         <p:spPr>
           <a:xfrm>
-            <a:off x="2263139" y="2395728"/>
-            <a:ext cx="1755648" cy="1078992"/>
+            <a:off x="1371600" y="2212848"/>
+            <a:ext cx="402336" cy="329184"/>
           </a:xfrm>
           <a:prstGeom prst="roundRect">
             <a:avLst>
@@ -7570,62 +7582,108 @@
           </a:fontRef>
         </p:style>
         <p:txBody>
-          <a:bodyPr rtlCol="0" anchor="ctr" wrap="square" lIns="109728" rIns="109728" tIns="73152" bIns="73152"/>
+          <a:bodyPr rtlCol="0" anchor="ctr" wrap="none" lIns="109728" rIns="109728" tIns="73152" bIns="73152"/>
           <a:lstStyle/>
           <a:p>
             <a:pPr algn="ctr"/>
             <a:r>
-              <a:rPr sz="1150" b="1" i="0">
+              <a:rPr sz="950" b="1" i="0">
                 <a:solidFill>
                   <a:srgbClr val="FFFFFF"/>
                 </a:solidFill>
                 <a:latin typeface="Arial"/>
               </a:rPr>
-              <a:t>DETECT</a:t>
-            </a:r>
-          </a:p>
-          <a:p>
-            <a:pPr algn="ctr"/>
+              <a:t>CV</a:t>
+            </a:r>
+          </a:p>
+        </p:txBody>
+      </p:sp>
+      <p:sp>
+        <p:nvSpPr>
+          <p:cNvPr id="17416" name="TextBox 17415"/>
+          <p:cNvSpPr txBox="1"/>
+          <p:nvPr/>
+        </p:nvSpPr>
+        <p:spPr>
+          <a:xfrm>
+            <a:off x="1901952" y="2249424"/>
+            <a:ext cx="1764791" cy="310896"/>
+          </a:xfrm>
+          <a:prstGeom prst="rect">
+            <a:avLst/>
+          </a:prstGeom>
+          <a:noFill/>
+        </p:spPr>
+        <p:txBody>
+          <a:bodyPr wrap="square" anchor="t" lIns="0" rIns="0" tIns="0" bIns="0">
+            <a:spAutoFit/>
+          </a:bodyPr>
+          <a:lstStyle/>
+          <a:p>
             <a:r>
               <a:rPr sz="850" b="0" i="0">
                 <a:solidFill>
-                  <a:srgbClr val="D5E3EC"/>
-                </a:solidFill>
-                <a:latin typeface="Arial"/>
-              </a:rPr>
-              <a:t>top-hat + matched</a:t>
-            </a:r>
-          </a:p>
-          <a:p>
-            <a:pPr algn="ctr"/>
-            <a:r>
-              <a:rPr sz="850" b="0" i="0">
-                <a:solidFill>
-                  <a:srgbClr val="D5E3EC"/>
-                </a:solidFill>
-                <a:latin typeface="Arial"/>
-              </a:rPr>
-              <a:t>filter + CFAR</a:t>
-            </a:r>
-          </a:p>
-        </p:txBody>
-      </p:sp>
-      <p:sp>
-        <p:nvSpPr>
-          <p:cNvPr id="17415" name="Right Arrow 17414"/>
+                  <a:srgbClr val="0B2545"/>
+                </a:solidFill>
+                <a:latin typeface="Arial"/>
+              </a:rPr>
+              <a:t>Python 3.11 · NumPy · OpenCV</a:t>
+            </a:r>
+          </a:p>
+        </p:txBody>
+      </p:sp>
+      <p:sp>
+        <p:nvSpPr>
+          <p:cNvPr id="17417" name="TextBox 17416"/>
+          <p:cNvSpPr txBox="1"/>
+          <p:nvPr/>
+        </p:nvSpPr>
+        <p:spPr>
+          <a:xfrm>
+            <a:off x="384048" y="2706624"/>
+            <a:ext cx="3017520" cy="219456"/>
+          </a:xfrm>
+          <a:prstGeom prst="rect">
+            <a:avLst/>
+          </a:prstGeom>
+          <a:noFill/>
+        </p:spPr>
+        <p:txBody>
+          <a:bodyPr wrap="square" anchor="t" lIns="0" rIns="0" tIns="0" bIns="0">
+            <a:spAutoFit/>
+          </a:bodyPr>
+          <a:lstStyle/>
+          <a:p>
+            <a:r>
+              <a:rPr sz="1000" b="1" i="0">
+                <a:solidFill>
+                  <a:srgbClr val="5A6472"/>
+                </a:solidFill>
+                <a:latin typeface="Arial"/>
+              </a:rPr>
+              <a:t>INTERFACE</a:t>
+            </a:r>
+          </a:p>
+        </p:txBody>
+      </p:sp>
+      <p:sp>
+        <p:nvSpPr>
+          <p:cNvPr id="17418" name="Rounded Rectangle 17417"/>
           <p:cNvSpPr/>
           <p:nvPr/>
         </p:nvSpPr>
         <p:spPr>
           <a:xfrm>
-            <a:off x="4000500" y="2852928"/>
-            <a:ext cx="169164" cy="164592"/>
-          </a:xfrm>
-          <a:prstGeom prst="rightArrow">
-            <a:avLst/>
+            <a:off x="384048" y="2944368"/>
+            <a:ext cx="402336" cy="329184"/>
+          </a:xfrm>
+          <a:prstGeom prst="roundRect">
+            <a:avLst>
+              <a:gd name="adj" fmla="val 6000"/>
+            </a:avLst>
           </a:prstGeom>
           <a:solidFill>
-            <a:srgbClr val="5A6472"/>
+            <a:srgbClr val="0B2545"/>
           </a:solidFill>
           <a:ln>
             <a:noFill/>
@@ -7647,23 +7705,32 @@
           </a:fontRef>
         </p:style>
         <p:txBody>
-          <a:bodyPr rtlCol="0" anchor="ctr"/>
+          <a:bodyPr rtlCol="0" anchor="ctr" wrap="none" lIns="109728" rIns="109728" tIns="73152" bIns="73152"/>
           <a:lstStyle/>
           <a:p>
             <a:pPr algn="ctr"/>
-          </a:p>
-        </p:txBody>
-      </p:sp>
-      <p:sp>
-        <p:nvSpPr>
-          <p:cNvPr id="17416" name="Rounded Rectangle 17415"/>
+            <a:r>
+              <a:rPr sz="950" b="1" i="0">
+                <a:solidFill>
+                  <a:srgbClr val="FFFFFF"/>
+                </a:solidFill>
+                <a:latin typeface="Arial"/>
+              </a:rPr>
+              <a:t>Qt</a:t>
+            </a:r>
+          </a:p>
+        </p:txBody>
+      </p:sp>
+      <p:sp>
+        <p:nvSpPr>
+          <p:cNvPr id="17419" name="Rounded Rectangle 17418"/>
           <p:cNvSpPr/>
           <p:nvPr/>
         </p:nvSpPr>
         <p:spPr>
           <a:xfrm>
-            <a:off x="4142231" y="2395728"/>
-            <a:ext cx="1755648" cy="1078992"/>
+            <a:off x="877824" y="2944368"/>
+            <a:ext cx="402336" cy="329184"/>
           </a:xfrm>
           <a:prstGeom prst="roundRect">
             <a:avLst>
@@ -7671,7 +7738,7 @@
             </a:avLst>
           </a:prstGeom>
           <a:solidFill>
-            <a:srgbClr val="1F8A5B"/>
+            <a:srgbClr val="0E7C99"/>
           </a:solidFill>
           <a:ln>
             <a:noFill/>
@@ -7693,62 +7760,108 @@
           </a:fontRef>
         </p:style>
         <p:txBody>
-          <a:bodyPr rtlCol="0" anchor="ctr" wrap="square" lIns="109728" rIns="109728" tIns="73152" bIns="73152"/>
+          <a:bodyPr rtlCol="0" anchor="ctr" wrap="none" lIns="109728" rIns="109728" tIns="73152" bIns="73152"/>
           <a:lstStyle/>
           <a:p>
             <a:pPr algn="ctr"/>
             <a:r>
-              <a:rPr sz="1150" b="1" i="0">
+              <a:rPr sz="950" b="1" i="0">
                 <a:solidFill>
                   <a:srgbClr val="FFFFFF"/>
                 </a:solidFill>
                 <a:latin typeface="Arial"/>
               </a:rPr>
-              <a:t>IDENTIFY</a:t>
-            </a:r>
-          </a:p>
-          <a:p>
-            <a:pPr algn="ctr"/>
+              <a:t>PG</a:t>
+            </a:r>
+          </a:p>
+        </p:txBody>
+      </p:sp>
+      <p:sp>
+        <p:nvSpPr>
+          <p:cNvPr id="17420" name="TextBox 17419"/>
+          <p:cNvSpPr txBox="1"/>
+          <p:nvPr/>
+        </p:nvSpPr>
+        <p:spPr>
+          <a:xfrm>
+            <a:off x="1408176" y="2980944"/>
+            <a:ext cx="2258568" cy="310896"/>
+          </a:xfrm>
+          <a:prstGeom prst="rect">
+            <a:avLst/>
+          </a:prstGeom>
+          <a:noFill/>
+        </p:spPr>
+        <p:txBody>
+          <a:bodyPr wrap="square" anchor="t" lIns="0" rIns="0" tIns="0" bIns="0">
+            <a:spAutoFit/>
+          </a:bodyPr>
+          <a:lstStyle/>
+          <a:p>
             <a:r>
               <a:rPr sz="850" b="0" i="0">
                 <a:solidFill>
-                  <a:srgbClr val="D5E3EC"/>
-                </a:solidFill>
-                <a:latin typeface="Arial"/>
-              </a:rPr>
-              <a:t>blink signature gate</a:t>
-            </a:r>
-          </a:p>
-          <a:p>
-            <a:pPr algn="ctr"/>
-            <a:r>
-              <a:rPr sz="850" b="0" i="0">
-                <a:solidFill>
-                  <a:srgbClr val="D5E3EC"/>
-                </a:solidFill>
-                <a:latin typeface="Arial"/>
-              </a:rPr>
-              <a:t>+ AI verifier</a:t>
-            </a:r>
-          </a:p>
-        </p:txBody>
-      </p:sp>
-      <p:sp>
-        <p:nvSpPr>
-          <p:cNvPr id="17417" name="Right Arrow 17416"/>
+                  <a:srgbClr val="0B2545"/>
+                </a:solidFill>
+                <a:latin typeface="Arial"/>
+              </a:rPr>
+              <a:t>PySide6 console · pyqtgraph live plots</a:t>
+            </a:r>
+          </a:p>
+        </p:txBody>
+      </p:sp>
+      <p:sp>
+        <p:nvSpPr>
+          <p:cNvPr id="17421" name="TextBox 17420"/>
+          <p:cNvSpPr txBox="1"/>
+          <p:nvPr/>
+        </p:nvSpPr>
+        <p:spPr>
+          <a:xfrm>
+            <a:off x="384048" y="3438144"/>
+            <a:ext cx="3017520" cy="219456"/>
+          </a:xfrm>
+          <a:prstGeom prst="rect">
+            <a:avLst/>
+          </a:prstGeom>
+          <a:noFill/>
+        </p:spPr>
+        <p:txBody>
+          <a:bodyPr wrap="square" anchor="t" lIns="0" rIns="0" tIns="0" bIns="0">
+            <a:spAutoFit/>
+          </a:bodyPr>
+          <a:lstStyle/>
+          <a:p>
+            <a:r>
+              <a:rPr sz="1000" b="1" i="0">
+                <a:solidFill>
+                  <a:srgbClr val="5A6472"/>
+                </a:solidFill>
+                <a:latin typeface="Arial"/>
+              </a:rPr>
+              <a:t>ORBITS · AI</a:t>
+            </a:r>
+          </a:p>
+        </p:txBody>
+      </p:sp>
+      <p:sp>
+        <p:nvSpPr>
+          <p:cNvPr id="17422" name="Rounded Rectangle 17421"/>
           <p:cNvSpPr/>
           <p:nvPr/>
         </p:nvSpPr>
         <p:spPr>
           <a:xfrm>
-            <a:off x="5879592" y="2852928"/>
-            <a:ext cx="169164" cy="164592"/>
-          </a:xfrm>
-          <a:prstGeom prst="rightArrow">
-            <a:avLst/>
+            <a:off x="384048" y="3675887"/>
+            <a:ext cx="566928" cy="329184"/>
+          </a:xfrm>
+          <a:prstGeom prst="roundRect">
+            <a:avLst>
+              <a:gd name="adj" fmla="val 6000"/>
+            </a:avLst>
           </a:prstGeom>
           <a:solidFill>
-            <a:srgbClr val="5A6472"/>
+            <a:srgbClr val="1F8A5B"/>
           </a:solidFill>
           <a:ln>
             <a:noFill/>
@@ -7770,23 +7883,32 @@
           </a:fontRef>
         </p:style>
         <p:txBody>
-          <a:bodyPr rtlCol="0" anchor="ctr"/>
+          <a:bodyPr rtlCol="0" anchor="ctr" wrap="none" lIns="109728" rIns="109728" tIns="73152" bIns="73152"/>
           <a:lstStyle/>
           <a:p>
             <a:pPr algn="ctr"/>
-          </a:p>
-        </p:txBody>
-      </p:sp>
-      <p:sp>
-        <p:nvSpPr>
-          <p:cNvPr id="17418" name="Rounded Rectangle 17417"/>
+            <a:r>
+              <a:rPr sz="950" b="1" i="0">
+                <a:solidFill>
+                  <a:srgbClr val="FFFFFF"/>
+                </a:solidFill>
+                <a:latin typeface="Arial"/>
+              </a:rPr>
+              <a:t>SGP4</a:t>
+            </a:r>
+          </a:p>
+        </p:txBody>
+      </p:sp>
+      <p:sp>
+        <p:nvSpPr>
+          <p:cNvPr id="17423" name="Rounded Rectangle 17422"/>
           <p:cNvSpPr/>
           <p:nvPr/>
         </p:nvSpPr>
         <p:spPr>
           <a:xfrm>
-            <a:off x="6021323" y="2395728"/>
-            <a:ext cx="1755648" cy="1078992"/>
+            <a:off x="1042415" y="3675887"/>
+            <a:ext cx="402336" cy="329184"/>
           </a:xfrm>
           <a:prstGeom prst="roundRect">
             <a:avLst>
@@ -7794,7 +7916,7 @@
             </a:avLst>
           </a:prstGeom>
           <a:solidFill>
-            <a:srgbClr val="0E7C99"/>
+            <a:srgbClr val="1F8A5B"/>
           </a:solidFill>
           <a:ln>
             <a:noFill/>
@@ -7816,62 +7938,108 @@
           </a:fontRef>
         </p:style>
         <p:txBody>
-          <a:bodyPr rtlCol="0" anchor="ctr" wrap="square" lIns="109728" rIns="109728" tIns="73152" bIns="73152"/>
+          <a:bodyPr rtlCol="0" anchor="ctr" wrap="none" lIns="109728" rIns="109728" tIns="73152" bIns="73152"/>
           <a:lstStyle/>
           <a:p>
             <a:pPr algn="ctr"/>
             <a:r>
-              <a:rPr sz="1150" b="1" i="0">
+              <a:rPr sz="950" b="1" i="0">
                 <a:solidFill>
                   <a:srgbClr val="FFFFFF"/>
                 </a:solidFill>
                 <a:latin typeface="Arial"/>
               </a:rPr>
-              <a:t>ESTIMATE</a:t>
-            </a:r>
-          </a:p>
-          <a:p>
-            <a:pPr algn="ctr"/>
+              <a:t>NN</a:t>
+            </a:r>
+          </a:p>
+        </p:txBody>
+      </p:sp>
+      <p:sp>
+        <p:nvSpPr>
+          <p:cNvPr id="17424" name="TextBox 17423"/>
+          <p:cNvSpPr txBox="1"/>
+          <p:nvPr/>
+        </p:nvSpPr>
+        <p:spPr>
+          <a:xfrm>
+            <a:off x="1572768" y="3712463"/>
+            <a:ext cx="2093976" cy="310896"/>
+          </a:xfrm>
+          <a:prstGeom prst="rect">
+            <a:avLst/>
+          </a:prstGeom>
+          <a:noFill/>
+        </p:spPr>
+        <p:txBody>
+          <a:bodyPr wrap="square" anchor="t" lIns="0" rIns="0" tIns="0" bIns="0">
+            <a:spAutoFit/>
+          </a:bodyPr>
+          <a:lstStyle/>
+          <a:p>
             <a:r>
               <a:rPr sz="850" b="0" i="0">
                 <a:solidFill>
-                  <a:srgbClr val="D5E3EC"/>
-                </a:solidFill>
-                <a:latin typeface="Arial"/>
-              </a:rPr>
-              <a:t>IMM Kalman filter</a:t>
-            </a:r>
-          </a:p>
-          <a:p>
-            <a:pPr algn="ctr"/>
-            <a:r>
-              <a:rPr sz="850" b="0" i="0">
-                <a:solidFill>
-                  <a:srgbClr val="D5E3EC"/>
-                </a:solidFill>
-                <a:latin typeface="Arial"/>
-              </a:rPr>
-              <a:t>position + velocity</a:t>
-            </a:r>
-          </a:p>
-        </p:txBody>
-      </p:sp>
-      <p:sp>
-        <p:nvSpPr>
-          <p:cNvPr id="17419" name="Right Arrow 17418"/>
+                  <a:srgbClr val="0B2545"/>
+                </a:solidFill>
+                <a:latin typeface="Arial"/>
+              </a:rPr>
+              <a:t>real ISS TLEs · from-scratch neural verifier</a:t>
+            </a:r>
+          </a:p>
+        </p:txBody>
+      </p:sp>
+      <p:sp>
+        <p:nvSpPr>
+          <p:cNvPr id="17425" name="TextBox 17424"/>
+          <p:cNvSpPr txBox="1"/>
+          <p:nvPr/>
+        </p:nvSpPr>
+        <p:spPr>
+          <a:xfrm>
+            <a:off x="384048" y="4169663"/>
+            <a:ext cx="3017520" cy="219456"/>
+          </a:xfrm>
+          <a:prstGeom prst="rect">
+            <a:avLst/>
+          </a:prstGeom>
+          <a:noFill/>
+        </p:spPr>
+        <p:txBody>
+          <a:bodyPr wrap="square" anchor="t" lIns="0" rIns="0" tIns="0" bIns="0">
+            <a:spAutoFit/>
+          </a:bodyPr>
+          <a:lstStyle/>
+          <a:p>
+            <a:r>
+              <a:rPr sz="1000" b="1" i="0">
+                <a:solidFill>
+                  <a:srgbClr val="5A6472"/>
+                </a:solidFill>
+                <a:latin typeface="Arial"/>
+              </a:rPr>
+              <a:t>QUALITY</a:t>
+            </a:r>
+          </a:p>
+        </p:txBody>
+      </p:sp>
+      <p:sp>
+        <p:nvSpPr>
+          <p:cNvPr id="17426" name="Rounded Rectangle 17425"/>
           <p:cNvSpPr/>
           <p:nvPr/>
         </p:nvSpPr>
         <p:spPr>
           <a:xfrm>
-            <a:off x="7758683" y="2852928"/>
-            <a:ext cx="169164" cy="164592"/>
-          </a:xfrm>
-          <a:prstGeom prst="rightArrow">
-            <a:avLst/>
+            <a:off x="384048" y="4407407"/>
+            <a:ext cx="566928" cy="329184"/>
+          </a:xfrm>
+          <a:prstGeom prst="roundRect">
+            <a:avLst>
+              <a:gd name="adj" fmla="val 6000"/>
+            </a:avLst>
           </a:prstGeom>
           <a:solidFill>
-            <a:srgbClr val="5A6472"/>
+            <a:srgbClr val="1F8A5B"/>
           </a:solidFill>
           <a:ln>
             <a:noFill/>
@@ -7893,23 +8061,32 @@
           </a:fontRef>
         </p:style>
         <p:txBody>
-          <a:bodyPr rtlCol="0" anchor="ctr"/>
+          <a:bodyPr rtlCol="0" anchor="ctr" wrap="none" lIns="109728" rIns="109728" tIns="73152" bIns="73152"/>
           <a:lstStyle/>
           <a:p>
             <a:pPr algn="ctr"/>
-          </a:p>
-        </p:txBody>
-      </p:sp>
-      <p:sp>
-        <p:nvSpPr>
-          <p:cNvPr id="17420" name="Rounded Rectangle 17419"/>
+            <a:r>
+              <a:rPr sz="950" b="1" i="0">
+                <a:solidFill>
+                  <a:srgbClr val="FFFFFF"/>
+                </a:solidFill>
+                <a:latin typeface="Arial"/>
+              </a:rPr>
+              <a:t>73✓</a:t>
+            </a:r>
+          </a:p>
+        </p:txBody>
+      </p:sp>
+      <p:sp>
+        <p:nvSpPr>
+          <p:cNvPr id="17427" name="Rounded Rectangle 17426"/>
           <p:cNvSpPr/>
           <p:nvPr/>
         </p:nvSpPr>
         <p:spPr>
           <a:xfrm>
-            <a:off x="7900415" y="2395728"/>
-            <a:ext cx="1755648" cy="1078992"/>
+            <a:off x="1042415" y="4407407"/>
+            <a:ext cx="402336" cy="329184"/>
           </a:xfrm>
           <a:prstGeom prst="roundRect">
             <a:avLst>
@@ -7917,7 +8094,7 @@
             </a:avLst>
           </a:prstGeom>
           <a:solidFill>
-            <a:srgbClr val="1F8A5B"/>
+            <a:srgbClr val="0B2545"/>
           </a:solidFill>
           <a:ln>
             <a:noFill/>
@@ -7939,62 +8116,108 @@
           </a:fontRef>
         </p:style>
         <p:txBody>
-          <a:bodyPr rtlCol="0" anchor="ctr" wrap="square" lIns="109728" rIns="109728" tIns="73152" bIns="73152"/>
+          <a:bodyPr rtlCol="0" anchor="ctr" wrap="none" lIns="109728" rIns="109728" tIns="73152" bIns="73152"/>
           <a:lstStyle/>
           <a:p>
             <a:pPr algn="ctr"/>
             <a:r>
-              <a:rPr sz="1150" b="1" i="0">
+              <a:rPr sz="950" b="1" i="0">
                 <a:solidFill>
                   <a:srgbClr val="FFFFFF"/>
                 </a:solidFill>
                 <a:latin typeface="Arial"/>
               </a:rPr>
-              <a:t>CONTROL</a:t>
-            </a:r>
-          </a:p>
-          <a:p>
-            <a:pPr algn="ctr"/>
+              <a:t>CI</a:t>
+            </a:r>
+          </a:p>
+        </p:txBody>
+      </p:sp>
+      <p:sp>
+        <p:nvSpPr>
+          <p:cNvPr id="17428" name="TextBox 17427"/>
+          <p:cNvSpPr txBox="1"/>
+          <p:nvPr/>
+        </p:nvSpPr>
+        <p:spPr>
+          <a:xfrm>
+            <a:off x="1572768" y="4443983"/>
+            <a:ext cx="2093976" cy="310896"/>
+          </a:xfrm>
+          <a:prstGeom prst="rect">
+            <a:avLst/>
+          </a:prstGeom>
+          <a:noFill/>
+        </p:spPr>
+        <p:txBody>
+          <a:bodyPr wrap="square" anchor="t" lIns="0" rIns="0" tIns="0" bIns="0">
+            <a:spAutoFit/>
+          </a:bodyPr>
+          <a:lstStyle/>
+          <a:p>
             <a:r>
               <a:rPr sz="850" b="0" i="0">
                 <a:solidFill>
-                  <a:srgbClr val="D5E3EC"/>
-                </a:solidFill>
-                <a:latin typeface="Arial"/>
-              </a:rPr>
-              <a:t>Smith predictor</a:t>
-            </a:r>
-          </a:p>
-          <a:p>
-            <a:pPr algn="ctr"/>
-            <a:r>
-              <a:rPr sz="850" b="0" i="0">
-                <a:solidFill>
-                  <a:srgbClr val="D5E3EC"/>
-                </a:solidFill>
-                <a:latin typeface="Arial"/>
-              </a:rPr>
-              <a:t>+ feed-forward</a:t>
-            </a:r>
-          </a:p>
-        </p:txBody>
-      </p:sp>
-      <p:sp>
-        <p:nvSpPr>
-          <p:cNvPr id="17421" name="Right Arrow 17420"/>
+                  <a:srgbClr val="0B2545"/>
+                </a:solidFill>
+                <a:latin typeface="Arial"/>
+              </a:rPr>
+              <a:t>pytest suite · GitHub Actions</a:t>
+            </a:r>
+          </a:p>
+        </p:txBody>
+      </p:sp>
+      <p:sp>
+        <p:nvSpPr>
+          <p:cNvPr id="17429" name="TextBox 17428"/>
+          <p:cNvSpPr txBox="1"/>
+          <p:nvPr/>
+        </p:nvSpPr>
+        <p:spPr>
+          <a:xfrm>
+            <a:off x="384048" y="4901183"/>
+            <a:ext cx="3017520" cy="219456"/>
+          </a:xfrm>
+          <a:prstGeom prst="rect">
+            <a:avLst/>
+          </a:prstGeom>
+          <a:noFill/>
+        </p:spPr>
+        <p:txBody>
+          <a:bodyPr wrap="square" anchor="t" lIns="0" rIns="0" tIns="0" bIns="0">
+            <a:spAutoFit/>
+          </a:bodyPr>
+          <a:lstStyle/>
+          <a:p>
+            <a:r>
+              <a:rPr sz="1000" b="1" i="0">
+                <a:solidFill>
+                  <a:srgbClr val="5A6472"/>
+                </a:solidFill>
+                <a:latin typeface="Arial"/>
+              </a:rPr>
+              <a:t>SHIPPING</a:t>
+            </a:r>
+          </a:p>
+        </p:txBody>
+      </p:sp>
+      <p:sp>
+        <p:nvSpPr>
+          <p:cNvPr id="17430" name="Rounded Rectangle 17429"/>
           <p:cNvSpPr/>
           <p:nvPr/>
         </p:nvSpPr>
         <p:spPr>
           <a:xfrm>
-            <a:off x="9637776" y="2852928"/>
-            <a:ext cx="169164" cy="164592"/>
-          </a:xfrm>
-          <a:prstGeom prst="rightArrow">
-            <a:avLst/>
+            <a:off x="384048" y="5138927"/>
+            <a:ext cx="566928" cy="329184"/>
+          </a:xfrm>
+          <a:prstGeom prst="roundRect">
+            <a:avLst>
+              <a:gd name="adj" fmla="val 6000"/>
+            </a:avLst>
           </a:prstGeom>
           <a:solidFill>
-            <a:srgbClr val="5A6472"/>
+            <a:srgbClr val="0B2545"/>
           </a:solidFill>
           <a:ln>
             <a:noFill/>
@@ -8016,23 +8239,100 @@
           </a:fontRef>
         </p:style>
         <p:txBody>
-          <a:bodyPr rtlCol="0" anchor="ctr"/>
+          <a:bodyPr rtlCol="0" anchor="ctr" wrap="none" lIns="109728" rIns="109728" tIns="73152" bIns="73152"/>
           <a:lstStyle/>
           <a:p>
             <a:pPr algn="ctr"/>
-          </a:p>
-        </p:txBody>
-      </p:sp>
-      <p:sp>
-        <p:nvSpPr>
-          <p:cNvPr id="17422" name="Rounded Rectangle 17421"/>
+            <a:r>
+              <a:rPr sz="950" b="1" i="0">
+                <a:solidFill>
+                  <a:srgbClr val="FFFFFF"/>
+                </a:solidFill>
+                <a:latin typeface="Arial"/>
+              </a:rPr>
+              <a:t>EXE</a:t>
+            </a:r>
+          </a:p>
+        </p:txBody>
+      </p:sp>
+      <p:sp>
+        <p:nvSpPr>
+          <p:cNvPr id="17431" name="TextBox 17430"/>
+          <p:cNvSpPr txBox="1"/>
+          <p:nvPr/>
+        </p:nvSpPr>
+        <p:spPr>
+          <a:xfrm>
+            <a:off x="1078992" y="5175503"/>
+            <a:ext cx="2587752" cy="310896"/>
+          </a:xfrm>
+          <a:prstGeom prst="rect">
+            <a:avLst/>
+          </a:prstGeom>
+          <a:noFill/>
+        </p:spPr>
+        <p:txBody>
+          <a:bodyPr wrap="square" anchor="t" lIns="0" rIns="0" tIns="0" bIns="0">
+            <a:spAutoFit/>
+          </a:bodyPr>
+          <a:lstStyle/>
+          <a:p>
+            <a:r>
+              <a:rPr sz="850" b="0" i="0">
+                <a:solidFill>
+                  <a:srgbClr val="0B2545"/>
+                </a:solidFill>
+                <a:latin typeface="Arial"/>
+              </a:rPr>
+              <a:t>PyInstaller one-click standalone app</a:t>
+            </a:r>
+          </a:p>
+        </p:txBody>
+      </p:sp>
+      <p:sp>
+        <p:nvSpPr>
+          <p:cNvPr id="17432" name="TextBox 17431"/>
+          <p:cNvSpPr txBox="1"/>
+          <p:nvPr/>
+        </p:nvSpPr>
+        <p:spPr>
+          <a:xfrm>
+            <a:off x="384048" y="5650991"/>
+            <a:ext cx="3108960" cy="274320"/>
+          </a:xfrm>
+          <a:prstGeom prst="rect">
+            <a:avLst/>
+          </a:prstGeom>
+          <a:noFill/>
+        </p:spPr>
+        <p:txBody>
+          <a:bodyPr wrap="square" anchor="t" lIns="0" rIns="0" tIns="0" bIns="0">
+            <a:spAutoFit/>
+          </a:bodyPr>
+          <a:lstStyle/>
+          <a:p>
+            <a:r>
+              <a:rPr sz="950" b="0" i="1">
+                <a:solidFill>
+                  <a:srgbClr val="5A6472"/>
+                </a:solidFill>
+                <a:latin typeface="Arial"/>
+              </a:rPr>
+              <a:t>100% open source · zero licensing cost</a:t>
+            </a:r>
+          </a:p>
+        </p:txBody>
+      </p:sp>
+      <p:sp>
+        <p:nvSpPr>
+          <p:cNvPr id="17433" name="Rounded Rectangle 17432"/>
           <p:cNvSpPr/>
           <p:nvPr/>
         </p:nvSpPr>
         <p:spPr>
           <a:xfrm>
-            <a:off x="9779507" y="2395728"/>
-            <a:ext cx="1755648" cy="1078992"/>
+            <a:off x="3794760" y="1682496"/>
+            <a:ext cx="2304288" cy="1133856"/>
           </a:xfrm>
           <a:prstGeom prst="roundRect">
             <a:avLst>
@@ -8062,125 +8362,80 @@
           </a:fontRef>
         </p:style>
         <p:txBody>
-          <a:bodyPr rtlCol="0" anchor="ctr" wrap="square" lIns="109728" rIns="109728" tIns="73152" bIns="73152"/>
+          <a:bodyPr rtlCol="0" anchor="t" wrap="square" lIns="109728" rIns="109728" tIns="73152" bIns="73152"/>
           <a:lstStyle/>
           <a:p>
             <a:pPr algn="ctr"/>
             <a:r>
-              <a:rPr sz="1150" b="1" i="0">
+              <a:rPr sz="1050" b="1" i="0">
                 <a:solidFill>
                   <a:srgbClr val="FFFFFF"/>
                 </a:solidFill>
                 <a:latin typeface="Arial"/>
               </a:rPr>
-              <a:t>VIRTUAL GIMBAL</a:t>
+              <a:t>VIRTUAL WORLD</a:t>
             </a:r>
           </a:p>
           <a:p>
             <a:pPr algn="ctr"/>
             <a:r>
-              <a:rPr sz="850" b="0" i="0">
+              <a:rPr sz="800" b="0" i="0">
                 <a:solidFill>
                   <a:srgbClr val="D5E3EC"/>
                 </a:solidFill>
                 <a:latin typeface="Arial"/>
               </a:rPr>
-              <a:t>slew limits · latency</a:t>
+              <a:t>sky · stars · clutter · decoys</a:t>
             </a:r>
           </a:p>
           <a:p>
             <a:pPr algn="ctr"/>
             <a:r>
-              <a:rPr sz="850" b="0" i="0">
+              <a:rPr sz="800" b="0" i="0">
                 <a:solidFill>
                   <a:srgbClr val="D5E3EC"/>
                 </a:solidFill>
                 <a:latin typeface="Arial"/>
               </a:rPr>
-              <a:t>encoder noise</a:t>
-            </a:r>
-          </a:p>
-        </p:txBody>
-      </p:sp>
-      <p:sp>
-        <p:nvSpPr>
-          <p:cNvPr id="17423" name="TextBox 17422"/>
-          <p:cNvSpPr txBox="1"/>
-          <p:nvPr/>
-        </p:nvSpPr>
-        <p:spPr>
-          <a:xfrm>
-            <a:off x="384048" y="3529584"/>
-            <a:ext cx="11155680" cy="274320"/>
-          </a:xfrm>
-          <a:prstGeom prst="rect">
-            <a:avLst/>
-          </a:prstGeom>
-          <a:noFill/>
-        </p:spPr>
-        <p:txBody>
-          <a:bodyPr wrap="square" anchor="t" lIns="0" rIns="0" tIns="0" bIns="0">
-            <a:spAutoFit/>
-          </a:bodyPr>
-          <a:lstStyle/>
+              <a:t>turbulence · vibration</a:t>
+            </a:r>
+          </a:p>
           <a:p>
             <a:pPr algn="ctr"/>
             <a:r>
-              <a:rPr sz="1000" b="0" i="1">
-                <a:solidFill>
-                  <a:srgbClr val="5A6472"/>
-                </a:solidFill>
-                <a:latin typeface="Arial"/>
-              </a:rPr>
-              <a:t>closed loop at the camera’s 30 frames per second — real time on a normal laptop</a:t>
-            </a:r>
-          </a:p>
-        </p:txBody>
-      </p:sp>
-      <p:sp>
-        <p:nvSpPr>
-          <p:cNvPr id="17424" name="TextBox 17423"/>
-          <p:cNvSpPr txBox="1"/>
-          <p:nvPr/>
-        </p:nvSpPr>
-        <p:spPr>
-          <a:xfrm>
-            <a:off x="384048" y="3858768"/>
-            <a:ext cx="3108960" cy="274320"/>
-          </a:xfrm>
-          <a:prstGeom prst="rect">
-            <a:avLst/>
-          </a:prstGeom>
-          <a:noFill/>
-        </p:spPr>
-        <p:txBody>
-          <a:bodyPr wrap="square" anchor="t" lIns="0" rIns="0" tIns="0" bIns="0">
-            <a:spAutoFit/>
-          </a:bodyPr>
-          <a:lstStyle/>
-          <a:p>
-            <a:r>
-              <a:rPr sz="1200" b="1" i="0">
-                <a:solidFill>
-                  <a:srgbClr val="0B2545"/>
-                </a:solidFill>
-                <a:latin typeface="Arial"/>
-              </a:rPr>
-              <a:t>Acquisition state machine</a:t>
-            </a:r>
-          </a:p>
-        </p:txBody>
-      </p:sp>
-      <p:sp>
-        <p:nvSpPr>
-          <p:cNvPr id="17425" name="Rounded Rectangle 17424"/>
+              <a:rPr sz="800" b="0" i="0">
+                <a:solidFill>
+                  <a:srgbClr val="D5E3EC"/>
+                </a:solidFill>
+                <a:latin typeface="Arial"/>
+              </a:rPr>
+              <a:t>LEO / UAV trajectories</a:t>
+            </a:r>
+          </a:p>
+          <a:p>
+            <a:pPr algn="ctr"/>
+            <a:r>
+              <a:rPr sz="800" b="1" i="0">
+                <a:solidFill>
+                  <a:srgbClr val="FFD97A"/>
+                </a:solidFill>
+                <a:latin typeface="Arial"/>
+              </a:rPr>
+              <a:t>→ 9.2 MPx / s of imagery</a:t>
+            </a:r>
+          </a:p>
+        </p:txBody>
+      </p:sp>
+      <p:sp>
+        <p:nvSpPr>
+          <p:cNvPr id="17434" name="Rounded Rectangle 17433"/>
           <p:cNvSpPr/>
           <p:nvPr/>
         </p:nvSpPr>
         <p:spPr>
           <a:xfrm>
-            <a:off x="384048" y="4151376"/>
-            <a:ext cx="1325880" cy="457200"/>
+            <a:off x="6382512" y="1682496"/>
+            <a:ext cx="2304288" cy="1133856"/>
           </a:xfrm>
           <a:prstGeom prst="roundRect">
             <a:avLst>
@@ -8188,7 +8443,7 @@
             </a:avLst>
           </a:prstGeom>
           <a:solidFill>
-            <a:srgbClr val="0B2545"/>
+            <a:srgbClr val="0E7C99"/>
           </a:solidFill>
           <a:ln>
             <a:noFill/>
@@ -8210,7 +8465,7 @@
           </a:fontRef>
         </p:style>
         <p:txBody>
-          <a:bodyPr rtlCol="0" anchor="ctr" wrap="square" lIns="109728" rIns="109728" tIns="73152" bIns="73152"/>
+          <a:bodyPr rtlCol="0" anchor="t" wrap="square" lIns="109728" rIns="109728" tIns="73152" bIns="73152"/>
           <a:lstStyle/>
           <a:p>
             <a:pPr algn="ctr"/>
@@ -8221,27 +8476,77 @@
                 </a:solidFill>
                 <a:latin typeface="Arial"/>
               </a:rPr>
-              <a:t>SEARCH</a:t>
-            </a:r>
-          </a:p>
-        </p:txBody>
-      </p:sp>
-      <p:sp>
-        <p:nvSpPr>
-          <p:cNvPr id="17426" name="Right Arrow 17425"/>
+              <a:t>VIRTUAL CAMERA</a:t>
+            </a:r>
+          </a:p>
+          <a:p>
+            <a:pPr algn="ctr"/>
+            <a:r>
+              <a:rPr sz="800" b="0" i="0">
+                <a:solidFill>
+                  <a:srgbClr val="D5E3EC"/>
+                </a:solidFill>
+                <a:latin typeface="Arial"/>
+              </a:rPr>
+              <a:t>pan-tilt gimbal model</a:t>
+            </a:r>
+          </a:p>
+          <a:p>
+            <a:pPr algn="ctr"/>
+            <a:r>
+              <a:rPr sz="800" b="0" i="0">
+                <a:solidFill>
+                  <a:srgbClr val="D5E3EC"/>
+                </a:solidFill>
+                <a:latin typeface="Arial"/>
+              </a:rPr>
+              <a:t>slew limits · 40 ms latency</a:t>
+            </a:r>
+          </a:p>
+          <a:p>
+            <a:pPr algn="ctr"/>
+            <a:r>
+              <a:rPr sz="800" b="0" i="0">
+                <a:solidFill>
+                  <a:srgbClr val="D5E3EC"/>
+                </a:solidFill>
+                <a:latin typeface="Arial"/>
+              </a:rPr>
+              <a:t>sensor noise</a:t>
+            </a:r>
+          </a:p>
+          <a:p>
+            <a:pPr algn="ctr"/>
+            <a:r>
+              <a:rPr sz="800" b="1" i="0">
+                <a:solidFill>
+                  <a:srgbClr val="FFD97A"/>
+                </a:solidFill>
+                <a:latin typeface="Arial"/>
+              </a:rPr>
+              <a:t>→ 30 frames / s</a:t>
+            </a:r>
+          </a:p>
+        </p:txBody>
+      </p:sp>
+      <p:sp>
+        <p:nvSpPr>
+          <p:cNvPr id="17435" name="Rounded Rectangle 17434"/>
           <p:cNvSpPr/>
           <p:nvPr/>
         </p:nvSpPr>
         <p:spPr>
           <a:xfrm>
-            <a:off x="1709928" y="4315968"/>
-            <a:ext cx="155448" cy="128016"/>
-          </a:xfrm>
-          <a:prstGeom prst="rightArrow">
-            <a:avLst/>
+            <a:off x="8970264" y="1682496"/>
+            <a:ext cx="2304288" cy="1133856"/>
+          </a:xfrm>
+          <a:prstGeom prst="roundRect">
+            <a:avLst>
+              <a:gd name="adj" fmla="val 6000"/>
+            </a:avLst>
           </a:prstGeom>
           <a:solidFill>
-            <a:srgbClr val="5A6472"/>
+            <a:srgbClr val="0E7C99"/>
           </a:solidFill>
           <a:ln>
             <a:noFill/>
@@ -8263,23 +8568,80 @@
           </a:fontRef>
         </p:style>
         <p:txBody>
-          <a:bodyPr rtlCol="0" anchor="ctr"/>
+          <a:bodyPr rtlCol="0" anchor="t" wrap="square" lIns="109728" rIns="109728" tIns="73152" bIns="73152"/>
           <a:lstStyle/>
           <a:p>
             <a:pPr algn="ctr"/>
-          </a:p>
-        </p:txBody>
-      </p:sp>
-      <p:sp>
-        <p:nvSpPr>
-          <p:cNvPr id="17427" name="Rounded Rectangle 17426"/>
+            <a:r>
+              <a:rPr sz="1050" b="1" i="0">
+                <a:solidFill>
+                  <a:srgbClr val="FFFFFF"/>
+                </a:solidFill>
+                <a:latin typeface="Arial"/>
+              </a:rPr>
+              <a:t>PERCEPTION</a:t>
+            </a:r>
+          </a:p>
+          <a:p>
+            <a:pPr algn="ctr"/>
+            <a:r>
+              <a:rPr sz="800" b="0" i="0">
+                <a:solidFill>
+                  <a:srgbClr val="D5E3EC"/>
+                </a:solidFill>
+                <a:latin typeface="Arial"/>
+              </a:rPr>
+              <a:t>top-hat + matched filter</a:t>
+            </a:r>
+          </a:p>
+          <a:p>
+            <a:pPr algn="ctr"/>
+            <a:r>
+              <a:rPr sz="800" b="0" i="0">
+                <a:solidFill>
+                  <a:srgbClr val="D5E3EC"/>
+                </a:solidFill>
+                <a:latin typeface="Arial"/>
+              </a:rPr>
+              <a:t>CFAR · sub-pixel centroid</a:t>
+            </a:r>
+          </a:p>
+          <a:p>
+            <a:pPr algn="ctr"/>
+            <a:r>
+              <a:rPr sz="800" b="0" i="0">
+                <a:solidFill>
+                  <a:srgbClr val="D5E3EC"/>
+                </a:solidFill>
+                <a:latin typeface="Arial"/>
+              </a:rPr>
+              <a:t>AI verifier (own NN)</a:t>
+            </a:r>
+          </a:p>
+          <a:p>
+            <a:pPr algn="ctr"/>
+            <a:r>
+              <a:rPr sz="800" b="1" i="0">
+                <a:solidFill>
+                  <a:srgbClr val="FFD97A"/>
+                </a:solidFill>
+                <a:latin typeface="Arial"/>
+              </a:rPr>
+              <a:t>→ ≈6 candidates / frame</a:t>
+            </a:r>
+          </a:p>
+        </p:txBody>
+      </p:sp>
+      <p:sp>
+        <p:nvSpPr>
+          <p:cNvPr id="17436" name="Rounded Rectangle 17435"/>
           <p:cNvSpPr/>
           <p:nvPr/>
         </p:nvSpPr>
         <p:spPr>
           <a:xfrm>
-            <a:off x="1865376" y="4151376"/>
-            <a:ext cx="1325880" cy="457200"/>
+            <a:off x="8970264" y="3255264"/>
+            <a:ext cx="2304288" cy="1133856"/>
           </a:xfrm>
           <a:prstGeom prst="roundRect">
             <a:avLst>
@@ -8287,7 +8649,7 @@
             </a:avLst>
           </a:prstGeom>
           <a:solidFill>
-            <a:srgbClr val="B06A00"/>
+            <a:srgbClr val="1F8A5B"/>
           </a:solidFill>
           <a:ln>
             <a:noFill/>
@@ -8309,7 +8671,7 @@
           </a:fontRef>
         </p:style>
         <p:txBody>
-          <a:bodyPr rtlCol="0" anchor="ctr" wrap="square" lIns="109728" rIns="109728" tIns="73152" bIns="73152"/>
+          <a:bodyPr rtlCol="0" anchor="t" wrap="square" lIns="109728" rIns="109728" tIns="73152" bIns="73152"/>
           <a:lstStyle/>
           <a:p>
             <a:pPr algn="ctr"/>
@@ -8320,27 +8682,77 @@
                 </a:solidFill>
                 <a:latin typeface="Arial"/>
               </a:rPr>
-              <a:t>ACQUIRE</a:t>
-            </a:r>
-          </a:p>
-        </p:txBody>
-      </p:sp>
-      <p:sp>
-        <p:nvSpPr>
-          <p:cNvPr id="17428" name="Right Arrow 17427"/>
+              <a:t>DECISION</a:t>
+            </a:r>
+          </a:p>
+          <a:p>
+            <a:pPr algn="ctr"/>
+            <a:r>
+              <a:rPr sz="800" b="0" i="0">
+                <a:solidFill>
+                  <a:srgbClr val="D5E3EC"/>
+                </a:solidFill>
+                <a:latin typeface="Arial"/>
+              </a:rPr>
+              <a:t>multi-target tracker</a:t>
+            </a:r>
+          </a:p>
+          <a:p>
+            <a:pPr algn="ctr"/>
+            <a:r>
+              <a:rPr sz="800" b="0" i="0">
+                <a:solidFill>
+                  <a:srgbClr val="D5E3EC"/>
+                </a:solidFill>
+                <a:latin typeface="Arial"/>
+              </a:rPr>
+              <a:t>blink-signature hard gate</a:t>
+            </a:r>
+          </a:p>
+          <a:p>
+            <a:pPr algn="ctr"/>
+            <a:r>
+              <a:rPr sz="800" b="0" i="0">
+                <a:solidFill>
+                  <a:srgbClr val="D5E3EC"/>
+                </a:solidFill>
+                <a:latin typeface="Arial"/>
+              </a:rPr>
+              <a:t>IMM Kalman estimate</a:t>
+            </a:r>
+          </a:p>
+          <a:p>
+            <a:pPr algn="ctr"/>
+            <a:r>
+              <a:rPr sz="800" b="1" i="0">
+                <a:solidFill>
+                  <a:srgbClr val="FFD97A"/>
+                </a:solidFill>
+                <a:latin typeface="Arial"/>
+              </a:rPr>
+              <a:t>→ 1 confirmed beacon</a:t>
+            </a:r>
+          </a:p>
+        </p:txBody>
+      </p:sp>
+      <p:sp>
+        <p:nvSpPr>
+          <p:cNvPr id="17437" name="Rounded Rectangle 17436"/>
           <p:cNvSpPr/>
           <p:nvPr/>
         </p:nvSpPr>
         <p:spPr>
           <a:xfrm>
-            <a:off x="3191256" y="4315968"/>
-            <a:ext cx="155448" cy="128016"/>
-          </a:xfrm>
-          <a:prstGeom prst="rightArrow">
-            <a:avLst/>
+            <a:off x="6382512" y="3255264"/>
+            <a:ext cx="2304288" cy="1133856"/>
+          </a:xfrm>
+          <a:prstGeom prst="roundRect">
+            <a:avLst>
+              <a:gd name="adj" fmla="val 6000"/>
+            </a:avLst>
           </a:prstGeom>
           <a:solidFill>
-            <a:srgbClr val="5A6472"/>
+            <a:srgbClr val="1F8A5B"/>
           </a:solidFill>
           <a:ln>
             <a:noFill/>
@@ -8362,23 +8774,80 @@
           </a:fontRef>
         </p:style>
         <p:txBody>
-          <a:bodyPr rtlCol="0" anchor="ctr"/>
+          <a:bodyPr rtlCol="0" anchor="t" wrap="square" lIns="109728" rIns="109728" tIns="73152" bIns="73152"/>
           <a:lstStyle/>
           <a:p>
             <a:pPr algn="ctr"/>
-          </a:p>
-        </p:txBody>
-      </p:sp>
-      <p:sp>
-        <p:nvSpPr>
-          <p:cNvPr id="17429" name="Rounded Rectangle 17428"/>
+            <a:r>
+              <a:rPr sz="1050" b="1" i="0">
+                <a:solidFill>
+                  <a:srgbClr val="FFFFFF"/>
+                </a:solidFill>
+                <a:latin typeface="Arial"/>
+              </a:rPr>
+              <a:t>CONTROL</a:t>
+            </a:r>
+          </a:p>
+          <a:p>
+            <a:pPr algn="ctr"/>
+            <a:r>
+              <a:rPr sz="800" b="0" i="0">
+                <a:solidFill>
+                  <a:srgbClr val="D5E3EC"/>
+                </a:solidFill>
+                <a:latin typeface="Arial"/>
+              </a:rPr>
+              <a:t>Smith predictor</a:t>
+            </a:r>
+          </a:p>
+          <a:p>
+            <a:pPr algn="ctr"/>
+            <a:r>
+              <a:rPr sz="800" b="0" i="0">
+                <a:solidFill>
+                  <a:srgbClr val="D5E3EC"/>
+                </a:solidFill>
+                <a:latin typeface="Arial"/>
+              </a:rPr>
+              <a:t>velocity feed-forward</a:t>
+            </a:r>
+          </a:p>
+          <a:p>
+            <a:pPr algn="ctr"/>
+            <a:r>
+              <a:rPr sz="800" b="0" i="0">
+                <a:solidFill>
+                  <a:srgbClr val="D5E3EC"/>
+                </a:solidFill>
+                <a:latin typeface="Arial"/>
+              </a:rPr>
+              <a:t>spiral search states</a:t>
+            </a:r>
+          </a:p>
+          <a:p>
+            <a:pPr algn="ctr"/>
+            <a:r>
+              <a:rPr sz="800" b="1" i="0">
+                <a:solidFill>
+                  <a:srgbClr val="FFD97A"/>
+                </a:solidFill>
+                <a:latin typeface="Arial"/>
+              </a:rPr>
+              <a:t>→ 30 commands / s</a:t>
+            </a:r>
+          </a:p>
+        </p:txBody>
+      </p:sp>
+      <p:sp>
+        <p:nvSpPr>
+          <p:cNvPr id="17438" name="Rounded Rectangle 17437"/>
           <p:cNvSpPr/>
           <p:nvPr/>
         </p:nvSpPr>
         <p:spPr>
           <a:xfrm>
-            <a:off x="3346704" y="4151376"/>
-            <a:ext cx="1325880" cy="457200"/>
+            <a:off x="3794760" y="3255264"/>
+            <a:ext cx="2304288" cy="1133856"/>
           </a:xfrm>
           <a:prstGeom prst="roundRect">
             <a:avLst>
@@ -8386,7 +8855,7 @@
             </a:avLst>
           </a:prstGeom>
           <a:solidFill>
-            <a:srgbClr val="1F8A5B"/>
+            <a:srgbClr val="0B2545"/>
           </a:solidFill>
           <a:ln>
             <a:noFill/>
@@ -8408,7 +8877,7 @@
           </a:fontRef>
         </p:style>
         <p:txBody>
-          <a:bodyPr rtlCol="0" anchor="ctr" wrap="square" lIns="109728" rIns="109728" tIns="73152" bIns="73152"/>
+          <a:bodyPr rtlCol="0" anchor="t" wrap="square" lIns="109728" rIns="109728" tIns="73152" bIns="73152"/>
           <a:lstStyle/>
           <a:p>
             <a:pPr algn="ctr"/>
@@ -8419,21 +8888,69 @@
                 </a:solidFill>
                 <a:latin typeface="Arial"/>
               </a:rPr>
-              <a:t>TRACK</a:t>
-            </a:r>
-          </a:p>
-        </p:txBody>
-      </p:sp>
-      <p:sp>
-        <p:nvSpPr>
-          <p:cNvPr id="17430" name="Right Arrow 17429"/>
+              <a:t>OPERATOR OUTPUTS</a:t>
+            </a:r>
+          </a:p>
+          <a:p>
+            <a:pPr algn="ctr"/>
+            <a:r>
+              <a:rPr sz="800" b="0" i="0">
+                <a:solidFill>
+                  <a:srgbClr val="D5E3EC"/>
+                </a:solidFill>
+                <a:latin typeface="Arial"/>
+              </a:rPr>
+              <a:t>live GUI console</a:t>
+            </a:r>
+          </a:p>
+          <a:p>
+            <a:pPr algn="ctr"/>
+            <a:r>
+              <a:rPr sz="800" b="0" i="0">
+                <a:solidFill>
+                  <a:srgbClr val="D5E3EC"/>
+                </a:solidFill>
+                <a:latin typeface="Arial"/>
+              </a:rPr>
+              <a:t>auto performance report</a:t>
+            </a:r>
+          </a:p>
+          <a:p>
+            <a:pPr algn="ctr"/>
+            <a:r>
+              <a:rPr sz="800" b="0" i="0">
+                <a:solidFill>
+                  <a:srgbClr val="D5E3EC"/>
+                </a:solidFill>
+                <a:latin typeface="Arial"/>
+              </a:rPr>
+              <a:t>demo video export</a:t>
+            </a:r>
+          </a:p>
+          <a:p>
+            <a:pPr algn="ctr"/>
+            <a:r>
+              <a:rPr sz="800" b="1" i="0">
+                <a:solidFill>
+                  <a:srgbClr val="FFD97A"/>
+                </a:solidFill>
+                <a:latin typeface="Arial"/>
+              </a:rPr>
+              <a:t>→ for judges &amp; operators</a:t>
+            </a:r>
+          </a:p>
+        </p:txBody>
+      </p:sp>
+      <p:sp>
+        <p:nvSpPr>
+          <p:cNvPr id="17439" name="Right Arrow 17438"/>
           <p:cNvSpPr/>
           <p:nvPr/>
         </p:nvSpPr>
         <p:spPr>
           <a:xfrm>
-            <a:off x="4672584" y="4315968"/>
-            <a:ext cx="155448" cy="128016"/>
+            <a:off x="6080760" y="2176272"/>
+            <a:ext cx="338328" cy="146304"/>
           </a:xfrm>
           <a:prstGeom prst="rightArrow">
             <a:avLst/>
@@ -8470,22 +8987,20 @@
       </p:sp>
       <p:sp>
         <p:nvSpPr>
-          <p:cNvPr id="17431" name="Rounded Rectangle 17430"/>
+          <p:cNvPr id="17440" name="Right Arrow 17439"/>
           <p:cNvSpPr/>
           <p:nvPr/>
         </p:nvSpPr>
         <p:spPr>
           <a:xfrm>
-            <a:off x="4828032" y="4151376"/>
-            <a:ext cx="1325880" cy="457200"/>
-          </a:xfrm>
-          <a:prstGeom prst="roundRect">
-            <a:avLst>
-              <a:gd name="adj" fmla="val 6000"/>
-            </a:avLst>
+            <a:off x="8668512" y="2176272"/>
+            <a:ext cx="338328" cy="146304"/>
+          </a:xfrm>
+          <a:prstGeom prst="rightArrow">
+            <a:avLst/>
           </a:prstGeom>
           <a:solidFill>
-            <a:srgbClr val="B06A00"/>
+            <a:srgbClr val="5A6472"/>
           </a:solidFill>
           <a:ln>
             <a:noFill/>
@@ -8507,34 +9022,25 @@
           </a:fontRef>
         </p:style>
         <p:txBody>
-          <a:bodyPr rtlCol="0" anchor="ctr" wrap="square" lIns="109728" rIns="109728" tIns="73152" bIns="73152"/>
+          <a:bodyPr rtlCol="0" anchor="ctr"/>
           <a:lstStyle/>
           <a:p>
             <a:pPr algn="ctr"/>
-            <a:r>
-              <a:rPr sz="1050" b="1" i="0">
-                <a:solidFill>
-                  <a:srgbClr val="FFFFFF"/>
-                </a:solidFill>
-                <a:latin typeface="Arial"/>
-              </a:rPr>
-              <a:t>COAST</a:t>
-            </a:r>
-          </a:p>
-        </p:txBody>
-      </p:sp>
-      <p:sp>
-        <p:nvSpPr>
-          <p:cNvPr id="17432" name="Right Arrow 17431"/>
+          </a:p>
+        </p:txBody>
+      </p:sp>
+      <p:sp>
+        <p:nvSpPr>
+          <p:cNvPr id="17441" name="Down Arrow 17440"/>
           <p:cNvSpPr/>
           <p:nvPr/>
         </p:nvSpPr>
         <p:spPr>
           <a:xfrm>
-            <a:off x="6153912" y="4315968"/>
-            <a:ext cx="155448" cy="128016"/>
-          </a:xfrm>
-          <a:prstGeom prst="rightArrow">
+            <a:off x="10049256" y="2834640"/>
+            <a:ext cx="146304" cy="402336"/>
+          </a:xfrm>
+          <a:prstGeom prst="downArrow">
             <a:avLst/>
           </a:prstGeom>
           <a:solidFill>
@@ -8569,22 +9075,20 @@
       </p:sp>
       <p:sp>
         <p:nvSpPr>
-          <p:cNvPr id="17433" name="Rounded Rectangle 17432"/>
+          <p:cNvPr id="17442" name="Left Arrow 17441"/>
           <p:cNvSpPr/>
           <p:nvPr/>
         </p:nvSpPr>
         <p:spPr>
           <a:xfrm>
-            <a:off x="6309360" y="4151376"/>
-            <a:ext cx="1325880" cy="457200"/>
-          </a:xfrm>
-          <a:prstGeom prst="roundRect">
-            <a:avLst>
-              <a:gd name="adj" fmla="val 6000"/>
-            </a:avLst>
+            <a:off x="8668512" y="3749039"/>
+            <a:ext cx="338328" cy="146304"/>
+          </a:xfrm>
+          <a:prstGeom prst="leftArrow">
+            <a:avLst/>
           </a:prstGeom>
           <a:solidFill>
-            <a:srgbClr val="9C2E23"/>
+            <a:srgbClr val="5A6472"/>
           </a:solidFill>
           <a:ln>
             <a:noFill/>
@@ -8606,122 +9110,29 @@
           </a:fontRef>
         </p:style>
         <p:txBody>
-          <a:bodyPr rtlCol="0" anchor="ctr" wrap="square" lIns="109728" rIns="109728" tIns="73152" bIns="73152"/>
+          <a:bodyPr rtlCol="0" anchor="ctr"/>
           <a:lstStyle/>
           <a:p>
             <a:pPr algn="ctr"/>
-            <a:r>
-              <a:rPr sz="1050" b="1" i="0">
-                <a:solidFill>
-                  <a:srgbClr val="FFFFFF"/>
-                </a:solidFill>
-                <a:latin typeface="Arial"/>
-              </a:rPr>
-              <a:t>REACQUIRE</a:t>
-            </a:r>
-          </a:p>
-        </p:txBody>
-      </p:sp>
-      <p:sp>
-        <p:nvSpPr>
-          <p:cNvPr id="17434" name="TextBox 17433"/>
-          <p:cNvSpPr txBox="1"/>
+          </a:p>
+        </p:txBody>
+      </p:sp>
+      <p:sp>
+        <p:nvSpPr>
+          <p:cNvPr id="17443" name="Left Arrow 17442"/>
+          <p:cNvSpPr/>
           <p:nvPr/>
         </p:nvSpPr>
         <p:spPr>
           <a:xfrm>
-            <a:off x="7882127" y="6053328"/>
-            <a:ext cx="3931920" cy="274320"/>
-          </a:xfrm>
-          <a:prstGeom prst="rect">
+            <a:off x="6080760" y="3749039"/>
+            <a:ext cx="338328" cy="146304"/>
+          </a:xfrm>
+          <a:prstGeom prst="leftArrow">
             <a:avLst/>
           </a:prstGeom>
-          <a:noFill/>
-        </p:spPr>
-        <p:txBody>
-          <a:bodyPr wrap="square" anchor="t" lIns="0" rIns="0" tIns="0" bIns="0">
-            <a:spAutoFit/>
-          </a:bodyPr>
-          <a:lstStyle/>
-          <a:p>
-            <a:pPr>
-              <a:spcAft>
-                <a:spcPts val="400"/>
-              </a:spcAft>
-            </a:pPr>
-            <a:r>
-              <a:rPr sz="950" b="1" i="0">
-                <a:solidFill>
-                  <a:srgbClr val="0B2545"/>
-                </a:solidFill>
-                <a:latin typeface="Arial"/>
-              </a:rPr>
-              <a:t/>
-            </a:r>
-            <a:r>
-              <a:rPr sz="950" b="0" i="0">
-                <a:solidFill>
-                  <a:srgbClr val="0B2545"/>
-                </a:solidFill>
-                <a:latin typeface="Arial"/>
-              </a:rPr>
-              <a:t>Search → lock → coast → auto-recovery, even 5° off-target among decoys.</a:t>
-            </a:r>
-          </a:p>
-        </p:txBody>
-      </p:sp>
-      <p:sp>
-        <p:nvSpPr>
-          <p:cNvPr id="17435" name="TextBox 17434"/>
-          <p:cNvSpPr txBox="1"/>
-          <p:nvPr/>
-        </p:nvSpPr>
-        <p:spPr>
-          <a:xfrm>
-            <a:off x="7882127" y="3895344"/>
-            <a:ext cx="3931920" cy="274320"/>
-          </a:xfrm>
-          <a:prstGeom prst="rect">
-            <a:avLst/>
-          </a:prstGeom>
-          <a:noFill/>
-        </p:spPr>
-        <p:txBody>
-          <a:bodyPr wrap="square" anchor="t" lIns="0" rIns="0" tIns="0" bIns="0">
-            <a:spAutoFit/>
-          </a:bodyPr>
-          <a:lstStyle/>
-          <a:p>
-            <a:r>
-              <a:rPr sz="1200" b="1" i="0">
-                <a:solidFill>
-                  <a:srgbClr val="0B2545"/>
-                </a:solidFill>
-                <a:latin typeface="Arial"/>
-              </a:rPr>
-              <a:t>Inside one 33 ms cycle — measured</a:t>
-            </a:r>
-          </a:p>
-        </p:txBody>
-      </p:sp>
-      <p:sp>
-        <p:nvSpPr>
-          <p:cNvPr id="17436" name="Rounded Rectangle 17435"/>
-          <p:cNvSpPr/>
-          <p:nvPr/>
-        </p:nvSpPr>
-        <p:spPr>
-          <a:xfrm>
-            <a:off x="7882127" y="4206240"/>
-            <a:ext cx="868680" cy="384048"/>
-          </a:xfrm>
-          <a:prstGeom prst="roundRect">
-            <a:avLst>
-              <a:gd name="adj" fmla="val 6000"/>
-            </a:avLst>
-          </a:prstGeom>
           <a:solidFill>
-            <a:srgbClr val="0E7C99"/>
+            <a:srgbClr val="5A6472"/>
           </a:solidFill>
           <a:ln>
             <a:noFill/>
@@ -8743,74 +9154,29 @@
           </a:fontRef>
         </p:style>
         <p:txBody>
-          <a:bodyPr rtlCol="0" anchor="ctr" wrap="square" lIns="109728" rIns="109728" tIns="73152" bIns="73152"/>
+          <a:bodyPr rtlCol="0" anchor="ctr"/>
           <a:lstStyle/>
           <a:p>
             <a:pPr algn="ctr"/>
-            <a:r>
-              <a:rPr sz="950" b="1" i="0">
-                <a:solidFill>
-                  <a:srgbClr val="FFFFFF"/>
-                </a:solidFill>
-                <a:latin typeface="Arial"/>
-              </a:rPr>
-              <a:t>IN</a:t>
-            </a:r>
-          </a:p>
-        </p:txBody>
-      </p:sp>
-      <p:sp>
-        <p:nvSpPr>
-          <p:cNvPr id="17437" name="TextBox 17436"/>
-          <p:cNvSpPr txBox="1"/>
+          </a:p>
+        </p:txBody>
+      </p:sp>
+      <p:sp>
+        <p:nvSpPr>
+          <p:cNvPr id="17444" name="Up Arrow 17443"/>
+          <p:cNvSpPr/>
           <p:nvPr/>
         </p:nvSpPr>
         <p:spPr>
           <a:xfrm>
-            <a:off x="8869680" y="4270248"/>
-            <a:ext cx="2971800" cy="329184"/>
-          </a:xfrm>
-          <a:prstGeom prst="rect">
+            <a:off x="7461504" y="2834640"/>
+            <a:ext cx="146304" cy="411479"/>
+          </a:xfrm>
+          <a:prstGeom prst="upArrow">
             <a:avLst/>
           </a:prstGeom>
-          <a:noFill/>
-        </p:spPr>
-        <p:txBody>
-          <a:bodyPr wrap="square" anchor="t" lIns="0" rIns="0" tIns="0" bIns="0">
-            <a:spAutoFit/>
-          </a:bodyPr>
-          <a:lstStyle/>
-          <a:p>
-            <a:r>
-              <a:rPr sz="1050" b="0" i="0">
-                <a:solidFill>
-                  <a:srgbClr val="0B2545"/>
-                </a:solidFill>
-                <a:latin typeface="Arial"/>
-              </a:rPr>
-              <a:t>1 frame · 307,200 px (9.2 MPx/s at 30 fps)</a:t>
-            </a:r>
-          </a:p>
-        </p:txBody>
-      </p:sp>
-      <p:sp>
-        <p:nvSpPr>
-          <p:cNvPr id="17438" name="Rounded Rectangle 17437"/>
-          <p:cNvSpPr/>
-          <p:nvPr/>
-        </p:nvSpPr>
-        <p:spPr>
-          <a:xfrm>
-            <a:off x="7882127" y="4681727"/>
-            <a:ext cx="868680" cy="384048"/>
-          </a:xfrm>
-          <a:prstGeom prst="roundRect">
-            <a:avLst>
-              <a:gd name="adj" fmla="val 6000"/>
-            </a:avLst>
-          </a:prstGeom>
           <a:solidFill>
-            <a:srgbClr val="0E7C99"/>
+            <a:srgbClr val="1F8A5B"/>
           </a:solidFill>
           <a:ln>
             <a:noFill/>
@@ -8832,32 +9198,23 @@
           </a:fontRef>
         </p:style>
         <p:txBody>
-          <a:bodyPr rtlCol="0" anchor="ctr" wrap="square" lIns="109728" rIns="109728" tIns="73152" bIns="73152"/>
+          <a:bodyPr rtlCol="0" anchor="ctr"/>
           <a:lstStyle/>
           <a:p>
             <a:pPr algn="ctr"/>
-            <a:r>
-              <a:rPr sz="950" b="1" i="0">
-                <a:solidFill>
-                  <a:srgbClr val="FFFFFF"/>
-                </a:solidFill>
-                <a:latin typeface="Arial"/>
-              </a:rPr>
-              <a:t>SCREEN</a:t>
-            </a:r>
-          </a:p>
-        </p:txBody>
-      </p:sp>
-      <p:sp>
-        <p:nvSpPr>
-          <p:cNvPr id="17439" name="TextBox 17438"/>
+          </a:p>
+        </p:txBody>
+      </p:sp>
+      <p:sp>
+        <p:nvSpPr>
+          <p:cNvPr id="17445" name="TextBox 17444"/>
           <p:cNvSpPr txBox="1"/>
           <p:nvPr/>
         </p:nvSpPr>
         <p:spPr>
           <a:xfrm>
-            <a:off x="8869680" y="4745736"/>
-            <a:ext cx="2971800" cy="329184"/>
+            <a:off x="7680960" y="2871216"/>
+            <a:ext cx="1737360" cy="329184"/>
           </a:xfrm>
           <a:prstGeom prst="rect">
             <a:avLst/>
@@ -8871,27 +9228,85 @@
           <a:lstStyle/>
           <a:p>
             <a:r>
-              <a:rPr sz="1050" b="0" i="0">
+              <a:rPr sz="800" b="1" i="0">
+                <a:solidFill>
+                  <a:srgbClr val="1F8A5B"/>
+                </a:solidFill>
+                <a:latin typeface="Arial"/>
+              </a:rPr>
+              <a:t>closed loop: 30 pointing commands / s</a:t>
+            </a:r>
+          </a:p>
+        </p:txBody>
+      </p:sp>
+      <p:pic>
+        <p:nvPicPr>
+          <p:cNvPr id="17446" name="Picture 17445" descr="side_label.png"/>
+          <p:cNvPicPr>
+            <a:picLocks noChangeAspect="1"/>
+          </p:cNvPicPr>
+          <p:nvPr/>
+        </p:nvPicPr>
+        <p:blipFill>
+          <a:blip r:embed="rId4"/>
+          <a:stretch>
+            <a:fillRect/>
+          </a:stretch>
+        </p:blipFill>
+        <p:spPr>
+          <a:xfrm>
+            <a:off x="11448288" y="1737360"/>
+            <a:ext cx="178760" cy="4160520"/>
+          </a:xfrm>
+          <a:prstGeom prst="rect">
+            <a:avLst/>
+          </a:prstGeom>
+        </p:spPr>
+      </p:pic>
+      <p:sp>
+        <p:nvSpPr>
+          <p:cNvPr id="17447" name="TextBox 17446"/>
+          <p:cNvSpPr txBox="1"/>
+          <p:nvPr/>
+        </p:nvSpPr>
+        <p:spPr>
+          <a:xfrm>
+            <a:off x="3794760" y="4626864"/>
+            <a:ext cx="2926080" cy="237744"/>
+          </a:xfrm>
+          <a:prstGeom prst="rect">
+            <a:avLst/>
+          </a:prstGeom>
+          <a:noFill/>
+        </p:spPr>
+        <p:txBody>
+          <a:bodyPr wrap="square" anchor="t" lIns="0" rIns="0" tIns="0" bIns="0">
+            <a:spAutoFit/>
+          </a:bodyPr>
+          <a:lstStyle/>
+          <a:p>
+            <a:r>
+              <a:rPr sz="1050" b="1" i="0">
                 <a:solidFill>
                   <a:srgbClr val="0B2545"/>
                 </a:solidFill>
                 <a:latin typeface="Arial"/>
               </a:rPr>
-              <a:t>≈ 5–6 candidate detections pass CFAR</a:t>
-            </a:r>
-          </a:p>
-        </p:txBody>
-      </p:sp>
-      <p:sp>
-        <p:nvSpPr>
-          <p:cNvPr id="17440" name="Rounded Rectangle 17439"/>
+              <a:t>Acquisition state machine</a:t>
+            </a:r>
+          </a:p>
+        </p:txBody>
+      </p:sp>
+      <p:sp>
+        <p:nvSpPr>
+          <p:cNvPr id="17448" name="Rounded Rectangle 17447"/>
           <p:cNvSpPr/>
           <p:nvPr/>
         </p:nvSpPr>
         <p:spPr>
           <a:xfrm>
-            <a:off x="7882127" y="5157215"/>
-            <a:ext cx="868680" cy="384048"/>
+            <a:off x="3794760" y="4882896"/>
+            <a:ext cx="1298448" cy="384048"/>
           </a:xfrm>
           <a:prstGeom prst="roundRect">
             <a:avLst>
@@ -8899,7 +9314,7 @@
             </a:avLst>
           </a:prstGeom>
           <a:solidFill>
-            <a:srgbClr val="1F8A5B"/>
+            <a:srgbClr val="0B2545"/>
           </a:solidFill>
           <a:ln>
             <a:noFill/>
@@ -8932,63 +9347,27 @@
                 </a:solidFill>
                 <a:latin typeface="Arial"/>
               </a:rPr>
-              <a:t>DECIDE</a:t>
-            </a:r>
-          </a:p>
-        </p:txBody>
-      </p:sp>
-      <p:sp>
-        <p:nvSpPr>
-          <p:cNvPr id="17441" name="TextBox 17440"/>
-          <p:cNvSpPr txBox="1"/>
+              <a:t>SEARCH</a:t>
+            </a:r>
+          </a:p>
+        </p:txBody>
+      </p:sp>
+      <p:sp>
+        <p:nvSpPr>
+          <p:cNvPr id="17449" name="Right Arrow 17448"/>
+          <p:cNvSpPr/>
           <p:nvPr/>
         </p:nvSpPr>
         <p:spPr>
           <a:xfrm>
-            <a:off x="8869680" y="5221223"/>
-            <a:ext cx="2971800" cy="329184"/>
-          </a:xfrm>
-          <a:prstGeom prst="rect">
+            <a:off x="5093208" y="5010912"/>
+            <a:ext cx="146304" cy="128016"/>
+          </a:xfrm>
+          <a:prstGeom prst="rightArrow">
             <a:avLst/>
           </a:prstGeom>
-          <a:noFill/>
-        </p:spPr>
-        <p:txBody>
-          <a:bodyPr wrap="square" anchor="t" lIns="0" rIns="0" tIns="0" bIns="0">
-            <a:spAutoFit/>
-          </a:bodyPr>
-          <a:lstStyle/>
-          <a:p>
-            <a:r>
-              <a:rPr sz="1050" b="0" i="0">
-                <a:solidFill>
-                  <a:srgbClr val="0B2545"/>
-                </a:solidFill>
-                <a:latin typeface="Arial"/>
-              </a:rPr>
-              <a:t>1 beacon confirmed · decoys rejected</a:t>
-            </a:r>
-          </a:p>
-        </p:txBody>
-      </p:sp>
-      <p:sp>
-        <p:nvSpPr>
-          <p:cNvPr id="17442" name="Rounded Rectangle 17441"/>
-          <p:cNvSpPr/>
-          <p:nvPr/>
-        </p:nvSpPr>
-        <p:spPr>
-          <a:xfrm>
-            <a:off x="7882127" y="5632703"/>
-            <a:ext cx="868680" cy="384048"/>
-          </a:xfrm>
-          <a:prstGeom prst="roundRect">
-            <a:avLst>
-              <a:gd name="adj" fmla="val 6000"/>
-            </a:avLst>
-          </a:prstGeom>
           <a:solidFill>
-            <a:srgbClr val="1F8A5B"/>
+            <a:srgbClr val="5A6472"/>
           </a:solidFill>
           <a:ln>
             <a:noFill/>
@@ -9010,6 +9389,52 @@
           </a:fontRef>
         </p:style>
         <p:txBody>
+          <a:bodyPr rtlCol="0" anchor="ctr"/>
+          <a:lstStyle/>
+          <a:p>
+            <a:pPr algn="ctr"/>
+          </a:p>
+        </p:txBody>
+      </p:sp>
+      <p:sp>
+        <p:nvSpPr>
+          <p:cNvPr id="17450" name="Rounded Rectangle 17449"/>
+          <p:cNvSpPr/>
+          <p:nvPr/>
+        </p:nvSpPr>
+        <p:spPr>
+          <a:xfrm>
+            <a:off x="5257800" y="4882896"/>
+            <a:ext cx="1298448" cy="384048"/>
+          </a:xfrm>
+          <a:prstGeom prst="roundRect">
+            <a:avLst>
+              <a:gd name="adj" fmla="val 6000"/>
+            </a:avLst>
+          </a:prstGeom>
+          <a:solidFill>
+            <a:srgbClr val="B06A00"/>
+          </a:solidFill>
+          <a:ln>
+            <a:noFill/>
+          </a:ln>
+          <a:effectLst/>
+        </p:spPr>
+        <p:style>
+          <a:lnRef idx="1">
+            <a:schemeClr val="accent1"/>
+          </a:lnRef>
+          <a:fillRef idx="3">
+            <a:schemeClr val="accent1"/>
+          </a:fillRef>
+          <a:effectRef idx="2">
+            <a:schemeClr val="accent1"/>
+          </a:effectRef>
+          <a:fontRef idx="minor">
+            <a:schemeClr val="lt1"/>
+          </a:fontRef>
+        </p:style>
+        <p:txBody>
           <a:bodyPr rtlCol="0" anchor="ctr" wrap="square" lIns="109728" rIns="109728" tIns="73152" bIns="73152"/>
           <a:lstStyle/>
           <a:p>
@@ -9021,21 +9446,318 @@
                 </a:solidFill>
                 <a:latin typeface="Arial"/>
               </a:rPr>
-              <a:t>OUT</a:t>
-            </a:r>
-          </a:p>
-        </p:txBody>
-      </p:sp>
-      <p:sp>
-        <p:nvSpPr>
-          <p:cNvPr id="17443" name="TextBox 17442"/>
+              <a:t>ACQUIRE</a:t>
+            </a:r>
+          </a:p>
+        </p:txBody>
+      </p:sp>
+      <p:sp>
+        <p:nvSpPr>
+          <p:cNvPr id="17451" name="Right Arrow 17450"/>
+          <p:cNvSpPr/>
+          <p:nvPr/>
+        </p:nvSpPr>
+        <p:spPr>
+          <a:xfrm>
+            <a:off x="6556248" y="5010912"/>
+            <a:ext cx="146304" cy="128016"/>
+          </a:xfrm>
+          <a:prstGeom prst="rightArrow">
+            <a:avLst/>
+          </a:prstGeom>
+          <a:solidFill>
+            <a:srgbClr val="5A6472"/>
+          </a:solidFill>
+          <a:ln>
+            <a:noFill/>
+          </a:ln>
+          <a:effectLst/>
+        </p:spPr>
+        <p:style>
+          <a:lnRef idx="1">
+            <a:schemeClr val="accent1"/>
+          </a:lnRef>
+          <a:fillRef idx="3">
+            <a:schemeClr val="accent1"/>
+          </a:fillRef>
+          <a:effectRef idx="2">
+            <a:schemeClr val="accent1"/>
+          </a:effectRef>
+          <a:fontRef idx="minor">
+            <a:schemeClr val="lt1"/>
+          </a:fontRef>
+        </p:style>
+        <p:txBody>
+          <a:bodyPr rtlCol="0" anchor="ctr"/>
+          <a:lstStyle/>
+          <a:p>
+            <a:pPr algn="ctr"/>
+          </a:p>
+        </p:txBody>
+      </p:sp>
+      <p:sp>
+        <p:nvSpPr>
+          <p:cNvPr id="17452" name="Rounded Rectangle 17451"/>
+          <p:cNvSpPr/>
+          <p:nvPr/>
+        </p:nvSpPr>
+        <p:spPr>
+          <a:xfrm>
+            <a:off x="6720840" y="4882896"/>
+            <a:ext cx="1298448" cy="384048"/>
+          </a:xfrm>
+          <a:prstGeom prst="roundRect">
+            <a:avLst>
+              <a:gd name="adj" fmla="val 6000"/>
+            </a:avLst>
+          </a:prstGeom>
+          <a:solidFill>
+            <a:srgbClr val="1F8A5B"/>
+          </a:solidFill>
+          <a:ln>
+            <a:noFill/>
+          </a:ln>
+          <a:effectLst/>
+        </p:spPr>
+        <p:style>
+          <a:lnRef idx="1">
+            <a:schemeClr val="accent1"/>
+          </a:lnRef>
+          <a:fillRef idx="3">
+            <a:schemeClr val="accent1"/>
+          </a:fillRef>
+          <a:effectRef idx="2">
+            <a:schemeClr val="accent1"/>
+          </a:effectRef>
+          <a:fontRef idx="minor">
+            <a:schemeClr val="lt1"/>
+          </a:fontRef>
+        </p:style>
+        <p:txBody>
+          <a:bodyPr rtlCol="0" anchor="ctr" wrap="square" lIns="109728" rIns="109728" tIns="73152" bIns="73152"/>
+          <a:lstStyle/>
+          <a:p>
+            <a:pPr algn="ctr"/>
+            <a:r>
+              <a:rPr sz="950" b="1" i="0">
+                <a:solidFill>
+                  <a:srgbClr val="FFFFFF"/>
+                </a:solidFill>
+                <a:latin typeface="Arial"/>
+              </a:rPr>
+              <a:t>TRACK</a:t>
+            </a:r>
+          </a:p>
+        </p:txBody>
+      </p:sp>
+      <p:sp>
+        <p:nvSpPr>
+          <p:cNvPr id="17453" name="Right Arrow 17452"/>
+          <p:cNvSpPr/>
+          <p:nvPr/>
+        </p:nvSpPr>
+        <p:spPr>
+          <a:xfrm>
+            <a:off x="8019288" y="5010912"/>
+            <a:ext cx="146304" cy="128016"/>
+          </a:xfrm>
+          <a:prstGeom prst="rightArrow">
+            <a:avLst/>
+          </a:prstGeom>
+          <a:solidFill>
+            <a:srgbClr val="5A6472"/>
+          </a:solidFill>
+          <a:ln>
+            <a:noFill/>
+          </a:ln>
+          <a:effectLst/>
+        </p:spPr>
+        <p:style>
+          <a:lnRef idx="1">
+            <a:schemeClr val="accent1"/>
+          </a:lnRef>
+          <a:fillRef idx="3">
+            <a:schemeClr val="accent1"/>
+          </a:fillRef>
+          <a:effectRef idx="2">
+            <a:schemeClr val="accent1"/>
+          </a:effectRef>
+          <a:fontRef idx="minor">
+            <a:schemeClr val="lt1"/>
+          </a:fontRef>
+        </p:style>
+        <p:txBody>
+          <a:bodyPr rtlCol="0" anchor="ctr"/>
+          <a:lstStyle/>
+          <a:p>
+            <a:pPr algn="ctr"/>
+          </a:p>
+        </p:txBody>
+      </p:sp>
+      <p:sp>
+        <p:nvSpPr>
+          <p:cNvPr id="17454" name="Rounded Rectangle 17453"/>
+          <p:cNvSpPr/>
+          <p:nvPr/>
+        </p:nvSpPr>
+        <p:spPr>
+          <a:xfrm>
+            <a:off x="8183879" y="4882896"/>
+            <a:ext cx="1298448" cy="384048"/>
+          </a:xfrm>
+          <a:prstGeom prst="roundRect">
+            <a:avLst>
+              <a:gd name="adj" fmla="val 6000"/>
+            </a:avLst>
+          </a:prstGeom>
+          <a:solidFill>
+            <a:srgbClr val="B06A00"/>
+          </a:solidFill>
+          <a:ln>
+            <a:noFill/>
+          </a:ln>
+          <a:effectLst/>
+        </p:spPr>
+        <p:style>
+          <a:lnRef idx="1">
+            <a:schemeClr val="accent1"/>
+          </a:lnRef>
+          <a:fillRef idx="3">
+            <a:schemeClr val="accent1"/>
+          </a:fillRef>
+          <a:effectRef idx="2">
+            <a:schemeClr val="accent1"/>
+          </a:effectRef>
+          <a:fontRef idx="minor">
+            <a:schemeClr val="lt1"/>
+          </a:fontRef>
+        </p:style>
+        <p:txBody>
+          <a:bodyPr rtlCol="0" anchor="ctr" wrap="square" lIns="109728" rIns="109728" tIns="73152" bIns="73152"/>
+          <a:lstStyle/>
+          <a:p>
+            <a:pPr algn="ctr"/>
+            <a:r>
+              <a:rPr sz="950" b="1" i="0">
+                <a:solidFill>
+                  <a:srgbClr val="FFFFFF"/>
+                </a:solidFill>
+                <a:latin typeface="Arial"/>
+              </a:rPr>
+              <a:t>COAST</a:t>
+            </a:r>
+          </a:p>
+        </p:txBody>
+      </p:sp>
+      <p:sp>
+        <p:nvSpPr>
+          <p:cNvPr id="17455" name="Right Arrow 17454"/>
+          <p:cNvSpPr/>
+          <p:nvPr/>
+        </p:nvSpPr>
+        <p:spPr>
+          <a:xfrm>
+            <a:off x="9482328" y="5010912"/>
+            <a:ext cx="146304" cy="128016"/>
+          </a:xfrm>
+          <a:prstGeom prst="rightArrow">
+            <a:avLst/>
+          </a:prstGeom>
+          <a:solidFill>
+            <a:srgbClr val="5A6472"/>
+          </a:solidFill>
+          <a:ln>
+            <a:noFill/>
+          </a:ln>
+          <a:effectLst/>
+        </p:spPr>
+        <p:style>
+          <a:lnRef idx="1">
+            <a:schemeClr val="accent1"/>
+          </a:lnRef>
+          <a:fillRef idx="3">
+            <a:schemeClr val="accent1"/>
+          </a:fillRef>
+          <a:effectRef idx="2">
+            <a:schemeClr val="accent1"/>
+          </a:effectRef>
+          <a:fontRef idx="minor">
+            <a:schemeClr val="lt1"/>
+          </a:fontRef>
+        </p:style>
+        <p:txBody>
+          <a:bodyPr rtlCol="0" anchor="ctr"/>
+          <a:lstStyle/>
+          <a:p>
+            <a:pPr algn="ctr"/>
+          </a:p>
+        </p:txBody>
+      </p:sp>
+      <p:sp>
+        <p:nvSpPr>
+          <p:cNvPr id="17456" name="Rounded Rectangle 17455"/>
+          <p:cNvSpPr/>
+          <p:nvPr/>
+        </p:nvSpPr>
+        <p:spPr>
+          <a:xfrm>
+            <a:off x="9646919" y="4882896"/>
+            <a:ext cx="1298448" cy="384048"/>
+          </a:xfrm>
+          <a:prstGeom prst="roundRect">
+            <a:avLst>
+              <a:gd name="adj" fmla="val 6000"/>
+            </a:avLst>
+          </a:prstGeom>
+          <a:solidFill>
+            <a:srgbClr val="9C2E23"/>
+          </a:solidFill>
+          <a:ln>
+            <a:noFill/>
+          </a:ln>
+          <a:effectLst/>
+        </p:spPr>
+        <p:style>
+          <a:lnRef idx="1">
+            <a:schemeClr val="accent1"/>
+          </a:lnRef>
+          <a:fillRef idx="3">
+            <a:schemeClr val="accent1"/>
+          </a:fillRef>
+          <a:effectRef idx="2">
+            <a:schemeClr val="accent1"/>
+          </a:effectRef>
+          <a:fontRef idx="minor">
+            <a:schemeClr val="lt1"/>
+          </a:fontRef>
+        </p:style>
+        <p:txBody>
+          <a:bodyPr rtlCol="0" anchor="ctr" wrap="square" lIns="109728" rIns="109728" tIns="73152" bIns="73152"/>
+          <a:lstStyle/>
+          <a:p>
+            <a:pPr algn="ctr"/>
+            <a:r>
+              <a:rPr sz="950" b="1" i="0">
+                <a:solidFill>
+                  <a:srgbClr val="FFFFFF"/>
+                </a:solidFill>
+                <a:latin typeface="Arial"/>
+              </a:rPr>
+              <a:t>REACQUIRE</a:t>
+            </a:r>
+          </a:p>
+        </p:txBody>
+      </p:sp>
+      <p:sp>
+        <p:nvSpPr>
+          <p:cNvPr id="17457" name="TextBox 17456"/>
           <p:cNvSpPr txBox="1"/>
           <p:nvPr/>
         </p:nvSpPr>
         <p:spPr>
           <a:xfrm>
-            <a:off x="8869680" y="5696711"/>
-            <a:ext cx="2971800" cy="329184"/>
+            <a:off x="3794760" y="5431536"/>
+            <a:ext cx="7589520" cy="457200"/>
           </a:xfrm>
           <a:prstGeom prst="rect">
             <a:avLst/>
@@ -9048,6 +9770,20 @@
           </a:bodyPr>
           <a:lstStyle/>
           <a:p>
+            <a:pPr>
+              <a:spcAft>
+                <a:spcPts val="400"/>
+              </a:spcAft>
+            </a:pPr>
+            <a:r>
+              <a:rPr sz="1050" b="1" i="0">
+                <a:solidFill>
+                  <a:srgbClr val="0B2545"/>
+                </a:solidFill>
+                <a:latin typeface="Arial"/>
+              </a:rPr>
+              <a:t>One 33 ms cycle, measured:  </a:t>
+            </a:r>
             <a:r>
               <a:rPr sz="1050" b="0" i="0">
                 <a:solidFill>
@@ -9055,40 +9791,11 @@
                 </a:solidFill>
                 <a:latin typeface="Arial"/>
               </a:rPr>
-              <a:t>1 pointing command · 14 ms used of 33</a:t>
-            </a:r>
-          </a:p>
-        </p:txBody>
-      </p:sp>
-      <p:pic>
-        <p:nvPicPr>
-          <p:cNvPr id="17444" name="Picture 17443" descr="chart_convergence.png"/>
-          <p:cNvPicPr>
-            <a:picLocks noChangeAspect="1"/>
-          </p:cNvPicPr>
-          <p:nvPr/>
-        </p:nvPicPr>
-        <p:blipFill>
-          <a:blip r:embed="rId4"/>
-          <a:stretch>
-            <a:fillRect/>
-          </a:stretch>
-        </p:blipFill>
-        <p:spPr>
-          <a:xfrm>
-            <a:off x="384048" y="4700016"/>
-            <a:ext cx="7223760" cy="1589227"/>
-          </a:xfrm>
-          <a:prstGeom prst="rect">
-            <a:avLst/>
-          </a:prstGeom>
-          <a:ln w="9525">
-            <a:solidFill>
-              <a:srgbClr val="D5DDE5"/>
-            </a:solidFill>
-          </a:ln>
-        </p:spPr>
-      </p:pic>
+              <a:t>307,200 px in → ≈6 CFAR candidates → 1 beacon confirmed → 1 command out, 14 ms used. Closed loop, real time on a normal laptop; recovers even from 5° off-target among decoys.</a:t>
+            </a:r>
+          </a:p>
+        </p:txBody>
+      </p:sp>
     </p:spTree>
   </p:cSld>
   <p:clrMapOvr>

--- a/docs/submission/ZeroDrift_SIH26169.pptx
+++ b/docs/submission/ZeroDrift_SIH26169.pptx
@@ -12672,16 +12672,17 @@
                 </a:solidFill>
                 <a:latin typeface="Arial"/>
               </a:rPr>
-              <a:t>Inside:  </a:t>
-            </a:r>
-            <a:r>
-              <a:rPr sz="1100" b="0" i="0">
-                <a:solidFill>
-                  <a:srgbClr val="0B2545"/>
-                </a:solidFill>
-                <a:latin typeface="Arial"/>
-              </a:rPr>
-              <a:t>full source (5,000+ lines, documented) · 73 automated tests · 6 validated scenarios · Monte-Carlo campaign logs · technical report · user manual · demo video.</a:t>
+              <a:t>Live demo (hosted prototype):  </a:t>
+            </a:r>
+            <a:r>
+              <a:rPr sz="1100" u="sng">
+                <a:solidFill>
+                  <a:srgbClr val="0E7C99"/>
+                </a:solidFill>
+                <a:latin typeface="Arial"/>
+                <a:hlinkClick r:id="rId12"/>
+              </a:rPr>
+              <a:t>pranshukesavmishra.github.io/SIH-2026</a:t>
             </a:r>
           </a:p>
           <a:p>
@@ -12697,6 +12698,31 @@
                 </a:solidFill>
                 <a:latin typeface="Arial"/>
               </a:rPr>
+              <a:t>Inside:  </a:t>
+            </a:r>
+            <a:r>
+              <a:rPr sz="1100" b="0" i="0">
+                <a:solidFill>
+                  <a:srgbClr val="0B2545"/>
+                </a:solidFill>
+                <a:latin typeface="Arial"/>
+              </a:rPr>
+              <a:t>full source (5,000+ lines, documented) · 73 automated tests · 6 validated scenarios · Monte-Carlo campaign logs · technical report · user manual · demo video.</a:t>
+            </a:r>
+          </a:p>
+          <a:p>
+            <a:pPr>
+              <a:spcAft>
+                <a:spcPts val="500"/>
+              </a:spcAft>
+            </a:pPr>
+            <a:r>
+              <a:rPr sz="1100" b="1" i="0">
+                <a:solidFill>
+                  <a:srgbClr val="0B2545"/>
+                </a:solidFill>
+                <a:latin typeface="Arial"/>
+              </a:rPr>
               <a:t>Reproducibility:  </a:t>
             </a:r>
             <a:r>
@@ -12713,14 +12739,546 @@
       </p:sp>
       <p:sp>
         <p:nvSpPr>
-          <p:cNvPr id="17415" name="Rounded Rectangle 17414"/>
+          <p:cNvPr id="17415" name="TextBox 17414"/>
+          <p:cNvSpPr txBox="1"/>
+          <p:nvPr/>
+        </p:nvSpPr>
+        <p:spPr>
+          <a:xfrm>
+            <a:off x="6355080" y="3346704"/>
+            <a:ext cx="5486400" cy="256032"/>
+          </a:xfrm>
+          <a:prstGeom prst="rect">
+            <a:avLst/>
+          </a:prstGeom>
+          <a:noFill/>
+        </p:spPr>
+        <p:txBody>
+          <a:bodyPr wrap="square" anchor="t" lIns="0" rIns="0" tIns="0" bIns="0">
+            <a:spAutoFit/>
+          </a:bodyPr>
+          <a:lstStyle/>
+          <a:p>
+            <a:r>
+              <a:rPr sz="1150" b="1" i="0">
+                <a:solidFill>
+                  <a:srgbClr val="0B2545"/>
+                </a:solidFill>
+                <a:latin typeface="Arial"/>
+              </a:rPr>
+              <a:t>Compared with existing approaches</a:t>
+            </a:r>
+          </a:p>
+        </p:txBody>
+      </p:sp>
+      <p:graphicFrame>
+        <p:nvGraphicFramePr>
+          <p:cNvPr id="17416" name="Table 17415"/>
+          <p:cNvGraphicFramePr>
+            <a:graphicFrameLocks noGrp="1"/>
+          </p:cNvGraphicFramePr>
+          <p:nvPr/>
+        </p:nvGraphicFramePr>
+        <p:xfrm>
+          <a:off x="6355080" y="3621024"/>
+          <a:ext cx="5486400" cy="1097280"/>
+        </p:xfrm>
+        <a:graphic>
+          <a:graphicData uri="http://schemas.openxmlformats.org/drawingml/2006/table">
+            <a:tbl>
+              <a:tblPr>
+                <a:tableStyleId>{5C22544A-7EE6-4342-B048-85BDC9FD1C3A}</a:tableStyleId>
+              </a:tblPr>
+              <a:tblGrid>
+                <a:gridCol w="2880360"/>
+                <a:gridCol w="868680"/>
+                <a:gridCol w="868680"/>
+                <a:gridCol w="868680"/>
+              </a:tblGrid>
+              <a:tr h="219456">
+                <a:tc>
+                  <a:txBody>
+                    <a:bodyPr/>
+                    <a:lstStyle/>
+                    <a:p>
+                      <a:pPr algn="l"/>
+                      <a:r>
+                        <a:rPr sz="850" b="1" i="0">
+                          <a:solidFill>
+                            <a:srgbClr val="FFFFFF"/>
+                          </a:solidFill>
+                          <a:latin typeface="Arial"/>
+                        </a:rPr>
+                        <a:t/>
+                      </a:r>
+                    </a:p>
+                  </a:txBody>
+                  <a:tcPr marL="45720" marR="45720" marT="9144" marB="9144" anchor="ctr">
+                    <a:solidFill>
+                      <a:srgbClr val="0B2545"/>
+                    </a:solidFill>
+                  </a:tcPr>
+                </a:tc>
+                <a:tc>
+                  <a:txBody>
+                    <a:bodyPr/>
+                    <a:lstStyle/>
+                    <a:p>
+                      <a:pPr algn="ctr"/>
+                      <a:r>
+                        <a:rPr sz="850" b="1" i="0">
+                          <a:solidFill>
+                            <a:srgbClr val="FFFFFF"/>
+                          </a:solidFill>
+                          <a:latin typeface="Arial"/>
+                        </a:rPr>
+                        <a:t>ZeroDrift</a:t>
+                      </a:r>
+                    </a:p>
+                  </a:txBody>
+                  <a:tcPr marL="45720" marR="45720" marT="9144" marB="9144" anchor="ctr">
+                    <a:solidFill>
+                      <a:srgbClr val="0B2545"/>
+                    </a:solidFill>
+                  </a:tcPr>
+                </a:tc>
+                <a:tc>
+                  <a:txBody>
+                    <a:bodyPr/>
+                    <a:lstStyle/>
+                    <a:p>
+                      <a:pPr algn="ctr"/>
+                      <a:r>
+                        <a:rPr sz="850" b="1" i="0">
+                          <a:solidFill>
+                            <a:srgbClr val="FFFFFF"/>
+                          </a:solidFill>
+                          <a:latin typeface="Arial"/>
+                        </a:rPr>
+                        <a:t>MATLAB sim</a:t>
+                      </a:r>
+                    </a:p>
+                  </a:txBody>
+                  <a:tcPr marL="45720" marR="45720" marT="9144" marB="9144" anchor="ctr">
+                    <a:solidFill>
+                      <a:srgbClr val="0B2545"/>
+                    </a:solidFill>
+                  </a:tcPr>
+                </a:tc>
+                <a:tc>
+                  <a:txBody>
+                    <a:bodyPr/>
+                    <a:lstStyle/>
+                    <a:p>
+                      <a:pPr algn="ctr"/>
+                      <a:r>
+                        <a:rPr sz="850" b="1" i="0">
+                          <a:solidFill>
+                            <a:srgbClr val="FFFFFF"/>
+                          </a:solidFill>
+                          <a:latin typeface="Arial"/>
+                        </a:rPr>
+                        <a:t>HW testbed</a:t>
+                      </a:r>
+                    </a:p>
+                  </a:txBody>
+                  <a:tcPr marL="45720" marR="45720" marT="9144" marB="9144" anchor="ctr">
+                    <a:solidFill>
+                      <a:srgbClr val="0B2545"/>
+                    </a:solidFill>
+                  </a:tcPr>
+                </a:tc>
+              </a:tr>
+              <a:tr h="219456">
+                <a:tc>
+                  <a:txBody>
+                    <a:bodyPr/>
+                    <a:lstStyle/>
+                    <a:p>
+                      <a:pPr algn="l"/>
+                      <a:r>
+                        <a:rPr sz="850" b="0" i="0">
+                          <a:solidFill>
+                            <a:srgbClr val="0B2545"/>
+                          </a:solidFill>
+                          <a:latin typeface="Arial"/>
+                        </a:rPr>
+                        <a:t>Zero hardware cost</a:t>
+                      </a:r>
+                    </a:p>
+                  </a:txBody>
+                  <a:tcPr marL="45720" marR="45720" marT="9144" marB="9144" anchor="ctr">
+                    <a:solidFill>
+                      <a:srgbClr val="FFFFFF"/>
+                    </a:solidFill>
+                  </a:tcPr>
+                </a:tc>
+                <a:tc>
+                  <a:txBody>
+                    <a:bodyPr/>
+                    <a:lstStyle/>
+                    <a:p>
+                      <a:pPr algn="ctr"/>
+                      <a:r>
+                        <a:rPr sz="950" b="1" i="0">
+                          <a:solidFill>
+                            <a:srgbClr val="1F8A5B"/>
+                          </a:solidFill>
+                          <a:latin typeface="Arial"/>
+                        </a:rPr>
+                        <a:t>✓</a:t>
+                      </a:r>
+                    </a:p>
+                  </a:txBody>
+                  <a:tcPr marL="45720" marR="45720" marT="9144" marB="9144" anchor="ctr">
+                    <a:solidFill>
+                      <a:srgbClr val="FFFFFF"/>
+                    </a:solidFill>
+                  </a:tcPr>
+                </a:tc>
+                <a:tc>
+                  <a:txBody>
+                    <a:bodyPr/>
+                    <a:lstStyle/>
+                    <a:p>
+                      <a:pPr algn="ctr"/>
+                      <a:r>
+                        <a:rPr sz="950" b="1" i="0">
+                          <a:solidFill>
+                            <a:srgbClr val="1F8A5B"/>
+                          </a:solidFill>
+                          <a:latin typeface="Arial"/>
+                        </a:rPr>
+                        <a:t>✓</a:t>
+                      </a:r>
+                    </a:p>
+                  </a:txBody>
+                  <a:tcPr marL="45720" marR="45720" marT="9144" marB="9144" anchor="ctr">
+                    <a:solidFill>
+                      <a:srgbClr val="FFFFFF"/>
+                    </a:solidFill>
+                  </a:tcPr>
+                </a:tc>
+                <a:tc>
+                  <a:txBody>
+                    <a:bodyPr/>
+                    <a:lstStyle/>
+                    <a:p>
+                      <a:pPr algn="ctr"/>
+                      <a:r>
+                        <a:rPr sz="950" b="1" i="0">
+                          <a:solidFill>
+                            <a:srgbClr val="9C2E23"/>
+                          </a:solidFill>
+                          <a:latin typeface="Arial"/>
+                        </a:rPr>
+                        <a:t>✗</a:t>
+                      </a:r>
+                    </a:p>
+                  </a:txBody>
+                  <a:tcPr marL="45720" marR="45720" marT="9144" marB="9144" anchor="ctr">
+                    <a:solidFill>
+                      <a:srgbClr val="FFFFFF"/>
+                    </a:solidFill>
+                  </a:tcPr>
+                </a:tc>
+              </a:tr>
+              <a:tr h="219456">
+                <a:tc>
+                  <a:txBody>
+                    <a:bodyPr/>
+                    <a:lstStyle/>
+                    <a:p>
+                      <a:pPr algn="l"/>
+                      <a:r>
+                        <a:rPr sz="850" b="0" i="0">
+                          <a:solidFill>
+                            <a:srgbClr val="0B2545"/>
+                          </a:solidFill>
+                          <a:latin typeface="Arial"/>
+                        </a:rPr>
+                        <a:t>Real-time closed loop + live console</a:t>
+                      </a:r>
+                    </a:p>
+                  </a:txBody>
+                  <a:tcPr marL="45720" marR="45720" marT="9144" marB="9144" anchor="ctr">
+                    <a:solidFill>
+                      <a:srgbClr val="EFF3F7"/>
+                    </a:solidFill>
+                  </a:tcPr>
+                </a:tc>
+                <a:tc>
+                  <a:txBody>
+                    <a:bodyPr/>
+                    <a:lstStyle/>
+                    <a:p>
+                      <a:pPr algn="ctr"/>
+                      <a:r>
+                        <a:rPr sz="950" b="1" i="0">
+                          <a:solidFill>
+                            <a:srgbClr val="1F8A5B"/>
+                          </a:solidFill>
+                          <a:latin typeface="Arial"/>
+                        </a:rPr>
+                        <a:t>✓</a:t>
+                      </a:r>
+                    </a:p>
+                  </a:txBody>
+                  <a:tcPr marL="45720" marR="45720" marT="9144" marB="9144" anchor="ctr">
+                    <a:solidFill>
+                      <a:srgbClr val="EFF3F7"/>
+                    </a:solidFill>
+                  </a:tcPr>
+                </a:tc>
+                <a:tc>
+                  <a:txBody>
+                    <a:bodyPr/>
+                    <a:lstStyle/>
+                    <a:p>
+                      <a:pPr algn="ctr"/>
+                      <a:r>
+                        <a:rPr sz="950" b="1" i="0">
+                          <a:solidFill>
+                            <a:srgbClr val="9C2E23"/>
+                          </a:solidFill>
+                          <a:latin typeface="Arial"/>
+                        </a:rPr>
+                        <a:t>✗</a:t>
+                      </a:r>
+                    </a:p>
+                  </a:txBody>
+                  <a:tcPr marL="45720" marR="45720" marT="9144" marB="9144" anchor="ctr">
+                    <a:solidFill>
+                      <a:srgbClr val="EFF3F7"/>
+                    </a:solidFill>
+                  </a:tcPr>
+                </a:tc>
+                <a:tc>
+                  <a:txBody>
+                    <a:bodyPr/>
+                    <a:lstStyle/>
+                    <a:p>
+                      <a:pPr algn="ctr"/>
+                      <a:r>
+                        <a:rPr sz="950" b="1" i="0">
+                          <a:solidFill>
+                            <a:srgbClr val="1F8A5B"/>
+                          </a:solidFill>
+                          <a:latin typeface="Arial"/>
+                        </a:rPr>
+                        <a:t>✓</a:t>
+                      </a:r>
+                    </a:p>
+                  </a:txBody>
+                  <a:tcPr marL="45720" marR="45720" marT="9144" marB="9144" anchor="ctr">
+                    <a:solidFill>
+                      <a:srgbClr val="EFF3F7"/>
+                    </a:solidFill>
+                  </a:tcPr>
+                </a:tc>
+              </a:tr>
+              <a:tr h="219456">
+                <a:tc>
+                  <a:txBody>
+                    <a:bodyPr/>
+                    <a:lstStyle/>
+                    <a:p>
+                      <a:pPr algn="l"/>
+                      <a:r>
+                        <a:rPr sz="850" b="0" i="0">
+                          <a:solidFill>
+                            <a:srgbClr val="0B2545"/>
+                          </a:solidFill>
+                          <a:latin typeface="Arial"/>
+                        </a:rPr>
+                        <a:t>Decoy &amp; blink-signature discrimination</a:t>
+                      </a:r>
+                    </a:p>
+                  </a:txBody>
+                  <a:tcPr marL="45720" marR="45720" marT="9144" marB="9144" anchor="ctr">
+                    <a:solidFill>
+                      <a:srgbClr val="FFFFFF"/>
+                    </a:solidFill>
+                  </a:tcPr>
+                </a:tc>
+                <a:tc>
+                  <a:txBody>
+                    <a:bodyPr/>
+                    <a:lstStyle/>
+                    <a:p>
+                      <a:pPr algn="ctr"/>
+                      <a:r>
+                        <a:rPr sz="950" b="1" i="0">
+                          <a:solidFill>
+                            <a:srgbClr val="1F8A5B"/>
+                          </a:solidFill>
+                          <a:latin typeface="Arial"/>
+                        </a:rPr>
+                        <a:t>✓</a:t>
+                      </a:r>
+                    </a:p>
+                  </a:txBody>
+                  <a:tcPr marL="45720" marR="45720" marT="9144" marB="9144" anchor="ctr">
+                    <a:solidFill>
+                      <a:srgbClr val="FFFFFF"/>
+                    </a:solidFill>
+                  </a:tcPr>
+                </a:tc>
+                <a:tc>
+                  <a:txBody>
+                    <a:bodyPr/>
+                    <a:lstStyle/>
+                    <a:p>
+                      <a:pPr algn="ctr"/>
+                      <a:r>
+                        <a:rPr sz="950" b="1" i="0">
+                          <a:solidFill>
+                            <a:srgbClr val="9C2E23"/>
+                          </a:solidFill>
+                          <a:latin typeface="Arial"/>
+                        </a:rPr>
+                        <a:t>✗</a:t>
+                      </a:r>
+                    </a:p>
+                  </a:txBody>
+                  <a:tcPr marL="45720" marR="45720" marT="9144" marB="9144" anchor="ctr">
+                    <a:solidFill>
+                      <a:srgbClr val="FFFFFF"/>
+                    </a:solidFill>
+                  </a:tcPr>
+                </a:tc>
+                <a:tc>
+                  <a:txBody>
+                    <a:bodyPr/>
+                    <a:lstStyle/>
+                    <a:p>
+                      <a:pPr algn="ctr"/>
+                      <a:r>
+                        <a:rPr sz="950" b="1" i="0">
+                          <a:solidFill>
+                            <a:srgbClr val="9C2E23"/>
+                          </a:solidFill>
+                          <a:latin typeface="Arial"/>
+                        </a:rPr>
+                        <a:t>✗</a:t>
+                      </a:r>
+                    </a:p>
+                  </a:txBody>
+                  <a:tcPr marL="45720" marR="45720" marT="9144" marB="9144" anchor="ctr">
+                    <a:solidFill>
+                      <a:srgbClr val="FFFFFF"/>
+                    </a:solidFill>
+                  </a:tcPr>
+                </a:tc>
+              </a:tr>
+              <a:tr h="219456">
+                <a:tc>
+                  <a:txBody>
+                    <a:bodyPr/>
+                    <a:lstStyle/>
+                    <a:p>
+                      <a:pPr algn="l"/>
+                      <a:r>
+                        <a:rPr sz="850" b="0" i="0">
+                          <a:solidFill>
+                            <a:srgbClr val="0B2545"/>
+                          </a:solidFill>
+                          <a:latin typeface="Arial"/>
+                        </a:rPr>
+                        <a:t>Open source · one-command reproducible</a:t>
+                      </a:r>
+                    </a:p>
+                  </a:txBody>
+                  <a:tcPr marL="45720" marR="45720" marT="9144" marB="9144" anchor="ctr">
+                    <a:solidFill>
+                      <a:srgbClr val="EFF3F7"/>
+                    </a:solidFill>
+                  </a:tcPr>
+                </a:tc>
+                <a:tc>
+                  <a:txBody>
+                    <a:bodyPr/>
+                    <a:lstStyle/>
+                    <a:p>
+                      <a:pPr algn="ctr"/>
+                      <a:r>
+                        <a:rPr sz="950" b="1" i="0">
+                          <a:solidFill>
+                            <a:srgbClr val="1F8A5B"/>
+                          </a:solidFill>
+                          <a:latin typeface="Arial"/>
+                        </a:rPr>
+                        <a:t>✓</a:t>
+                      </a:r>
+                    </a:p>
+                  </a:txBody>
+                  <a:tcPr marL="45720" marR="45720" marT="9144" marB="9144" anchor="ctr">
+                    <a:solidFill>
+                      <a:srgbClr val="EFF3F7"/>
+                    </a:solidFill>
+                  </a:tcPr>
+                </a:tc>
+                <a:tc>
+                  <a:txBody>
+                    <a:bodyPr/>
+                    <a:lstStyle/>
+                    <a:p>
+                      <a:pPr algn="ctr"/>
+                      <a:r>
+                        <a:rPr sz="950" b="1" i="0">
+                          <a:solidFill>
+                            <a:srgbClr val="9C2E23"/>
+                          </a:solidFill>
+                          <a:latin typeface="Arial"/>
+                        </a:rPr>
+                        <a:t>✗</a:t>
+                      </a:r>
+                    </a:p>
+                  </a:txBody>
+                  <a:tcPr marL="45720" marR="45720" marT="9144" marB="9144" anchor="ctr">
+                    <a:solidFill>
+                      <a:srgbClr val="EFF3F7"/>
+                    </a:solidFill>
+                  </a:tcPr>
+                </a:tc>
+                <a:tc>
+                  <a:txBody>
+                    <a:bodyPr/>
+                    <a:lstStyle/>
+                    <a:p>
+                      <a:pPr algn="ctr"/>
+                      <a:r>
+                        <a:rPr sz="950" b="1" i="0">
+                          <a:solidFill>
+                            <a:srgbClr val="9C2E23"/>
+                          </a:solidFill>
+                          <a:latin typeface="Arial"/>
+                        </a:rPr>
+                        <a:t>✗</a:t>
+                      </a:r>
+                    </a:p>
+                  </a:txBody>
+                  <a:tcPr marL="45720" marR="45720" marT="9144" marB="9144" anchor="ctr">
+                    <a:solidFill>
+                      <a:srgbClr val="EFF3F7"/>
+                    </a:solidFill>
+                  </a:tcPr>
+                </a:tc>
+              </a:tr>
+            </a:tbl>
+          </a:graphicData>
+        </a:graphic>
+      </p:graphicFrame>
+      <p:sp>
+        <p:nvSpPr>
+          <p:cNvPr id="17417" name="Rounded Rectangle 17416"/>
           <p:cNvSpPr/>
           <p:nvPr/>
         </p:nvSpPr>
         <p:spPr>
           <a:xfrm>
-            <a:off x="6355080" y="4206240"/>
-            <a:ext cx="5486400" cy="1737360"/>
+            <a:off x="6355080" y="4864608"/>
+            <a:ext cx="5486400" cy="1133856"/>
           </a:xfrm>
           <a:prstGeom prst="roundRect">
             <a:avLst>
@@ -12767,11 +13325,11 @@
           <a:p>
             <a:pPr>
               <a:spcBef>
-                <a:spcPts val="400"/>
+                <a:spcPts val="200"/>
               </a:spcBef>
             </a:pPr>
             <a:r>
-              <a:rPr sz="1150" b="1" i="0">
+              <a:rPr sz="1050" b="1" i="0">
                 <a:solidFill>
                   <a:srgbClr val="7FD4A8"/>
                 </a:solidFill>
@@ -12780,7 +13338,7 @@
               <a:t>✓  </a:t>
             </a:r>
             <a:r>
-              <a:rPr sz="1150" b="0" i="0">
+              <a:rPr sz="1050" b="0" i="0">
                 <a:solidFill>
                   <a:srgbClr val="FFFFFF"/>
                 </a:solidFill>
@@ -12792,11 +13350,11 @@
           <a:p>
             <a:pPr>
               <a:spcBef>
-                <a:spcPts val="400"/>
+                <a:spcPts val="200"/>
               </a:spcBef>
             </a:pPr>
             <a:r>
-              <a:rPr sz="1150" b="1" i="0">
+              <a:rPr sz="1050" b="1" i="0">
                 <a:solidFill>
                   <a:srgbClr val="7FD4A8"/>
                 </a:solidFill>
@@ -12805,7 +13363,7 @@
               <a:t>✓  </a:t>
             </a:r>
             <a:r>
-              <a:rPr sz="1150" b="0" i="0">
+              <a:rPr sz="1050" b="0" i="0">
                 <a:solidFill>
                   <a:srgbClr val="FFFFFF"/>
                 </a:solidFill>
@@ -12817,11 +13375,11 @@
           <a:p>
             <a:pPr>
               <a:spcBef>
-                <a:spcPts val="400"/>
+                <a:spcPts val="200"/>
               </a:spcBef>
             </a:pPr>
             <a:r>
-              <a:rPr sz="1150" b="1" i="0">
+              <a:rPr sz="1050" b="1" i="0">
                 <a:solidFill>
                   <a:srgbClr val="7FD4A8"/>
                 </a:solidFill>
@@ -12830,7 +13388,7 @@
               <a:t>✓  </a:t>
             </a:r>
             <a:r>
-              <a:rPr sz="1150" b="0" i="0">
+              <a:rPr sz="1050" b="0" i="0">
                 <a:solidFill>
                   <a:srgbClr val="FFFFFF"/>
                 </a:solidFill>

--- a/docs/submission/ZeroDrift_SIH26169.pptx
+++ b/docs/submission/ZeroDrift_SIH26169.pptx
@@ -6712,7 +6712,7 @@
                 </a:solidFill>
                 <a:latin typeface="Arial"/>
               </a:rPr>
-              <a:t>Our console, live: locked on the beacon at 175 µrad</a:t>
+              <a:t>Our console tracking the beacon during a simulated LEO pass</a:t>
             </a:r>
           </a:p>
         </p:txBody>
@@ -6767,7 +6767,7 @@
                 </a:solidFill>
                 <a:latin typeface="Arial"/>
               </a:rPr>
-              <a:t>1.1 s</a:t>
+              <a:t>1.27 s</a:t>
             </a:r>
           </a:p>
           <a:p>
@@ -6834,7 +6834,7 @@
                 </a:solidFill>
                 <a:latin typeface="Arial"/>
               </a:rPr>
-              <a:t>98.8 %</a:t>
+              <a:t>98.3 %</a:t>
             </a:r>
           </a:p>
           <a:p>
@@ -6956,7 +6956,7 @@
                 </a:solidFill>
                 <a:latin typeface="Arial"/>
               </a:rPr>
-              <a:t>median 223 µrad</a:t>
+              <a:t>median 198 µrad</a:t>
             </a:r>
             <a:r>
               <a:rPr sz="1100" b="0" i="0">
@@ -6983,7 +6983,7 @@
                 </a:solidFill>
                 <a:latin typeface="Arial"/>
               </a:rPr>
-              <a:t> of the pass</a:t>
+              <a:t> · the live-demo run</a:t>
             </a:r>
           </a:p>
         </p:txBody>
@@ -9791,7 +9791,7 @@
                 </a:solidFill>
                 <a:latin typeface="Arial"/>
               </a:rPr>
-              <a:t>307,200 px in → ≈6 CFAR candidates → 1 beacon confirmed → 1 command out, 14 ms used. Closed loop, real time on a normal laptop; recovers even from 5° off-target among decoys.</a:t>
+              <a:t>307,200 px in → ≈6 CFAR candidates → 1 beacon confirmed → 1 command out, ≈20 ms used (p50, ISS-pass run). Closed loop, within the 33 ms frame budget on a normal laptop; recovers even from 5° off-target among decoys.</a:t>
             </a:r>
           </a:p>
         </p:txBody>
@@ -10511,7 +10511,7 @@
                 </a:solidFill>
                 <a:latin typeface="Arial"/>
               </a:rPr>
-              <a:t>Runs faster than real time on a normal laptop — no GPU, no cloud, no dataset</a:t>
+              <a:t>Tracker uses 8–21 ms of each 33 ms frame on two CPU cores — no GPU, no cloud, no dataset</a:t>
             </a:r>
           </a:p>
         </p:txBody>
@@ -10907,7 +10907,7 @@
                 </a:solidFill>
                 <a:latin typeface="Arial"/>
               </a:rPr>
-              <a:t>Dual-model IMM filter adapts to manoeuvres in ~0.3 s</a:t>
+              <a:t>Dual-model IMM filter — two motion models re-weighted every frame catch sharp manoeuvres</a:t>
             </a:r>
           </a:p>
         </p:txBody>
@@ -10955,7 +10955,7 @@
                 </a:solidFill>
                 <a:latin typeface="Arial"/>
               </a:rPr>
-              <a:t>a 0.53×-dim beacon under 1.74× turbulence still acquired in 2.8 s and held 91.7% lock. Every number regenerates from one command — fully reproducible.</a:t>
+              <a:t>slowest acquisition 4.0 s, lowest lock retention 91.6%; even a 0.53×-dim beacon under 1.74× turbulence acquired in 2.8 s. Every number regenerates from one command — fully reproducible.</a:t>
             </a:r>
           </a:p>
         </p:txBody>
@@ -12682,7 +12682,7 @@
                 <a:latin typeface="Arial"/>
                 <a:hlinkClick r:id="rId12"/>
               </a:rPr>
-              <a:t>pranshukesavmishra.github.io/SIH-2026</a:t>
+              <a:t>zerodrift-fsoc-pat.netlify.app</a:t>
             </a:r>
           </a:p>
           <a:p>

--- a/docs/submission/ZeroDrift_SIH26169.pptx
+++ b/docs/submission/ZeroDrift_SIH26169.pptx
@@ -6648,14 +6648,14 @@
                 </a:solidFill>
                 <a:latin typeface="Arial"/>
               </a:rPr>
-              <a:t>GUI console, standalone app, 73 automated tests, full performance reports — everything on this slide is measured, not projected.</a:t>
+              <a:t>GUI console, standalone app, hosted replay console, 73 automated tests, full reports — everything on this slide is measured, not projected.</a:t>
             </a:r>
           </a:p>
         </p:txBody>
       </p:sp>
       <p:pic>
         <p:nvPicPr>
-          <p:cNvPr id="15365" name="Picture 15364" descr="gui_shot.png"/>
+          <p:cNvPr id="15365" name="Picture 15364" descr="gui_shot2.png"/>
           <p:cNvPicPr>
             <a:picLocks noChangeAspect="1"/>
           </p:cNvPicPr>
@@ -6669,8 +6669,8 @@
         </p:blipFill>
         <p:spPr>
           <a:xfrm>
-            <a:off x="6903720" y="1847088"/>
-            <a:ext cx="4892040" cy="2751772"/>
+            <a:off x="7082028" y="1847088"/>
+            <a:ext cx="4536337" cy="2743200"/>
           </a:xfrm>
           <a:prstGeom prst="rect">
             <a:avLst/>
@@ -6712,7 +6712,7 @@
                 </a:solidFill>
                 <a:latin typeface="Arial"/>
               </a:rPr>
-              <a:t>Our console tracking the beacon during a simulated LEO pass</a:t>
+              <a:t>Our console locked on the beacon — the same view the live demo link opens</a:t>
             </a:r>
           </a:p>
         </p:txBody>
@@ -12672,7 +12672,7 @@
                 </a:solidFill>
                 <a:latin typeface="Arial"/>
               </a:rPr>
-              <a:t>Live demo (hosted prototype):  </a:t>
+              <a:t>Live demo (replay console):  </a:t>
             </a:r>
             <a:r>
               <a:rPr sz="1100" u="sng">

--- a/docs/submission/ZeroDrift_SIH26169.pptx
+++ b/docs/submission/ZeroDrift_SIH26169.pptx
@@ -6367,7 +6367,7 @@
                   <a:schemeClr val="bg1"/>
                 </a:solidFill>
               </a:rPr>
-              <a:t>@SIH Idea submission- Template</a:t>
+              <a:t>Team ZeroDrift · SIH 2026 · PS 26169</a:t>
             </a:r>
             <a:endParaRPr lang="en-US" dirty="0">
               <a:solidFill>
@@ -6529,7 +6529,7 @@
           <a:p>
             <a:pPr>
               <a:spcAft>
-                <a:spcPts val="800"/>
+                <a:spcPts val="600"/>
               </a:spcAft>
             </a:pPr>
             <a:r>
@@ -6539,7 +6539,7 @@
                 </a:solidFill>
                 <a:latin typeface="Arial"/>
               </a:rPr>
-              <a:t>Complete virtual testbed:  </a:t>
+              <a:t>The problem, simply:  </a:t>
             </a:r>
             <a:r>
               <a:rPr sz="1300" b="0" i="0">
@@ -6548,13 +6548,13 @@
                 </a:solidFill>
                 <a:latin typeface="Arial"/>
               </a:rPr>
-              <a:t>physics-honest sky — turbulence (Greenwood-correlated), platform vibration, sensor noise, moving beacons on real LEO/UAV paths.</a:t>
+              <a:t>laser links beam huge data — but only while both terminals point at each other with hair-thin accuracy through shaking, wind and orbital motion. ISRO wants this ‘pointing brain’ proven in software, without costly optics.</a:t>
             </a:r>
           </a:p>
           <a:p>
             <a:pPr>
               <a:spcAft>
-                <a:spcPts val="800"/>
+                <a:spcPts val="600"/>
               </a:spcAft>
             </a:pPr>
             <a:r>
@@ -6564,7 +6564,7 @@
                 </a:solidFill>
                 <a:latin typeface="Arial"/>
               </a:rPr>
-              <a:t>AI-assisted closed-loop tracker:  </a:t>
+              <a:t>Our solution:  </a:t>
             </a:r>
             <a:r>
               <a:rPr sz="1300" b="0" i="0">
@@ -6573,13 +6573,13 @@
                 </a:solidFill>
                 <a:latin typeface="Arial"/>
               </a:rPr>
-              <a:t>detects the beacon, identifies it, estimates motion, and steers a virtual pan-tilt camera to hold it in the FOV.</a:t>
+              <a:t>a virtual test-range — a physics-true sky with stars, clutter, turbulence and a moving blinking beacon — and an AI-assisted tracker that finds it, proves its identity, and steers a virtual camera to keep it centred.</a:t>
             </a:r>
           </a:p>
           <a:p>
             <a:pPr>
               <a:spcAft>
-                <a:spcPts val="800"/>
+                <a:spcPts val="600"/>
               </a:spcAft>
             </a:pPr>
             <a:r>
@@ -6589,7 +6589,7 @@
                 </a:solidFill>
                 <a:latin typeface="Arial"/>
               </a:rPr>
-              <a:t>Addresses the problem exactly:  </a:t>
+              <a:t>Why it never locks the wrong light:  </a:t>
             </a:r>
             <a:r>
               <a:rPr sz="1300" b="0" i="0">
@@ -6598,13 +6598,13 @@
                 </a:solidFill>
                 <a:latin typeface="Arial"/>
               </a:rPr>
-              <a:t>coarse-alignment algorithms developed and validated with zero optical hardware — ISRO's stated need.</a:t>
+              <a:t>the beacon blinks at an agreed 4 Hz. A star or sun-glint can be brighter, but it cannot blink right — impostors score zero and are rejected.</a:t>
             </a:r>
           </a:p>
           <a:p>
             <a:pPr>
               <a:spcAft>
-                <a:spcPts val="800"/>
+                <a:spcPts val="600"/>
               </a:spcAft>
             </a:pPr>
             <a:r>
@@ -6614,7 +6614,7 @@
                 </a:solidFill>
                 <a:latin typeface="Arial"/>
               </a:rPr>
-              <a:t>Innovation:  </a:t>
+              <a:t>Smart where it matters:  </a:t>
             </a:r>
             <a:r>
               <a:rPr sz="1300" b="0" i="0">
@@ -6623,13 +6623,13 @@
                 </a:solidFill>
                 <a:latin typeface="Arial"/>
               </a:rPr>
-              <a:t>beacon identified by its blink signature (hard gate — stars score 0), IMM motion filter, latency-compensating Smith predictor, from-scratch neural track verifier.</a:t>
+              <a:t>predicts 40 ms ahead to cancel mount delay, rides through blink gaps on a motion model; a self-trained neural verifier double-checks every lock.</a:t>
             </a:r>
           </a:p>
           <a:p>
             <a:pPr>
               <a:spcAft>
-                <a:spcPts val="800"/>
+                <a:spcPts val="600"/>
               </a:spcAft>
             </a:pPr>
             <a:r>
@@ -6639,7 +6639,7 @@
                 </a:solidFill>
                 <a:latin typeface="Arial"/>
               </a:rPr>
-              <a:t>Not a concept — already built:  </a:t>
+              <a:t>Already built:  </a:t>
             </a:r>
             <a:r>
               <a:rPr sz="1300" b="0" i="0">
@@ -6648,7 +6648,7 @@
                 </a:solidFill>
                 <a:latin typeface="Arial"/>
               </a:rPr>
-              <a:t>GUI console, standalone app, hosted replay console, 73 automated tests, full reports — everything on this slide is measured, not projected.</a:t>
+              <a:t>GUI console, standalone app, hosted replay console, 73 automated tests — every number here is measured, not projected.</a:t>
             </a:r>
           </a:p>
         </p:txBody>
@@ -6725,7 +6725,7 @@
         </p:nvSpPr>
         <p:spPr>
           <a:xfrm>
-            <a:off x="384048" y="5257800"/>
+            <a:off x="384048" y="5413248"/>
             <a:ext cx="2011680" cy="859536"/>
           </a:xfrm>
           <a:prstGeom prst="roundRect">
@@ -6792,7 +6792,7 @@
         </p:nvSpPr>
         <p:spPr>
           <a:xfrm>
-            <a:off x="2532888" y="5257800"/>
+            <a:off x="2532888" y="5413248"/>
             <a:ext cx="2011680" cy="859536"/>
           </a:xfrm>
           <a:prstGeom prst="roundRect">
@@ -6859,7 +6859,7 @@
         </p:nvSpPr>
         <p:spPr>
           <a:xfrm>
-            <a:off x="4681728" y="5257800"/>
+            <a:off x="4681728" y="5413248"/>
             <a:ext cx="2011680" cy="859536"/>
           </a:xfrm>
           <a:prstGeom prst="roundRect">
@@ -7261,7 +7261,7 @@
                   <a:schemeClr val="bg1"/>
                 </a:solidFill>
               </a:rPr>
-              <a:t>@SIH Idea submission- Template</a:t>
+              <a:t>Team ZeroDrift · SIH 2026 · PS 26169</a:t>
             </a:r>
             <a:endParaRPr lang="en-US" dirty="0">
               <a:solidFill>
@@ -10205,7 +10205,7 @@
                 <a:ea typeface="+mn-ea"/>
                 <a:cs typeface="+mn-cs"/>
               </a:rPr>
-              <a:t>@SIH Idea submission- Template</a:t>
+              <a:t>Team ZeroDrift · SIH 2026 · PS 26169</a:t>
             </a:r>
             <a:endParaRPr kumimoji="0" lang="en-US" sz="1200" b="0" i="0" u="none" strike="noStrike" kern="1200" cap="none" spc="0" normalizeH="0" baseline="0" noProof="0" dirty="0">
               <a:ln>
@@ -11318,7 +11318,7 @@
                 <a:ea typeface="+mn-ea"/>
                 <a:cs typeface="+mn-cs"/>
               </a:rPr>
-              <a:t>@SIH Idea submission- Template</a:t>
+              <a:t>Team ZeroDrift · SIH 2026 · PS 26169</a:t>
             </a:r>
             <a:endParaRPr kumimoji="0" lang="en-US" sz="1200" b="0" i="0" u="none" strike="noStrike" kern="1200" cap="none" spc="0" normalizeH="0" baseline="0" noProof="0" dirty="0">
               <a:ln>
@@ -12163,7 +12163,7 @@
                 <a:ea typeface="+mn-ea"/>
                 <a:cs typeface="+mn-cs"/>
               </a:rPr>
-              <a:t>@SIH Idea submission- Template</a:t>
+              <a:t>Team ZeroDrift · SIH 2026 · PS 26169</a:t>
             </a:r>
             <a:endParaRPr kumimoji="0" lang="en-US" sz="1200" b="0" i="0" u="none" strike="noStrike" kern="1200" cap="none" spc="0" normalizeH="0" baseline="0" noProof="0" dirty="0">
               <a:ln>

--- a/docs/submission/ZeroDrift_SIH26169.pptx
+++ b/docs/submission/ZeroDrift_SIH26169.pptx
@@ -6717,207 +6717,78 @@
           </a:p>
         </p:txBody>
       </p:sp>
-      <p:sp>
-        <p:nvSpPr>
-          <p:cNvPr id="15367" name="Rounded Rectangle 15366"/>
-          <p:cNvSpPr/>
+      <p:pic>
+        <p:nvPicPr>
+          <p:cNvPr id="15367" name="Picture 15366" descr="chip1.png"/>
+          <p:cNvPicPr>
+            <a:picLocks noChangeAspect="1"/>
+          </p:cNvPicPr>
           <p:nvPr/>
-        </p:nvSpPr>
+        </p:nvPicPr>
+        <p:blipFill>
+          <a:blip r:embed="rId5"/>
+          <a:stretch>
+            <a:fillRect/>
+          </a:stretch>
+        </p:blipFill>
         <p:spPr>
           <a:xfrm>
             <a:off x="384048" y="5413248"/>
-            <a:ext cx="2011680" cy="859536"/>
+            <a:ext cx="2011680" cy="914400"/>
           </a:xfrm>
-          <a:prstGeom prst="roundRect">
-            <a:avLst>
-              <a:gd name="adj" fmla="val 6000"/>
-            </a:avLst>
+          <a:prstGeom prst="rect">
+            <a:avLst/>
           </a:prstGeom>
-          <a:solidFill>
-            <a:srgbClr val="0B2545"/>
-          </a:solidFill>
-          <a:ln>
-            <a:noFill/>
-          </a:ln>
-          <a:effectLst/>
         </p:spPr>
-        <p:style>
-          <a:lnRef idx="1">
-            <a:schemeClr val="accent1"/>
-          </a:lnRef>
-          <a:fillRef idx="3">
-            <a:schemeClr val="accent1"/>
-          </a:fillRef>
-          <a:effectRef idx="2">
-            <a:schemeClr val="accent1"/>
-          </a:effectRef>
-          <a:fontRef idx="minor">
-            <a:schemeClr val="lt1"/>
-          </a:fontRef>
-        </p:style>
-        <p:txBody>
-          <a:bodyPr rtlCol="0" anchor="ctr" wrap="square" lIns="109728" rIns="109728" tIns="73152" bIns="73152"/>
-          <a:lstStyle/>
-          <a:p>
-            <a:pPr algn="ctr"/>
-            <a:r>
-              <a:rPr sz="2000" b="1" i="0">
-                <a:solidFill>
-                  <a:srgbClr val="FFFFFF"/>
-                </a:solidFill>
-                <a:latin typeface="Arial"/>
-              </a:rPr>
-              <a:t>1.27 s</a:t>
-            </a:r>
-          </a:p>
-          <a:p>
-            <a:pPr algn="ctr"/>
-            <a:r>
-              <a:rPr sz="950" b="0" i="0">
-                <a:solidFill>
-                  <a:srgbClr val="BFD7E4"/>
-                </a:solidFill>
-                <a:latin typeface="Arial"/>
-              </a:rPr>
-              <a:t>acquisition time</a:t>
-            </a:r>
-          </a:p>
-        </p:txBody>
-      </p:sp>
-      <p:sp>
-        <p:nvSpPr>
-          <p:cNvPr id="15368" name="Rounded Rectangle 15367"/>
-          <p:cNvSpPr/>
+      </p:pic>
+      <p:pic>
+        <p:nvPicPr>
+          <p:cNvPr id="15368" name="Picture 15367" descr="chip2.png"/>
+          <p:cNvPicPr>
+            <a:picLocks noChangeAspect="1"/>
+          </p:cNvPicPr>
           <p:nvPr/>
-        </p:nvSpPr>
+        </p:nvPicPr>
+        <p:blipFill>
+          <a:blip r:embed="rId6"/>
+          <a:stretch>
+            <a:fillRect/>
+          </a:stretch>
+        </p:blipFill>
         <p:spPr>
           <a:xfrm>
             <a:off x="2532888" y="5413248"/>
-            <a:ext cx="2011680" cy="859536"/>
+            <a:ext cx="2011680" cy="914400"/>
           </a:xfrm>
-          <a:prstGeom prst="roundRect">
-            <a:avLst>
-              <a:gd name="adj" fmla="val 6000"/>
-            </a:avLst>
+          <a:prstGeom prst="rect">
+            <a:avLst/>
           </a:prstGeom>
-          <a:solidFill>
-            <a:srgbClr val="0B2545"/>
-          </a:solidFill>
-          <a:ln>
-            <a:noFill/>
-          </a:ln>
-          <a:effectLst/>
         </p:spPr>
-        <p:style>
-          <a:lnRef idx="1">
-            <a:schemeClr val="accent1"/>
-          </a:lnRef>
-          <a:fillRef idx="3">
-            <a:schemeClr val="accent1"/>
-          </a:fillRef>
-          <a:effectRef idx="2">
-            <a:schemeClr val="accent1"/>
-          </a:effectRef>
-          <a:fontRef idx="minor">
-            <a:schemeClr val="lt1"/>
-          </a:fontRef>
-        </p:style>
-        <p:txBody>
-          <a:bodyPr rtlCol="0" anchor="ctr" wrap="square" lIns="109728" rIns="109728" tIns="73152" bIns="73152"/>
-          <a:lstStyle/>
-          <a:p>
-            <a:pPr algn="ctr"/>
-            <a:r>
-              <a:rPr sz="2000" b="1" i="0">
-                <a:solidFill>
-                  <a:srgbClr val="FFFFFF"/>
-                </a:solidFill>
-                <a:latin typeface="Arial"/>
-              </a:rPr>
-              <a:t>98.3 %</a:t>
-            </a:r>
-          </a:p>
-          <a:p>
-            <a:pPr algn="ctr"/>
-            <a:r>
-              <a:rPr sz="950" b="0" i="0">
-                <a:solidFill>
-                  <a:srgbClr val="BFD7E4"/>
-                </a:solidFill>
-                <a:latin typeface="Arial"/>
-              </a:rPr>
-              <a:t>lock retention</a:t>
-            </a:r>
-          </a:p>
-        </p:txBody>
-      </p:sp>
-      <p:sp>
-        <p:nvSpPr>
-          <p:cNvPr id="15369" name="Rounded Rectangle 15368"/>
-          <p:cNvSpPr/>
+      </p:pic>
+      <p:pic>
+        <p:nvPicPr>
+          <p:cNvPr id="15369" name="Picture 15368" descr="chip3.png"/>
+          <p:cNvPicPr>
+            <a:picLocks noChangeAspect="1"/>
+          </p:cNvPicPr>
           <p:nvPr/>
-        </p:nvSpPr>
+        </p:nvPicPr>
+        <p:blipFill>
+          <a:blip r:embed="rId7"/>
+          <a:stretch>
+            <a:fillRect/>
+          </a:stretch>
+        </p:blipFill>
         <p:spPr>
           <a:xfrm>
             <a:off x="4681728" y="5413248"/>
-            <a:ext cx="2011680" cy="859536"/>
+            <a:ext cx="2011680" cy="914400"/>
           </a:xfrm>
-          <a:prstGeom prst="roundRect">
-            <a:avLst>
-              <a:gd name="adj" fmla="val 6000"/>
-            </a:avLst>
+          <a:prstGeom prst="rect">
+            <a:avLst/>
           </a:prstGeom>
-          <a:solidFill>
-            <a:srgbClr val="0B2545"/>
-          </a:solidFill>
-          <a:ln>
-            <a:noFill/>
-          </a:ln>
-          <a:effectLst/>
         </p:spPr>
-        <p:style>
-          <a:lnRef idx="1">
-            <a:schemeClr val="accent1"/>
-          </a:lnRef>
-          <a:fillRef idx="3">
-            <a:schemeClr val="accent1"/>
-          </a:fillRef>
-          <a:effectRef idx="2">
-            <a:schemeClr val="accent1"/>
-          </a:effectRef>
-          <a:fontRef idx="minor">
-            <a:schemeClr val="lt1"/>
-          </a:fontRef>
-        </p:style>
-        <p:txBody>
-          <a:bodyPr rtlCol="0" anchor="ctr" wrap="square" lIns="109728" rIns="109728" tIns="73152" bIns="73152"/>
-          <a:lstStyle/>
-          <a:p>
-            <a:pPr algn="ctr"/>
-            <a:r>
-              <a:rPr sz="2000" b="1" i="0">
-                <a:solidFill>
-                  <a:srgbClr val="FFFFFF"/>
-                </a:solidFill>
-                <a:latin typeface="Arial"/>
-              </a:rPr>
-              <a:t>0 / 64</a:t>
-            </a:r>
-          </a:p>
-          <a:p>
-            <a:pPr algn="ctr"/>
-            <a:r>
-              <a:rPr sz="950" b="0" i="0">
-                <a:solidFill>
-                  <a:srgbClr val="BFD7E4"/>
-                </a:solidFill>
-                <a:latin typeface="Arial"/>
-              </a:rPr>
-              <a:t>wrong-target locks</a:t>
-            </a:r>
-          </a:p>
-        </p:txBody>
-      </p:sp>
+      </p:pic>
       <p:sp>
         <p:nvSpPr>
           <p:cNvPr id="15370" name="TextBox 15369"/>
@@ -6997,7 +6868,7 @@
           <p:nvPr/>
         </p:nvPicPr>
         <p:blipFill>
-          <a:blip r:embed="rId5"/>
+          <a:blip r:embed="rId8"/>
           <a:stretch>
             <a:fillRect/>
           </a:stretch>
@@ -7365,1883 +7236,9 @@
           </a:prstGeom>
         </p:spPr>
       </p:pic>
-      <p:sp>
-        <p:nvSpPr>
-          <p:cNvPr id="17411" name="TextBox 17410"/>
-          <p:cNvSpPr txBox="1"/>
-          <p:nvPr/>
-        </p:nvSpPr>
-        <p:spPr>
-          <a:xfrm>
-            <a:off x="384048" y="1591056"/>
-            <a:ext cx="3017520" cy="310896"/>
-          </a:xfrm>
-          <a:prstGeom prst="rect">
-            <a:avLst/>
-          </a:prstGeom>
-          <a:noFill/>
-        </p:spPr>
-        <p:txBody>
-          <a:bodyPr wrap="square" anchor="t" lIns="0" rIns="0" tIns="0" bIns="0">
-            <a:spAutoFit/>
-          </a:bodyPr>
-          <a:lstStyle/>
-          <a:p>
-            <a:r>
-              <a:rPr sz="1600" b="1" i="0">
-                <a:solidFill>
-                  <a:srgbClr val="0B2545"/>
-                </a:solidFill>
-                <a:latin typeface="Arial"/>
-              </a:rPr>
-              <a:t>TECH STACK</a:t>
-            </a:r>
-          </a:p>
-        </p:txBody>
-      </p:sp>
-      <p:sp>
-        <p:nvSpPr>
-          <p:cNvPr id="17412" name="TextBox 17411"/>
-          <p:cNvSpPr txBox="1"/>
-          <p:nvPr/>
-        </p:nvSpPr>
-        <p:spPr>
-          <a:xfrm>
-            <a:off x="384048" y="1975104"/>
-            <a:ext cx="3017520" cy="219456"/>
-          </a:xfrm>
-          <a:prstGeom prst="rect">
-            <a:avLst/>
-          </a:prstGeom>
-          <a:noFill/>
-        </p:spPr>
-        <p:txBody>
-          <a:bodyPr wrap="square" anchor="t" lIns="0" rIns="0" tIns="0" bIns="0">
-            <a:spAutoFit/>
-          </a:bodyPr>
-          <a:lstStyle/>
-          <a:p>
-            <a:r>
-              <a:rPr sz="1000" b="1" i="0">
-                <a:solidFill>
-                  <a:srgbClr val="5A6472"/>
-                </a:solidFill>
-                <a:latin typeface="Arial"/>
-              </a:rPr>
-              <a:t>CORE</a:t>
-            </a:r>
-          </a:p>
-        </p:txBody>
-      </p:sp>
-      <p:sp>
-        <p:nvSpPr>
-          <p:cNvPr id="17413" name="Rounded Rectangle 17412"/>
-          <p:cNvSpPr/>
-          <p:nvPr/>
-        </p:nvSpPr>
-        <p:spPr>
-          <a:xfrm>
-            <a:off x="384048" y="2212848"/>
-            <a:ext cx="402336" cy="329184"/>
-          </a:xfrm>
-          <a:prstGeom prst="roundRect">
-            <a:avLst>
-              <a:gd name="adj" fmla="val 6000"/>
-            </a:avLst>
-          </a:prstGeom>
-          <a:solidFill>
-            <a:srgbClr val="0B2545"/>
-          </a:solidFill>
-          <a:ln>
-            <a:noFill/>
-          </a:ln>
-          <a:effectLst/>
-        </p:spPr>
-        <p:style>
-          <a:lnRef idx="1">
-            <a:schemeClr val="accent1"/>
-          </a:lnRef>
-          <a:fillRef idx="3">
-            <a:schemeClr val="accent1"/>
-          </a:fillRef>
-          <a:effectRef idx="2">
-            <a:schemeClr val="accent1"/>
-          </a:effectRef>
-          <a:fontRef idx="minor">
-            <a:schemeClr val="lt1"/>
-          </a:fontRef>
-        </p:style>
-        <p:txBody>
-          <a:bodyPr rtlCol="0" anchor="ctr" wrap="none" lIns="109728" rIns="109728" tIns="73152" bIns="73152"/>
-          <a:lstStyle/>
-          <a:p>
-            <a:pPr algn="ctr"/>
-            <a:r>
-              <a:rPr sz="950" b="1" i="0">
-                <a:solidFill>
-                  <a:srgbClr val="FFFFFF"/>
-                </a:solidFill>
-                <a:latin typeface="Arial"/>
-              </a:rPr>
-              <a:t>Py</a:t>
-            </a:r>
-          </a:p>
-        </p:txBody>
-      </p:sp>
-      <p:sp>
-        <p:nvSpPr>
-          <p:cNvPr id="17414" name="Rounded Rectangle 17413"/>
-          <p:cNvSpPr/>
-          <p:nvPr/>
-        </p:nvSpPr>
-        <p:spPr>
-          <a:xfrm>
-            <a:off x="877824" y="2212848"/>
-            <a:ext cx="402336" cy="329184"/>
-          </a:xfrm>
-          <a:prstGeom prst="roundRect">
-            <a:avLst>
-              <a:gd name="adj" fmla="val 6000"/>
-            </a:avLst>
-          </a:prstGeom>
-          <a:solidFill>
-            <a:srgbClr val="0E7C99"/>
-          </a:solidFill>
-          <a:ln>
-            <a:noFill/>
-          </a:ln>
-          <a:effectLst/>
-        </p:spPr>
-        <p:style>
-          <a:lnRef idx="1">
-            <a:schemeClr val="accent1"/>
-          </a:lnRef>
-          <a:fillRef idx="3">
-            <a:schemeClr val="accent1"/>
-          </a:fillRef>
-          <a:effectRef idx="2">
-            <a:schemeClr val="accent1"/>
-          </a:effectRef>
-          <a:fontRef idx="minor">
-            <a:schemeClr val="lt1"/>
-          </a:fontRef>
-        </p:style>
-        <p:txBody>
-          <a:bodyPr rtlCol="0" anchor="ctr" wrap="none" lIns="109728" rIns="109728" tIns="73152" bIns="73152"/>
-          <a:lstStyle/>
-          <a:p>
-            <a:pPr algn="ctr"/>
-            <a:r>
-              <a:rPr sz="950" b="1" i="0">
-                <a:solidFill>
-                  <a:srgbClr val="FFFFFF"/>
-                </a:solidFill>
-                <a:latin typeface="Arial"/>
-              </a:rPr>
-              <a:t>NP</a:t>
-            </a:r>
-          </a:p>
-        </p:txBody>
-      </p:sp>
-      <p:sp>
-        <p:nvSpPr>
-          <p:cNvPr id="17415" name="Rounded Rectangle 17414"/>
-          <p:cNvSpPr/>
-          <p:nvPr/>
-        </p:nvSpPr>
-        <p:spPr>
-          <a:xfrm>
-            <a:off x="1371600" y="2212848"/>
-            <a:ext cx="402336" cy="329184"/>
-          </a:xfrm>
-          <a:prstGeom prst="roundRect">
-            <a:avLst>
-              <a:gd name="adj" fmla="val 6000"/>
-            </a:avLst>
-          </a:prstGeom>
-          <a:solidFill>
-            <a:srgbClr val="0E7C99"/>
-          </a:solidFill>
-          <a:ln>
-            <a:noFill/>
-          </a:ln>
-          <a:effectLst/>
-        </p:spPr>
-        <p:style>
-          <a:lnRef idx="1">
-            <a:schemeClr val="accent1"/>
-          </a:lnRef>
-          <a:fillRef idx="3">
-            <a:schemeClr val="accent1"/>
-          </a:fillRef>
-          <a:effectRef idx="2">
-            <a:schemeClr val="accent1"/>
-          </a:effectRef>
-          <a:fontRef idx="minor">
-            <a:schemeClr val="lt1"/>
-          </a:fontRef>
-        </p:style>
-        <p:txBody>
-          <a:bodyPr rtlCol="0" anchor="ctr" wrap="none" lIns="109728" rIns="109728" tIns="73152" bIns="73152"/>
-          <a:lstStyle/>
-          <a:p>
-            <a:pPr algn="ctr"/>
-            <a:r>
-              <a:rPr sz="950" b="1" i="0">
-                <a:solidFill>
-                  <a:srgbClr val="FFFFFF"/>
-                </a:solidFill>
-                <a:latin typeface="Arial"/>
-              </a:rPr>
-              <a:t>CV</a:t>
-            </a:r>
-          </a:p>
-        </p:txBody>
-      </p:sp>
-      <p:sp>
-        <p:nvSpPr>
-          <p:cNvPr id="17416" name="TextBox 17415"/>
-          <p:cNvSpPr txBox="1"/>
-          <p:nvPr/>
-        </p:nvSpPr>
-        <p:spPr>
-          <a:xfrm>
-            <a:off x="1901952" y="2249424"/>
-            <a:ext cx="1764791" cy="310896"/>
-          </a:xfrm>
-          <a:prstGeom prst="rect">
-            <a:avLst/>
-          </a:prstGeom>
-          <a:noFill/>
-        </p:spPr>
-        <p:txBody>
-          <a:bodyPr wrap="square" anchor="t" lIns="0" rIns="0" tIns="0" bIns="0">
-            <a:spAutoFit/>
-          </a:bodyPr>
-          <a:lstStyle/>
-          <a:p>
-            <a:r>
-              <a:rPr sz="850" b="0" i="0">
-                <a:solidFill>
-                  <a:srgbClr val="0B2545"/>
-                </a:solidFill>
-                <a:latin typeface="Arial"/>
-              </a:rPr>
-              <a:t>Python 3.11 · NumPy · OpenCV</a:t>
-            </a:r>
-          </a:p>
-        </p:txBody>
-      </p:sp>
-      <p:sp>
-        <p:nvSpPr>
-          <p:cNvPr id="17417" name="TextBox 17416"/>
-          <p:cNvSpPr txBox="1"/>
-          <p:nvPr/>
-        </p:nvSpPr>
-        <p:spPr>
-          <a:xfrm>
-            <a:off x="384048" y="2706624"/>
-            <a:ext cx="3017520" cy="219456"/>
-          </a:xfrm>
-          <a:prstGeom prst="rect">
-            <a:avLst/>
-          </a:prstGeom>
-          <a:noFill/>
-        </p:spPr>
-        <p:txBody>
-          <a:bodyPr wrap="square" anchor="t" lIns="0" rIns="0" tIns="0" bIns="0">
-            <a:spAutoFit/>
-          </a:bodyPr>
-          <a:lstStyle/>
-          <a:p>
-            <a:r>
-              <a:rPr sz="1000" b="1" i="0">
-                <a:solidFill>
-                  <a:srgbClr val="5A6472"/>
-                </a:solidFill>
-                <a:latin typeface="Arial"/>
-              </a:rPr>
-              <a:t>INTERFACE</a:t>
-            </a:r>
-          </a:p>
-        </p:txBody>
-      </p:sp>
-      <p:sp>
-        <p:nvSpPr>
-          <p:cNvPr id="17418" name="Rounded Rectangle 17417"/>
-          <p:cNvSpPr/>
-          <p:nvPr/>
-        </p:nvSpPr>
-        <p:spPr>
-          <a:xfrm>
-            <a:off x="384048" y="2944368"/>
-            <a:ext cx="402336" cy="329184"/>
-          </a:xfrm>
-          <a:prstGeom prst="roundRect">
-            <a:avLst>
-              <a:gd name="adj" fmla="val 6000"/>
-            </a:avLst>
-          </a:prstGeom>
-          <a:solidFill>
-            <a:srgbClr val="0B2545"/>
-          </a:solidFill>
-          <a:ln>
-            <a:noFill/>
-          </a:ln>
-          <a:effectLst/>
-        </p:spPr>
-        <p:style>
-          <a:lnRef idx="1">
-            <a:schemeClr val="accent1"/>
-          </a:lnRef>
-          <a:fillRef idx="3">
-            <a:schemeClr val="accent1"/>
-          </a:fillRef>
-          <a:effectRef idx="2">
-            <a:schemeClr val="accent1"/>
-          </a:effectRef>
-          <a:fontRef idx="minor">
-            <a:schemeClr val="lt1"/>
-          </a:fontRef>
-        </p:style>
-        <p:txBody>
-          <a:bodyPr rtlCol="0" anchor="ctr" wrap="none" lIns="109728" rIns="109728" tIns="73152" bIns="73152"/>
-          <a:lstStyle/>
-          <a:p>
-            <a:pPr algn="ctr"/>
-            <a:r>
-              <a:rPr sz="950" b="1" i="0">
-                <a:solidFill>
-                  <a:srgbClr val="FFFFFF"/>
-                </a:solidFill>
-                <a:latin typeface="Arial"/>
-              </a:rPr>
-              <a:t>Qt</a:t>
-            </a:r>
-          </a:p>
-        </p:txBody>
-      </p:sp>
-      <p:sp>
-        <p:nvSpPr>
-          <p:cNvPr id="17419" name="Rounded Rectangle 17418"/>
-          <p:cNvSpPr/>
-          <p:nvPr/>
-        </p:nvSpPr>
-        <p:spPr>
-          <a:xfrm>
-            <a:off x="877824" y="2944368"/>
-            <a:ext cx="402336" cy="329184"/>
-          </a:xfrm>
-          <a:prstGeom prst="roundRect">
-            <a:avLst>
-              <a:gd name="adj" fmla="val 6000"/>
-            </a:avLst>
-          </a:prstGeom>
-          <a:solidFill>
-            <a:srgbClr val="0E7C99"/>
-          </a:solidFill>
-          <a:ln>
-            <a:noFill/>
-          </a:ln>
-          <a:effectLst/>
-        </p:spPr>
-        <p:style>
-          <a:lnRef idx="1">
-            <a:schemeClr val="accent1"/>
-          </a:lnRef>
-          <a:fillRef idx="3">
-            <a:schemeClr val="accent1"/>
-          </a:fillRef>
-          <a:effectRef idx="2">
-            <a:schemeClr val="accent1"/>
-          </a:effectRef>
-          <a:fontRef idx="minor">
-            <a:schemeClr val="lt1"/>
-          </a:fontRef>
-        </p:style>
-        <p:txBody>
-          <a:bodyPr rtlCol="0" anchor="ctr" wrap="none" lIns="109728" rIns="109728" tIns="73152" bIns="73152"/>
-          <a:lstStyle/>
-          <a:p>
-            <a:pPr algn="ctr"/>
-            <a:r>
-              <a:rPr sz="950" b="1" i="0">
-                <a:solidFill>
-                  <a:srgbClr val="FFFFFF"/>
-                </a:solidFill>
-                <a:latin typeface="Arial"/>
-              </a:rPr>
-              <a:t>PG</a:t>
-            </a:r>
-          </a:p>
-        </p:txBody>
-      </p:sp>
-      <p:sp>
-        <p:nvSpPr>
-          <p:cNvPr id="17420" name="TextBox 17419"/>
-          <p:cNvSpPr txBox="1"/>
-          <p:nvPr/>
-        </p:nvSpPr>
-        <p:spPr>
-          <a:xfrm>
-            <a:off x="1408176" y="2980944"/>
-            <a:ext cx="2258568" cy="310896"/>
-          </a:xfrm>
-          <a:prstGeom prst="rect">
-            <a:avLst/>
-          </a:prstGeom>
-          <a:noFill/>
-        </p:spPr>
-        <p:txBody>
-          <a:bodyPr wrap="square" anchor="t" lIns="0" rIns="0" tIns="0" bIns="0">
-            <a:spAutoFit/>
-          </a:bodyPr>
-          <a:lstStyle/>
-          <a:p>
-            <a:r>
-              <a:rPr sz="850" b="0" i="0">
-                <a:solidFill>
-                  <a:srgbClr val="0B2545"/>
-                </a:solidFill>
-                <a:latin typeface="Arial"/>
-              </a:rPr>
-              <a:t>PySide6 console · pyqtgraph live plots</a:t>
-            </a:r>
-          </a:p>
-        </p:txBody>
-      </p:sp>
-      <p:sp>
-        <p:nvSpPr>
-          <p:cNvPr id="17421" name="TextBox 17420"/>
-          <p:cNvSpPr txBox="1"/>
-          <p:nvPr/>
-        </p:nvSpPr>
-        <p:spPr>
-          <a:xfrm>
-            <a:off x="384048" y="3438144"/>
-            <a:ext cx="3017520" cy="219456"/>
-          </a:xfrm>
-          <a:prstGeom prst="rect">
-            <a:avLst/>
-          </a:prstGeom>
-          <a:noFill/>
-        </p:spPr>
-        <p:txBody>
-          <a:bodyPr wrap="square" anchor="t" lIns="0" rIns="0" tIns="0" bIns="0">
-            <a:spAutoFit/>
-          </a:bodyPr>
-          <a:lstStyle/>
-          <a:p>
-            <a:r>
-              <a:rPr sz="1000" b="1" i="0">
-                <a:solidFill>
-                  <a:srgbClr val="5A6472"/>
-                </a:solidFill>
-                <a:latin typeface="Arial"/>
-              </a:rPr>
-              <a:t>ORBITS · AI</a:t>
-            </a:r>
-          </a:p>
-        </p:txBody>
-      </p:sp>
-      <p:sp>
-        <p:nvSpPr>
-          <p:cNvPr id="17422" name="Rounded Rectangle 17421"/>
-          <p:cNvSpPr/>
-          <p:nvPr/>
-        </p:nvSpPr>
-        <p:spPr>
-          <a:xfrm>
-            <a:off x="384048" y="3675887"/>
-            <a:ext cx="566928" cy="329184"/>
-          </a:xfrm>
-          <a:prstGeom prst="roundRect">
-            <a:avLst>
-              <a:gd name="adj" fmla="val 6000"/>
-            </a:avLst>
-          </a:prstGeom>
-          <a:solidFill>
-            <a:srgbClr val="1F8A5B"/>
-          </a:solidFill>
-          <a:ln>
-            <a:noFill/>
-          </a:ln>
-          <a:effectLst/>
-        </p:spPr>
-        <p:style>
-          <a:lnRef idx="1">
-            <a:schemeClr val="accent1"/>
-          </a:lnRef>
-          <a:fillRef idx="3">
-            <a:schemeClr val="accent1"/>
-          </a:fillRef>
-          <a:effectRef idx="2">
-            <a:schemeClr val="accent1"/>
-          </a:effectRef>
-          <a:fontRef idx="minor">
-            <a:schemeClr val="lt1"/>
-          </a:fontRef>
-        </p:style>
-        <p:txBody>
-          <a:bodyPr rtlCol="0" anchor="ctr" wrap="none" lIns="109728" rIns="109728" tIns="73152" bIns="73152"/>
-          <a:lstStyle/>
-          <a:p>
-            <a:pPr algn="ctr"/>
-            <a:r>
-              <a:rPr sz="950" b="1" i="0">
-                <a:solidFill>
-                  <a:srgbClr val="FFFFFF"/>
-                </a:solidFill>
-                <a:latin typeface="Arial"/>
-              </a:rPr>
-              <a:t>SGP4</a:t>
-            </a:r>
-          </a:p>
-        </p:txBody>
-      </p:sp>
-      <p:sp>
-        <p:nvSpPr>
-          <p:cNvPr id="17423" name="Rounded Rectangle 17422"/>
-          <p:cNvSpPr/>
-          <p:nvPr/>
-        </p:nvSpPr>
-        <p:spPr>
-          <a:xfrm>
-            <a:off x="1042415" y="3675887"/>
-            <a:ext cx="402336" cy="329184"/>
-          </a:xfrm>
-          <a:prstGeom prst="roundRect">
-            <a:avLst>
-              <a:gd name="adj" fmla="val 6000"/>
-            </a:avLst>
-          </a:prstGeom>
-          <a:solidFill>
-            <a:srgbClr val="1F8A5B"/>
-          </a:solidFill>
-          <a:ln>
-            <a:noFill/>
-          </a:ln>
-          <a:effectLst/>
-        </p:spPr>
-        <p:style>
-          <a:lnRef idx="1">
-            <a:schemeClr val="accent1"/>
-          </a:lnRef>
-          <a:fillRef idx="3">
-            <a:schemeClr val="accent1"/>
-          </a:fillRef>
-          <a:effectRef idx="2">
-            <a:schemeClr val="accent1"/>
-          </a:effectRef>
-          <a:fontRef idx="minor">
-            <a:schemeClr val="lt1"/>
-          </a:fontRef>
-        </p:style>
-        <p:txBody>
-          <a:bodyPr rtlCol="0" anchor="ctr" wrap="none" lIns="109728" rIns="109728" tIns="73152" bIns="73152"/>
-          <a:lstStyle/>
-          <a:p>
-            <a:pPr algn="ctr"/>
-            <a:r>
-              <a:rPr sz="950" b="1" i="0">
-                <a:solidFill>
-                  <a:srgbClr val="FFFFFF"/>
-                </a:solidFill>
-                <a:latin typeface="Arial"/>
-              </a:rPr>
-              <a:t>NN</a:t>
-            </a:r>
-          </a:p>
-        </p:txBody>
-      </p:sp>
-      <p:sp>
-        <p:nvSpPr>
-          <p:cNvPr id="17424" name="TextBox 17423"/>
-          <p:cNvSpPr txBox="1"/>
-          <p:nvPr/>
-        </p:nvSpPr>
-        <p:spPr>
-          <a:xfrm>
-            <a:off x="1572768" y="3712463"/>
-            <a:ext cx="2093976" cy="310896"/>
-          </a:xfrm>
-          <a:prstGeom prst="rect">
-            <a:avLst/>
-          </a:prstGeom>
-          <a:noFill/>
-        </p:spPr>
-        <p:txBody>
-          <a:bodyPr wrap="square" anchor="t" lIns="0" rIns="0" tIns="0" bIns="0">
-            <a:spAutoFit/>
-          </a:bodyPr>
-          <a:lstStyle/>
-          <a:p>
-            <a:r>
-              <a:rPr sz="850" b="0" i="0">
-                <a:solidFill>
-                  <a:srgbClr val="0B2545"/>
-                </a:solidFill>
-                <a:latin typeface="Arial"/>
-              </a:rPr>
-              <a:t>real ISS TLEs · from-scratch neural verifier</a:t>
-            </a:r>
-          </a:p>
-        </p:txBody>
-      </p:sp>
-      <p:sp>
-        <p:nvSpPr>
-          <p:cNvPr id="17425" name="TextBox 17424"/>
-          <p:cNvSpPr txBox="1"/>
-          <p:nvPr/>
-        </p:nvSpPr>
-        <p:spPr>
-          <a:xfrm>
-            <a:off x="384048" y="4169663"/>
-            <a:ext cx="3017520" cy="219456"/>
-          </a:xfrm>
-          <a:prstGeom prst="rect">
-            <a:avLst/>
-          </a:prstGeom>
-          <a:noFill/>
-        </p:spPr>
-        <p:txBody>
-          <a:bodyPr wrap="square" anchor="t" lIns="0" rIns="0" tIns="0" bIns="0">
-            <a:spAutoFit/>
-          </a:bodyPr>
-          <a:lstStyle/>
-          <a:p>
-            <a:r>
-              <a:rPr sz="1000" b="1" i="0">
-                <a:solidFill>
-                  <a:srgbClr val="5A6472"/>
-                </a:solidFill>
-                <a:latin typeface="Arial"/>
-              </a:rPr>
-              <a:t>QUALITY</a:t>
-            </a:r>
-          </a:p>
-        </p:txBody>
-      </p:sp>
-      <p:sp>
-        <p:nvSpPr>
-          <p:cNvPr id="17426" name="Rounded Rectangle 17425"/>
-          <p:cNvSpPr/>
-          <p:nvPr/>
-        </p:nvSpPr>
-        <p:spPr>
-          <a:xfrm>
-            <a:off x="384048" y="4407407"/>
-            <a:ext cx="566928" cy="329184"/>
-          </a:xfrm>
-          <a:prstGeom prst="roundRect">
-            <a:avLst>
-              <a:gd name="adj" fmla="val 6000"/>
-            </a:avLst>
-          </a:prstGeom>
-          <a:solidFill>
-            <a:srgbClr val="1F8A5B"/>
-          </a:solidFill>
-          <a:ln>
-            <a:noFill/>
-          </a:ln>
-          <a:effectLst/>
-        </p:spPr>
-        <p:style>
-          <a:lnRef idx="1">
-            <a:schemeClr val="accent1"/>
-          </a:lnRef>
-          <a:fillRef idx="3">
-            <a:schemeClr val="accent1"/>
-          </a:fillRef>
-          <a:effectRef idx="2">
-            <a:schemeClr val="accent1"/>
-          </a:effectRef>
-          <a:fontRef idx="minor">
-            <a:schemeClr val="lt1"/>
-          </a:fontRef>
-        </p:style>
-        <p:txBody>
-          <a:bodyPr rtlCol="0" anchor="ctr" wrap="none" lIns="109728" rIns="109728" tIns="73152" bIns="73152"/>
-          <a:lstStyle/>
-          <a:p>
-            <a:pPr algn="ctr"/>
-            <a:r>
-              <a:rPr sz="950" b="1" i="0">
-                <a:solidFill>
-                  <a:srgbClr val="FFFFFF"/>
-                </a:solidFill>
-                <a:latin typeface="Arial"/>
-              </a:rPr>
-              <a:t>73✓</a:t>
-            </a:r>
-          </a:p>
-        </p:txBody>
-      </p:sp>
-      <p:sp>
-        <p:nvSpPr>
-          <p:cNvPr id="17427" name="Rounded Rectangle 17426"/>
-          <p:cNvSpPr/>
-          <p:nvPr/>
-        </p:nvSpPr>
-        <p:spPr>
-          <a:xfrm>
-            <a:off x="1042415" y="4407407"/>
-            <a:ext cx="402336" cy="329184"/>
-          </a:xfrm>
-          <a:prstGeom prst="roundRect">
-            <a:avLst>
-              <a:gd name="adj" fmla="val 6000"/>
-            </a:avLst>
-          </a:prstGeom>
-          <a:solidFill>
-            <a:srgbClr val="0B2545"/>
-          </a:solidFill>
-          <a:ln>
-            <a:noFill/>
-          </a:ln>
-          <a:effectLst/>
-        </p:spPr>
-        <p:style>
-          <a:lnRef idx="1">
-            <a:schemeClr val="accent1"/>
-          </a:lnRef>
-          <a:fillRef idx="3">
-            <a:schemeClr val="accent1"/>
-          </a:fillRef>
-          <a:effectRef idx="2">
-            <a:schemeClr val="accent1"/>
-          </a:effectRef>
-          <a:fontRef idx="minor">
-            <a:schemeClr val="lt1"/>
-          </a:fontRef>
-        </p:style>
-        <p:txBody>
-          <a:bodyPr rtlCol="0" anchor="ctr" wrap="none" lIns="109728" rIns="109728" tIns="73152" bIns="73152"/>
-          <a:lstStyle/>
-          <a:p>
-            <a:pPr algn="ctr"/>
-            <a:r>
-              <a:rPr sz="950" b="1" i="0">
-                <a:solidFill>
-                  <a:srgbClr val="FFFFFF"/>
-                </a:solidFill>
-                <a:latin typeface="Arial"/>
-              </a:rPr>
-              <a:t>CI</a:t>
-            </a:r>
-          </a:p>
-        </p:txBody>
-      </p:sp>
-      <p:sp>
-        <p:nvSpPr>
-          <p:cNvPr id="17428" name="TextBox 17427"/>
-          <p:cNvSpPr txBox="1"/>
-          <p:nvPr/>
-        </p:nvSpPr>
-        <p:spPr>
-          <a:xfrm>
-            <a:off x="1572768" y="4443983"/>
-            <a:ext cx="2093976" cy="310896"/>
-          </a:xfrm>
-          <a:prstGeom prst="rect">
-            <a:avLst/>
-          </a:prstGeom>
-          <a:noFill/>
-        </p:spPr>
-        <p:txBody>
-          <a:bodyPr wrap="square" anchor="t" lIns="0" rIns="0" tIns="0" bIns="0">
-            <a:spAutoFit/>
-          </a:bodyPr>
-          <a:lstStyle/>
-          <a:p>
-            <a:r>
-              <a:rPr sz="850" b="0" i="0">
-                <a:solidFill>
-                  <a:srgbClr val="0B2545"/>
-                </a:solidFill>
-                <a:latin typeface="Arial"/>
-              </a:rPr>
-              <a:t>pytest suite · GitHub Actions</a:t>
-            </a:r>
-          </a:p>
-        </p:txBody>
-      </p:sp>
-      <p:sp>
-        <p:nvSpPr>
-          <p:cNvPr id="17429" name="TextBox 17428"/>
-          <p:cNvSpPr txBox="1"/>
-          <p:nvPr/>
-        </p:nvSpPr>
-        <p:spPr>
-          <a:xfrm>
-            <a:off x="384048" y="4901183"/>
-            <a:ext cx="3017520" cy="219456"/>
-          </a:xfrm>
-          <a:prstGeom prst="rect">
-            <a:avLst/>
-          </a:prstGeom>
-          <a:noFill/>
-        </p:spPr>
-        <p:txBody>
-          <a:bodyPr wrap="square" anchor="t" lIns="0" rIns="0" tIns="0" bIns="0">
-            <a:spAutoFit/>
-          </a:bodyPr>
-          <a:lstStyle/>
-          <a:p>
-            <a:r>
-              <a:rPr sz="1000" b="1" i="0">
-                <a:solidFill>
-                  <a:srgbClr val="5A6472"/>
-                </a:solidFill>
-                <a:latin typeface="Arial"/>
-              </a:rPr>
-              <a:t>SHIPPING</a:t>
-            </a:r>
-          </a:p>
-        </p:txBody>
-      </p:sp>
-      <p:sp>
-        <p:nvSpPr>
-          <p:cNvPr id="17430" name="Rounded Rectangle 17429"/>
-          <p:cNvSpPr/>
-          <p:nvPr/>
-        </p:nvSpPr>
-        <p:spPr>
-          <a:xfrm>
-            <a:off x="384048" y="5138927"/>
-            <a:ext cx="566928" cy="329184"/>
-          </a:xfrm>
-          <a:prstGeom prst="roundRect">
-            <a:avLst>
-              <a:gd name="adj" fmla="val 6000"/>
-            </a:avLst>
-          </a:prstGeom>
-          <a:solidFill>
-            <a:srgbClr val="0B2545"/>
-          </a:solidFill>
-          <a:ln>
-            <a:noFill/>
-          </a:ln>
-          <a:effectLst/>
-        </p:spPr>
-        <p:style>
-          <a:lnRef idx="1">
-            <a:schemeClr val="accent1"/>
-          </a:lnRef>
-          <a:fillRef idx="3">
-            <a:schemeClr val="accent1"/>
-          </a:fillRef>
-          <a:effectRef idx="2">
-            <a:schemeClr val="accent1"/>
-          </a:effectRef>
-          <a:fontRef idx="minor">
-            <a:schemeClr val="lt1"/>
-          </a:fontRef>
-        </p:style>
-        <p:txBody>
-          <a:bodyPr rtlCol="0" anchor="ctr" wrap="none" lIns="109728" rIns="109728" tIns="73152" bIns="73152"/>
-          <a:lstStyle/>
-          <a:p>
-            <a:pPr algn="ctr"/>
-            <a:r>
-              <a:rPr sz="950" b="1" i="0">
-                <a:solidFill>
-                  <a:srgbClr val="FFFFFF"/>
-                </a:solidFill>
-                <a:latin typeface="Arial"/>
-              </a:rPr>
-              <a:t>EXE</a:t>
-            </a:r>
-          </a:p>
-        </p:txBody>
-      </p:sp>
-      <p:sp>
-        <p:nvSpPr>
-          <p:cNvPr id="17431" name="TextBox 17430"/>
-          <p:cNvSpPr txBox="1"/>
-          <p:nvPr/>
-        </p:nvSpPr>
-        <p:spPr>
-          <a:xfrm>
-            <a:off x="1078992" y="5175503"/>
-            <a:ext cx="2587752" cy="310896"/>
-          </a:xfrm>
-          <a:prstGeom prst="rect">
-            <a:avLst/>
-          </a:prstGeom>
-          <a:noFill/>
-        </p:spPr>
-        <p:txBody>
-          <a:bodyPr wrap="square" anchor="t" lIns="0" rIns="0" tIns="0" bIns="0">
-            <a:spAutoFit/>
-          </a:bodyPr>
-          <a:lstStyle/>
-          <a:p>
-            <a:r>
-              <a:rPr sz="850" b="0" i="0">
-                <a:solidFill>
-                  <a:srgbClr val="0B2545"/>
-                </a:solidFill>
-                <a:latin typeface="Arial"/>
-              </a:rPr>
-              <a:t>PyInstaller one-click standalone app</a:t>
-            </a:r>
-          </a:p>
-        </p:txBody>
-      </p:sp>
-      <p:sp>
-        <p:nvSpPr>
-          <p:cNvPr id="17432" name="TextBox 17431"/>
-          <p:cNvSpPr txBox="1"/>
-          <p:nvPr/>
-        </p:nvSpPr>
-        <p:spPr>
-          <a:xfrm>
-            <a:off x="384048" y="5650991"/>
-            <a:ext cx="3108960" cy="274320"/>
-          </a:xfrm>
-          <a:prstGeom prst="rect">
-            <a:avLst/>
-          </a:prstGeom>
-          <a:noFill/>
-        </p:spPr>
-        <p:txBody>
-          <a:bodyPr wrap="square" anchor="t" lIns="0" rIns="0" tIns="0" bIns="0">
-            <a:spAutoFit/>
-          </a:bodyPr>
-          <a:lstStyle/>
-          <a:p>
-            <a:r>
-              <a:rPr sz="950" b="0" i="1">
-                <a:solidFill>
-                  <a:srgbClr val="5A6472"/>
-                </a:solidFill>
-                <a:latin typeface="Arial"/>
-              </a:rPr>
-              <a:t>100% open source · zero licensing cost</a:t>
-            </a:r>
-          </a:p>
-        </p:txBody>
-      </p:sp>
-      <p:sp>
-        <p:nvSpPr>
-          <p:cNvPr id="17433" name="Rounded Rectangle 17432"/>
-          <p:cNvSpPr/>
-          <p:nvPr/>
-        </p:nvSpPr>
-        <p:spPr>
-          <a:xfrm>
-            <a:off x="3794760" y="1682496"/>
-            <a:ext cx="2304288" cy="1133856"/>
-          </a:xfrm>
-          <a:prstGeom prst="roundRect">
-            <a:avLst>
-              <a:gd name="adj" fmla="val 6000"/>
-            </a:avLst>
-          </a:prstGeom>
-          <a:solidFill>
-            <a:srgbClr val="0B2545"/>
-          </a:solidFill>
-          <a:ln>
-            <a:noFill/>
-          </a:ln>
-          <a:effectLst/>
-        </p:spPr>
-        <p:style>
-          <a:lnRef idx="1">
-            <a:schemeClr val="accent1"/>
-          </a:lnRef>
-          <a:fillRef idx="3">
-            <a:schemeClr val="accent1"/>
-          </a:fillRef>
-          <a:effectRef idx="2">
-            <a:schemeClr val="accent1"/>
-          </a:effectRef>
-          <a:fontRef idx="minor">
-            <a:schemeClr val="lt1"/>
-          </a:fontRef>
-        </p:style>
-        <p:txBody>
-          <a:bodyPr rtlCol="0" anchor="t" wrap="square" lIns="109728" rIns="109728" tIns="73152" bIns="73152"/>
-          <a:lstStyle/>
-          <a:p>
-            <a:pPr algn="ctr"/>
-            <a:r>
-              <a:rPr sz="1050" b="1" i="0">
-                <a:solidFill>
-                  <a:srgbClr val="FFFFFF"/>
-                </a:solidFill>
-                <a:latin typeface="Arial"/>
-              </a:rPr>
-              <a:t>VIRTUAL WORLD</a:t>
-            </a:r>
-          </a:p>
-          <a:p>
-            <a:pPr algn="ctr"/>
-            <a:r>
-              <a:rPr sz="800" b="0" i="0">
-                <a:solidFill>
-                  <a:srgbClr val="D5E3EC"/>
-                </a:solidFill>
-                <a:latin typeface="Arial"/>
-              </a:rPr>
-              <a:t>sky · stars · clutter · decoys</a:t>
-            </a:r>
-          </a:p>
-          <a:p>
-            <a:pPr algn="ctr"/>
-            <a:r>
-              <a:rPr sz="800" b="0" i="0">
-                <a:solidFill>
-                  <a:srgbClr val="D5E3EC"/>
-                </a:solidFill>
-                <a:latin typeface="Arial"/>
-              </a:rPr>
-              <a:t>turbulence · vibration</a:t>
-            </a:r>
-          </a:p>
-          <a:p>
-            <a:pPr algn="ctr"/>
-            <a:r>
-              <a:rPr sz="800" b="0" i="0">
-                <a:solidFill>
-                  <a:srgbClr val="D5E3EC"/>
-                </a:solidFill>
-                <a:latin typeface="Arial"/>
-              </a:rPr>
-              <a:t>LEO / UAV trajectories</a:t>
-            </a:r>
-          </a:p>
-          <a:p>
-            <a:pPr algn="ctr"/>
-            <a:r>
-              <a:rPr sz="800" b="1" i="0">
-                <a:solidFill>
-                  <a:srgbClr val="FFD97A"/>
-                </a:solidFill>
-                <a:latin typeface="Arial"/>
-              </a:rPr>
-              <a:t>→ 9.2 MPx / s of imagery</a:t>
-            </a:r>
-          </a:p>
-        </p:txBody>
-      </p:sp>
-      <p:sp>
-        <p:nvSpPr>
-          <p:cNvPr id="17434" name="Rounded Rectangle 17433"/>
-          <p:cNvSpPr/>
-          <p:nvPr/>
-        </p:nvSpPr>
-        <p:spPr>
-          <a:xfrm>
-            <a:off x="6382512" y="1682496"/>
-            <a:ext cx="2304288" cy="1133856"/>
-          </a:xfrm>
-          <a:prstGeom prst="roundRect">
-            <a:avLst>
-              <a:gd name="adj" fmla="val 6000"/>
-            </a:avLst>
-          </a:prstGeom>
-          <a:solidFill>
-            <a:srgbClr val="0E7C99"/>
-          </a:solidFill>
-          <a:ln>
-            <a:noFill/>
-          </a:ln>
-          <a:effectLst/>
-        </p:spPr>
-        <p:style>
-          <a:lnRef idx="1">
-            <a:schemeClr val="accent1"/>
-          </a:lnRef>
-          <a:fillRef idx="3">
-            <a:schemeClr val="accent1"/>
-          </a:fillRef>
-          <a:effectRef idx="2">
-            <a:schemeClr val="accent1"/>
-          </a:effectRef>
-          <a:fontRef idx="minor">
-            <a:schemeClr val="lt1"/>
-          </a:fontRef>
-        </p:style>
-        <p:txBody>
-          <a:bodyPr rtlCol="0" anchor="t" wrap="square" lIns="109728" rIns="109728" tIns="73152" bIns="73152"/>
-          <a:lstStyle/>
-          <a:p>
-            <a:pPr algn="ctr"/>
-            <a:r>
-              <a:rPr sz="1050" b="1" i="0">
-                <a:solidFill>
-                  <a:srgbClr val="FFFFFF"/>
-                </a:solidFill>
-                <a:latin typeface="Arial"/>
-              </a:rPr>
-              <a:t>VIRTUAL CAMERA</a:t>
-            </a:r>
-          </a:p>
-          <a:p>
-            <a:pPr algn="ctr"/>
-            <a:r>
-              <a:rPr sz="800" b="0" i="0">
-                <a:solidFill>
-                  <a:srgbClr val="D5E3EC"/>
-                </a:solidFill>
-                <a:latin typeface="Arial"/>
-              </a:rPr>
-              <a:t>pan-tilt gimbal model</a:t>
-            </a:r>
-          </a:p>
-          <a:p>
-            <a:pPr algn="ctr"/>
-            <a:r>
-              <a:rPr sz="800" b="0" i="0">
-                <a:solidFill>
-                  <a:srgbClr val="D5E3EC"/>
-                </a:solidFill>
-                <a:latin typeface="Arial"/>
-              </a:rPr>
-              <a:t>slew limits · 40 ms latency</a:t>
-            </a:r>
-          </a:p>
-          <a:p>
-            <a:pPr algn="ctr"/>
-            <a:r>
-              <a:rPr sz="800" b="0" i="0">
-                <a:solidFill>
-                  <a:srgbClr val="D5E3EC"/>
-                </a:solidFill>
-                <a:latin typeface="Arial"/>
-              </a:rPr>
-              <a:t>sensor noise</a:t>
-            </a:r>
-          </a:p>
-          <a:p>
-            <a:pPr algn="ctr"/>
-            <a:r>
-              <a:rPr sz="800" b="1" i="0">
-                <a:solidFill>
-                  <a:srgbClr val="FFD97A"/>
-                </a:solidFill>
-                <a:latin typeface="Arial"/>
-              </a:rPr>
-              <a:t>→ 30 frames / s</a:t>
-            </a:r>
-          </a:p>
-        </p:txBody>
-      </p:sp>
-      <p:sp>
-        <p:nvSpPr>
-          <p:cNvPr id="17435" name="Rounded Rectangle 17434"/>
-          <p:cNvSpPr/>
-          <p:nvPr/>
-        </p:nvSpPr>
-        <p:spPr>
-          <a:xfrm>
-            <a:off x="8970264" y="1682496"/>
-            <a:ext cx="2304288" cy="1133856"/>
-          </a:xfrm>
-          <a:prstGeom prst="roundRect">
-            <a:avLst>
-              <a:gd name="adj" fmla="val 6000"/>
-            </a:avLst>
-          </a:prstGeom>
-          <a:solidFill>
-            <a:srgbClr val="0E7C99"/>
-          </a:solidFill>
-          <a:ln>
-            <a:noFill/>
-          </a:ln>
-          <a:effectLst/>
-        </p:spPr>
-        <p:style>
-          <a:lnRef idx="1">
-            <a:schemeClr val="accent1"/>
-          </a:lnRef>
-          <a:fillRef idx="3">
-            <a:schemeClr val="accent1"/>
-          </a:fillRef>
-          <a:effectRef idx="2">
-            <a:schemeClr val="accent1"/>
-          </a:effectRef>
-          <a:fontRef idx="minor">
-            <a:schemeClr val="lt1"/>
-          </a:fontRef>
-        </p:style>
-        <p:txBody>
-          <a:bodyPr rtlCol="0" anchor="t" wrap="square" lIns="109728" rIns="109728" tIns="73152" bIns="73152"/>
-          <a:lstStyle/>
-          <a:p>
-            <a:pPr algn="ctr"/>
-            <a:r>
-              <a:rPr sz="1050" b="1" i="0">
-                <a:solidFill>
-                  <a:srgbClr val="FFFFFF"/>
-                </a:solidFill>
-                <a:latin typeface="Arial"/>
-              </a:rPr>
-              <a:t>PERCEPTION</a:t>
-            </a:r>
-          </a:p>
-          <a:p>
-            <a:pPr algn="ctr"/>
-            <a:r>
-              <a:rPr sz="800" b="0" i="0">
-                <a:solidFill>
-                  <a:srgbClr val="D5E3EC"/>
-                </a:solidFill>
-                <a:latin typeface="Arial"/>
-              </a:rPr>
-              <a:t>top-hat + matched filter</a:t>
-            </a:r>
-          </a:p>
-          <a:p>
-            <a:pPr algn="ctr"/>
-            <a:r>
-              <a:rPr sz="800" b="0" i="0">
-                <a:solidFill>
-                  <a:srgbClr val="D5E3EC"/>
-                </a:solidFill>
-                <a:latin typeface="Arial"/>
-              </a:rPr>
-              <a:t>CFAR · sub-pixel centroid</a:t>
-            </a:r>
-          </a:p>
-          <a:p>
-            <a:pPr algn="ctr"/>
-            <a:r>
-              <a:rPr sz="800" b="0" i="0">
-                <a:solidFill>
-                  <a:srgbClr val="D5E3EC"/>
-                </a:solidFill>
-                <a:latin typeface="Arial"/>
-              </a:rPr>
-              <a:t>AI verifier (own NN)</a:t>
-            </a:r>
-          </a:p>
-          <a:p>
-            <a:pPr algn="ctr"/>
-            <a:r>
-              <a:rPr sz="800" b="1" i="0">
-                <a:solidFill>
-                  <a:srgbClr val="FFD97A"/>
-                </a:solidFill>
-                <a:latin typeface="Arial"/>
-              </a:rPr>
-              <a:t>→ ≈6 candidates / frame</a:t>
-            </a:r>
-          </a:p>
-        </p:txBody>
-      </p:sp>
-      <p:sp>
-        <p:nvSpPr>
-          <p:cNvPr id="17436" name="Rounded Rectangle 17435"/>
-          <p:cNvSpPr/>
-          <p:nvPr/>
-        </p:nvSpPr>
-        <p:spPr>
-          <a:xfrm>
-            <a:off x="8970264" y="3255264"/>
-            <a:ext cx="2304288" cy="1133856"/>
-          </a:xfrm>
-          <a:prstGeom prst="roundRect">
-            <a:avLst>
-              <a:gd name="adj" fmla="val 6000"/>
-            </a:avLst>
-          </a:prstGeom>
-          <a:solidFill>
-            <a:srgbClr val="1F8A5B"/>
-          </a:solidFill>
-          <a:ln>
-            <a:noFill/>
-          </a:ln>
-          <a:effectLst/>
-        </p:spPr>
-        <p:style>
-          <a:lnRef idx="1">
-            <a:schemeClr val="accent1"/>
-          </a:lnRef>
-          <a:fillRef idx="3">
-            <a:schemeClr val="accent1"/>
-          </a:fillRef>
-          <a:effectRef idx="2">
-            <a:schemeClr val="accent1"/>
-          </a:effectRef>
-          <a:fontRef idx="minor">
-            <a:schemeClr val="lt1"/>
-          </a:fontRef>
-        </p:style>
-        <p:txBody>
-          <a:bodyPr rtlCol="0" anchor="t" wrap="square" lIns="109728" rIns="109728" tIns="73152" bIns="73152"/>
-          <a:lstStyle/>
-          <a:p>
-            <a:pPr algn="ctr"/>
-            <a:r>
-              <a:rPr sz="1050" b="1" i="0">
-                <a:solidFill>
-                  <a:srgbClr val="FFFFFF"/>
-                </a:solidFill>
-                <a:latin typeface="Arial"/>
-              </a:rPr>
-              <a:t>DECISION</a:t>
-            </a:r>
-          </a:p>
-          <a:p>
-            <a:pPr algn="ctr"/>
-            <a:r>
-              <a:rPr sz="800" b="0" i="0">
-                <a:solidFill>
-                  <a:srgbClr val="D5E3EC"/>
-                </a:solidFill>
-                <a:latin typeface="Arial"/>
-              </a:rPr>
-              <a:t>multi-target tracker</a:t>
-            </a:r>
-          </a:p>
-          <a:p>
-            <a:pPr algn="ctr"/>
-            <a:r>
-              <a:rPr sz="800" b="0" i="0">
-                <a:solidFill>
-                  <a:srgbClr val="D5E3EC"/>
-                </a:solidFill>
-                <a:latin typeface="Arial"/>
-              </a:rPr>
-              <a:t>blink-signature hard gate</a:t>
-            </a:r>
-          </a:p>
-          <a:p>
-            <a:pPr algn="ctr"/>
-            <a:r>
-              <a:rPr sz="800" b="0" i="0">
-                <a:solidFill>
-                  <a:srgbClr val="D5E3EC"/>
-                </a:solidFill>
-                <a:latin typeface="Arial"/>
-              </a:rPr>
-              <a:t>IMM Kalman estimate</a:t>
-            </a:r>
-          </a:p>
-          <a:p>
-            <a:pPr algn="ctr"/>
-            <a:r>
-              <a:rPr sz="800" b="1" i="0">
-                <a:solidFill>
-                  <a:srgbClr val="FFD97A"/>
-                </a:solidFill>
-                <a:latin typeface="Arial"/>
-              </a:rPr>
-              <a:t>→ 1 confirmed beacon</a:t>
-            </a:r>
-          </a:p>
-        </p:txBody>
-      </p:sp>
-      <p:sp>
-        <p:nvSpPr>
-          <p:cNvPr id="17437" name="Rounded Rectangle 17436"/>
-          <p:cNvSpPr/>
-          <p:nvPr/>
-        </p:nvSpPr>
-        <p:spPr>
-          <a:xfrm>
-            <a:off x="6382512" y="3255264"/>
-            <a:ext cx="2304288" cy="1133856"/>
-          </a:xfrm>
-          <a:prstGeom prst="roundRect">
-            <a:avLst>
-              <a:gd name="adj" fmla="val 6000"/>
-            </a:avLst>
-          </a:prstGeom>
-          <a:solidFill>
-            <a:srgbClr val="1F8A5B"/>
-          </a:solidFill>
-          <a:ln>
-            <a:noFill/>
-          </a:ln>
-          <a:effectLst/>
-        </p:spPr>
-        <p:style>
-          <a:lnRef idx="1">
-            <a:schemeClr val="accent1"/>
-          </a:lnRef>
-          <a:fillRef idx="3">
-            <a:schemeClr val="accent1"/>
-          </a:fillRef>
-          <a:effectRef idx="2">
-            <a:schemeClr val="accent1"/>
-          </a:effectRef>
-          <a:fontRef idx="minor">
-            <a:schemeClr val="lt1"/>
-          </a:fontRef>
-        </p:style>
-        <p:txBody>
-          <a:bodyPr rtlCol="0" anchor="t" wrap="square" lIns="109728" rIns="109728" tIns="73152" bIns="73152"/>
-          <a:lstStyle/>
-          <a:p>
-            <a:pPr algn="ctr"/>
-            <a:r>
-              <a:rPr sz="1050" b="1" i="0">
-                <a:solidFill>
-                  <a:srgbClr val="FFFFFF"/>
-                </a:solidFill>
-                <a:latin typeface="Arial"/>
-              </a:rPr>
-              <a:t>CONTROL</a:t>
-            </a:r>
-          </a:p>
-          <a:p>
-            <a:pPr algn="ctr"/>
-            <a:r>
-              <a:rPr sz="800" b="0" i="0">
-                <a:solidFill>
-                  <a:srgbClr val="D5E3EC"/>
-                </a:solidFill>
-                <a:latin typeface="Arial"/>
-              </a:rPr>
-              <a:t>Smith predictor</a:t>
-            </a:r>
-          </a:p>
-          <a:p>
-            <a:pPr algn="ctr"/>
-            <a:r>
-              <a:rPr sz="800" b="0" i="0">
-                <a:solidFill>
-                  <a:srgbClr val="D5E3EC"/>
-                </a:solidFill>
-                <a:latin typeface="Arial"/>
-              </a:rPr>
-              <a:t>velocity feed-forward</a:t>
-            </a:r>
-          </a:p>
-          <a:p>
-            <a:pPr algn="ctr"/>
-            <a:r>
-              <a:rPr sz="800" b="0" i="0">
-                <a:solidFill>
-                  <a:srgbClr val="D5E3EC"/>
-                </a:solidFill>
-                <a:latin typeface="Arial"/>
-              </a:rPr>
-              <a:t>spiral search states</a:t>
-            </a:r>
-          </a:p>
-          <a:p>
-            <a:pPr algn="ctr"/>
-            <a:r>
-              <a:rPr sz="800" b="1" i="0">
-                <a:solidFill>
-                  <a:srgbClr val="FFD97A"/>
-                </a:solidFill>
-                <a:latin typeface="Arial"/>
-              </a:rPr>
-              <a:t>→ 30 commands / s</a:t>
-            </a:r>
-          </a:p>
-        </p:txBody>
-      </p:sp>
-      <p:sp>
-        <p:nvSpPr>
-          <p:cNvPr id="17438" name="Rounded Rectangle 17437"/>
-          <p:cNvSpPr/>
-          <p:nvPr/>
-        </p:nvSpPr>
-        <p:spPr>
-          <a:xfrm>
-            <a:off x="3794760" y="3255264"/>
-            <a:ext cx="2304288" cy="1133856"/>
-          </a:xfrm>
-          <a:prstGeom prst="roundRect">
-            <a:avLst>
-              <a:gd name="adj" fmla="val 6000"/>
-            </a:avLst>
-          </a:prstGeom>
-          <a:solidFill>
-            <a:srgbClr val="0B2545"/>
-          </a:solidFill>
-          <a:ln>
-            <a:noFill/>
-          </a:ln>
-          <a:effectLst/>
-        </p:spPr>
-        <p:style>
-          <a:lnRef idx="1">
-            <a:schemeClr val="accent1"/>
-          </a:lnRef>
-          <a:fillRef idx="3">
-            <a:schemeClr val="accent1"/>
-          </a:fillRef>
-          <a:effectRef idx="2">
-            <a:schemeClr val="accent1"/>
-          </a:effectRef>
-          <a:fontRef idx="minor">
-            <a:schemeClr val="lt1"/>
-          </a:fontRef>
-        </p:style>
-        <p:txBody>
-          <a:bodyPr rtlCol="0" anchor="t" wrap="square" lIns="109728" rIns="109728" tIns="73152" bIns="73152"/>
-          <a:lstStyle/>
-          <a:p>
-            <a:pPr algn="ctr"/>
-            <a:r>
-              <a:rPr sz="1050" b="1" i="0">
-                <a:solidFill>
-                  <a:srgbClr val="FFFFFF"/>
-                </a:solidFill>
-                <a:latin typeface="Arial"/>
-              </a:rPr>
-              <a:t>OPERATOR OUTPUTS</a:t>
-            </a:r>
-          </a:p>
-          <a:p>
-            <a:pPr algn="ctr"/>
-            <a:r>
-              <a:rPr sz="800" b="0" i="0">
-                <a:solidFill>
-                  <a:srgbClr val="D5E3EC"/>
-                </a:solidFill>
-                <a:latin typeface="Arial"/>
-              </a:rPr>
-              <a:t>live GUI console</a:t>
-            </a:r>
-          </a:p>
-          <a:p>
-            <a:pPr algn="ctr"/>
-            <a:r>
-              <a:rPr sz="800" b="0" i="0">
-                <a:solidFill>
-                  <a:srgbClr val="D5E3EC"/>
-                </a:solidFill>
-                <a:latin typeface="Arial"/>
-              </a:rPr>
-              <a:t>auto performance report</a:t>
-            </a:r>
-          </a:p>
-          <a:p>
-            <a:pPr algn="ctr"/>
-            <a:r>
-              <a:rPr sz="800" b="0" i="0">
-                <a:solidFill>
-                  <a:srgbClr val="D5E3EC"/>
-                </a:solidFill>
-                <a:latin typeface="Arial"/>
-              </a:rPr>
-              <a:t>demo video export</a:t>
-            </a:r>
-          </a:p>
-          <a:p>
-            <a:pPr algn="ctr"/>
-            <a:r>
-              <a:rPr sz="800" b="1" i="0">
-                <a:solidFill>
-                  <a:srgbClr val="FFD97A"/>
-                </a:solidFill>
-                <a:latin typeface="Arial"/>
-              </a:rPr>
-              <a:t>→ for judges &amp; operators</a:t>
-            </a:r>
-          </a:p>
-        </p:txBody>
-      </p:sp>
-      <p:sp>
-        <p:nvSpPr>
-          <p:cNvPr id="17439" name="Right Arrow 17438"/>
-          <p:cNvSpPr/>
-          <p:nvPr/>
-        </p:nvSpPr>
-        <p:spPr>
-          <a:xfrm>
-            <a:off x="6080760" y="2176272"/>
-            <a:ext cx="338328" cy="146304"/>
-          </a:xfrm>
-          <a:prstGeom prst="rightArrow">
-            <a:avLst/>
-          </a:prstGeom>
-          <a:solidFill>
-            <a:srgbClr val="5A6472"/>
-          </a:solidFill>
-          <a:ln>
-            <a:noFill/>
-          </a:ln>
-          <a:effectLst/>
-        </p:spPr>
-        <p:style>
-          <a:lnRef idx="1">
-            <a:schemeClr val="accent1"/>
-          </a:lnRef>
-          <a:fillRef idx="3">
-            <a:schemeClr val="accent1"/>
-          </a:fillRef>
-          <a:effectRef idx="2">
-            <a:schemeClr val="accent1"/>
-          </a:effectRef>
-          <a:fontRef idx="minor">
-            <a:schemeClr val="lt1"/>
-          </a:fontRef>
-        </p:style>
-        <p:txBody>
-          <a:bodyPr rtlCol="0" anchor="ctr"/>
-          <a:lstStyle/>
-          <a:p>
-            <a:pPr algn="ctr"/>
-          </a:p>
-        </p:txBody>
-      </p:sp>
-      <p:sp>
-        <p:nvSpPr>
-          <p:cNvPr id="17440" name="Right Arrow 17439"/>
-          <p:cNvSpPr/>
-          <p:nvPr/>
-        </p:nvSpPr>
-        <p:spPr>
-          <a:xfrm>
-            <a:off x="8668512" y="2176272"/>
-            <a:ext cx="338328" cy="146304"/>
-          </a:xfrm>
-          <a:prstGeom prst="rightArrow">
-            <a:avLst/>
-          </a:prstGeom>
-          <a:solidFill>
-            <a:srgbClr val="5A6472"/>
-          </a:solidFill>
-          <a:ln>
-            <a:noFill/>
-          </a:ln>
-          <a:effectLst/>
-        </p:spPr>
-        <p:style>
-          <a:lnRef idx="1">
-            <a:schemeClr val="accent1"/>
-          </a:lnRef>
-          <a:fillRef idx="3">
-            <a:schemeClr val="accent1"/>
-          </a:fillRef>
-          <a:effectRef idx="2">
-            <a:schemeClr val="accent1"/>
-          </a:effectRef>
-          <a:fontRef idx="minor">
-            <a:schemeClr val="lt1"/>
-          </a:fontRef>
-        </p:style>
-        <p:txBody>
-          <a:bodyPr rtlCol="0" anchor="ctr"/>
-          <a:lstStyle/>
-          <a:p>
-            <a:pPr algn="ctr"/>
-          </a:p>
-        </p:txBody>
-      </p:sp>
-      <p:sp>
-        <p:nvSpPr>
-          <p:cNvPr id="17441" name="Down Arrow 17440"/>
-          <p:cNvSpPr/>
-          <p:nvPr/>
-        </p:nvSpPr>
-        <p:spPr>
-          <a:xfrm>
-            <a:off x="10049256" y="2834640"/>
-            <a:ext cx="146304" cy="402336"/>
-          </a:xfrm>
-          <a:prstGeom prst="downArrow">
-            <a:avLst/>
-          </a:prstGeom>
-          <a:solidFill>
-            <a:srgbClr val="5A6472"/>
-          </a:solidFill>
-          <a:ln>
-            <a:noFill/>
-          </a:ln>
-          <a:effectLst/>
-        </p:spPr>
-        <p:style>
-          <a:lnRef idx="1">
-            <a:schemeClr val="accent1"/>
-          </a:lnRef>
-          <a:fillRef idx="3">
-            <a:schemeClr val="accent1"/>
-          </a:fillRef>
-          <a:effectRef idx="2">
-            <a:schemeClr val="accent1"/>
-          </a:effectRef>
-          <a:fontRef idx="minor">
-            <a:schemeClr val="lt1"/>
-          </a:fontRef>
-        </p:style>
-        <p:txBody>
-          <a:bodyPr rtlCol="0" anchor="ctr"/>
-          <a:lstStyle/>
-          <a:p>
-            <a:pPr algn="ctr"/>
-          </a:p>
-        </p:txBody>
-      </p:sp>
-      <p:sp>
-        <p:nvSpPr>
-          <p:cNvPr id="17442" name="Left Arrow 17441"/>
-          <p:cNvSpPr/>
-          <p:nvPr/>
-        </p:nvSpPr>
-        <p:spPr>
-          <a:xfrm>
-            <a:off x="8668512" y="3749039"/>
-            <a:ext cx="338328" cy="146304"/>
-          </a:xfrm>
-          <a:prstGeom prst="leftArrow">
-            <a:avLst/>
-          </a:prstGeom>
-          <a:solidFill>
-            <a:srgbClr val="5A6472"/>
-          </a:solidFill>
-          <a:ln>
-            <a:noFill/>
-          </a:ln>
-          <a:effectLst/>
-        </p:spPr>
-        <p:style>
-          <a:lnRef idx="1">
-            <a:schemeClr val="accent1"/>
-          </a:lnRef>
-          <a:fillRef idx="3">
-            <a:schemeClr val="accent1"/>
-          </a:fillRef>
-          <a:effectRef idx="2">
-            <a:schemeClr val="accent1"/>
-          </a:effectRef>
-          <a:fontRef idx="minor">
-            <a:schemeClr val="lt1"/>
-          </a:fontRef>
-        </p:style>
-        <p:txBody>
-          <a:bodyPr rtlCol="0" anchor="ctr"/>
-          <a:lstStyle/>
-          <a:p>
-            <a:pPr algn="ctr"/>
-          </a:p>
-        </p:txBody>
-      </p:sp>
-      <p:sp>
-        <p:nvSpPr>
-          <p:cNvPr id="17443" name="Left Arrow 17442"/>
-          <p:cNvSpPr/>
-          <p:nvPr/>
-        </p:nvSpPr>
-        <p:spPr>
-          <a:xfrm>
-            <a:off x="6080760" y="3749039"/>
-            <a:ext cx="338328" cy="146304"/>
-          </a:xfrm>
-          <a:prstGeom prst="leftArrow">
-            <a:avLst/>
-          </a:prstGeom>
-          <a:solidFill>
-            <a:srgbClr val="5A6472"/>
-          </a:solidFill>
-          <a:ln>
-            <a:noFill/>
-          </a:ln>
-          <a:effectLst/>
-        </p:spPr>
-        <p:style>
-          <a:lnRef idx="1">
-            <a:schemeClr val="accent1"/>
-          </a:lnRef>
-          <a:fillRef idx="3">
-            <a:schemeClr val="accent1"/>
-          </a:fillRef>
-          <a:effectRef idx="2">
-            <a:schemeClr val="accent1"/>
-          </a:effectRef>
-          <a:fontRef idx="minor">
-            <a:schemeClr val="lt1"/>
-          </a:fontRef>
-        </p:style>
-        <p:txBody>
-          <a:bodyPr rtlCol="0" anchor="ctr"/>
-          <a:lstStyle/>
-          <a:p>
-            <a:pPr algn="ctr"/>
-          </a:p>
-        </p:txBody>
-      </p:sp>
-      <p:sp>
-        <p:nvSpPr>
-          <p:cNvPr id="17444" name="Up Arrow 17443"/>
-          <p:cNvSpPr/>
-          <p:nvPr/>
-        </p:nvSpPr>
-        <p:spPr>
-          <a:xfrm>
-            <a:off x="7461504" y="2834640"/>
-            <a:ext cx="146304" cy="411479"/>
-          </a:xfrm>
-          <a:prstGeom prst="upArrow">
-            <a:avLst/>
-          </a:prstGeom>
-          <a:solidFill>
-            <a:srgbClr val="1F8A5B"/>
-          </a:solidFill>
-          <a:ln>
-            <a:noFill/>
-          </a:ln>
-          <a:effectLst/>
-        </p:spPr>
-        <p:style>
-          <a:lnRef idx="1">
-            <a:schemeClr val="accent1"/>
-          </a:lnRef>
-          <a:fillRef idx="3">
-            <a:schemeClr val="accent1"/>
-          </a:fillRef>
-          <a:effectRef idx="2">
-            <a:schemeClr val="accent1"/>
-          </a:effectRef>
-          <a:fontRef idx="minor">
-            <a:schemeClr val="lt1"/>
-          </a:fontRef>
-        </p:style>
-        <p:txBody>
-          <a:bodyPr rtlCol="0" anchor="ctr"/>
-          <a:lstStyle/>
-          <a:p>
-            <a:pPr algn="ctr"/>
-          </a:p>
-        </p:txBody>
-      </p:sp>
-      <p:sp>
-        <p:nvSpPr>
-          <p:cNvPr id="17445" name="TextBox 17444"/>
-          <p:cNvSpPr txBox="1"/>
-          <p:nvPr/>
-        </p:nvSpPr>
-        <p:spPr>
-          <a:xfrm>
-            <a:off x="7680960" y="2871216"/>
-            <a:ext cx="1737360" cy="329184"/>
-          </a:xfrm>
-          <a:prstGeom prst="rect">
-            <a:avLst/>
-          </a:prstGeom>
-          <a:noFill/>
-        </p:spPr>
-        <p:txBody>
-          <a:bodyPr wrap="square" anchor="t" lIns="0" rIns="0" tIns="0" bIns="0">
-            <a:spAutoFit/>
-          </a:bodyPr>
-          <a:lstStyle/>
-          <a:p>
-            <a:r>
-              <a:rPr sz="800" b="1" i="0">
-                <a:solidFill>
-                  <a:srgbClr val="1F8A5B"/>
-                </a:solidFill>
-                <a:latin typeface="Arial"/>
-              </a:rPr>
-              <a:t>closed loop: 30 pointing commands / s</a:t>
-            </a:r>
-          </a:p>
-        </p:txBody>
-      </p:sp>
       <p:pic>
         <p:nvPicPr>
-          <p:cNvPr id="17446" name="Picture 17445" descr="side_label.png"/>
+          <p:cNvPr id="17411" name="Picture 17410" descr="pipeline_poster.png"/>
           <p:cNvPicPr>
             <a:picLocks noChangeAspect="1"/>
           </p:cNvPicPr>
@@ -9255,547 +7252,14 @@
         </p:blipFill>
         <p:spPr>
           <a:xfrm>
-            <a:off x="11448288" y="1737360"/>
-            <a:ext cx="178760" cy="4160520"/>
+            <a:off x="320040" y="1554480"/>
+            <a:ext cx="11548872" cy="4691729"/>
           </a:xfrm>
           <a:prstGeom prst="rect">
             <a:avLst/>
           </a:prstGeom>
         </p:spPr>
       </p:pic>
-      <p:sp>
-        <p:nvSpPr>
-          <p:cNvPr id="17447" name="TextBox 17446"/>
-          <p:cNvSpPr txBox="1"/>
-          <p:nvPr/>
-        </p:nvSpPr>
-        <p:spPr>
-          <a:xfrm>
-            <a:off x="3794760" y="4626864"/>
-            <a:ext cx="2926080" cy="237744"/>
-          </a:xfrm>
-          <a:prstGeom prst="rect">
-            <a:avLst/>
-          </a:prstGeom>
-          <a:noFill/>
-        </p:spPr>
-        <p:txBody>
-          <a:bodyPr wrap="square" anchor="t" lIns="0" rIns="0" tIns="0" bIns="0">
-            <a:spAutoFit/>
-          </a:bodyPr>
-          <a:lstStyle/>
-          <a:p>
-            <a:r>
-              <a:rPr sz="1050" b="1" i="0">
-                <a:solidFill>
-                  <a:srgbClr val="0B2545"/>
-                </a:solidFill>
-                <a:latin typeface="Arial"/>
-              </a:rPr>
-              <a:t>Acquisition state machine</a:t>
-            </a:r>
-          </a:p>
-        </p:txBody>
-      </p:sp>
-      <p:sp>
-        <p:nvSpPr>
-          <p:cNvPr id="17448" name="Rounded Rectangle 17447"/>
-          <p:cNvSpPr/>
-          <p:nvPr/>
-        </p:nvSpPr>
-        <p:spPr>
-          <a:xfrm>
-            <a:off x="3794760" y="4882896"/>
-            <a:ext cx="1298448" cy="384048"/>
-          </a:xfrm>
-          <a:prstGeom prst="roundRect">
-            <a:avLst>
-              <a:gd name="adj" fmla="val 6000"/>
-            </a:avLst>
-          </a:prstGeom>
-          <a:solidFill>
-            <a:srgbClr val="0B2545"/>
-          </a:solidFill>
-          <a:ln>
-            <a:noFill/>
-          </a:ln>
-          <a:effectLst/>
-        </p:spPr>
-        <p:style>
-          <a:lnRef idx="1">
-            <a:schemeClr val="accent1"/>
-          </a:lnRef>
-          <a:fillRef idx="3">
-            <a:schemeClr val="accent1"/>
-          </a:fillRef>
-          <a:effectRef idx="2">
-            <a:schemeClr val="accent1"/>
-          </a:effectRef>
-          <a:fontRef idx="minor">
-            <a:schemeClr val="lt1"/>
-          </a:fontRef>
-        </p:style>
-        <p:txBody>
-          <a:bodyPr rtlCol="0" anchor="ctr" wrap="square" lIns="109728" rIns="109728" tIns="73152" bIns="73152"/>
-          <a:lstStyle/>
-          <a:p>
-            <a:pPr algn="ctr"/>
-            <a:r>
-              <a:rPr sz="950" b="1" i="0">
-                <a:solidFill>
-                  <a:srgbClr val="FFFFFF"/>
-                </a:solidFill>
-                <a:latin typeface="Arial"/>
-              </a:rPr>
-              <a:t>SEARCH</a:t>
-            </a:r>
-          </a:p>
-        </p:txBody>
-      </p:sp>
-      <p:sp>
-        <p:nvSpPr>
-          <p:cNvPr id="17449" name="Right Arrow 17448"/>
-          <p:cNvSpPr/>
-          <p:nvPr/>
-        </p:nvSpPr>
-        <p:spPr>
-          <a:xfrm>
-            <a:off x="5093208" y="5010912"/>
-            <a:ext cx="146304" cy="128016"/>
-          </a:xfrm>
-          <a:prstGeom prst="rightArrow">
-            <a:avLst/>
-          </a:prstGeom>
-          <a:solidFill>
-            <a:srgbClr val="5A6472"/>
-          </a:solidFill>
-          <a:ln>
-            <a:noFill/>
-          </a:ln>
-          <a:effectLst/>
-        </p:spPr>
-        <p:style>
-          <a:lnRef idx="1">
-            <a:schemeClr val="accent1"/>
-          </a:lnRef>
-          <a:fillRef idx="3">
-            <a:schemeClr val="accent1"/>
-          </a:fillRef>
-          <a:effectRef idx="2">
-            <a:schemeClr val="accent1"/>
-          </a:effectRef>
-          <a:fontRef idx="minor">
-            <a:schemeClr val="lt1"/>
-          </a:fontRef>
-        </p:style>
-        <p:txBody>
-          <a:bodyPr rtlCol="0" anchor="ctr"/>
-          <a:lstStyle/>
-          <a:p>
-            <a:pPr algn="ctr"/>
-          </a:p>
-        </p:txBody>
-      </p:sp>
-      <p:sp>
-        <p:nvSpPr>
-          <p:cNvPr id="17450" name="Rounded Rectangle 17449"/>
-          <p:cNvSpPr/>
-          <p:nvPr/>
-        </p:nvSpPr>
-        <p:spPr>
-          <a:xfrm>
-            <a:off x="5257800" y="4882896"/>
-            <a:ext cx="1298448" cy="384048"/>
-          </a:xfrm>
-          <a:prstGeom prst="roundRect">
-            <a:avLst>
-              <a:gd name="adj" fmla="val 6000"/>
-            </a:avLst>
-          </a:prstGeom>
-          <a:solidFill>
-            <a:srgbClr val="B06A00"/>
-          </a:solidFill>
-          <a:ln>
-            <a:noFill/>
-          </a:ln>
-          <a:effectLst/>
-        </p:spPr>
-        <p:style>
-          <a:lnRef idx="1">
-            <a:schemeClr val="accent1"/>
-          </a:lnRef>
-          <a:fillRef idx="3">
-            <a:schemeClr val="accent1"/>
-          </a:fillRef>
-          <a:effectRef idx="2">
-            <a:schemeClr val="accent1"/>
-          </a:effectRef>
-          <a:fontRef idx="minor">
-            <a:schemeClr val="lt1"/>
-          </a:fontRef>
-        </p:style>
-        <p:txBody>
-          <a:bodyPr rtlCol="0" anchor="ctr" wrap="square" lIns="109728" rIns="109728" tIns="73152" bIns="73152"/>
-          <a:lstStyle/>
-          <a:p>
-            <a:pPr algn="ctr"/>
-            <a:r>
-              <a:rPr sz="950" b="1" i="0">
-                <a:solidFill>
-                  <a:srgbClr val="FFFFFF"/>
-                </a:solidFill>
-                <a:latin typeface="Arial"/>
-              </a:rPr>
-              <a:t>ACQUIRE</a:t>
-            </a:r>
-          </a:p>
-        </p:txBody>
-      </p:sp>
-      <p:sp>
-        <p:nvSpPr>
-          <p:cNvPr id="17451" name="Right Arrow 17450"/>
-          <p:cNvSpPr/>
-          <p:nvPr/>
-        </p:nvSpPr>
-        <p:spPr>
-          <a:xfrm>
-            <a:off x="6556248" y="5010912"/>
-            <a:ext cx="146304" cy="128016"/>
-          </a:xfrm>
-          <a:prstGeom prst="rightArrow">
-            <a:avLst/>
-          </a:prstGeom>
-          <a:solidFill>
-            <a:srgbClr val="5A6472"/>
-          </a:solidFill>
-          <a:ln>
-            <a:noFill/>
-          </a:ln>
-          <a:effectLst/>
-        </p:spPr>
-        <p:style>
-          <a:lnRef idx="1">
-            <a:schemeClr val="accent1"/>
-          </a:lnRef>
-          <a:fillRef idx="3">
-            <a:schemeClr val="accent1"/>
-          </a:fillRef>
-          <a:effectRef idx="2">
-            <a:schemeClr val="accent1"/>
-          </a:effectRef>
-          <a:fontRef idx="minor">
-            <a:schemeClr val="lt1"/>
-          </a:fontRef>
-        </p:style>
-        <p:txBody>
-          <a:bodyPr rtlCol="0" anchor="ctr"/>
-          <a:lstStyle/>
-          <a:p>
-            <a:pPr algn="ctr"/>
-          </a:p>
-        </p:txBody>
-      </p:sp>
-      <p:sp>
-        <p:nvSpPr>
-          <p:cNvPr id="17452" name="Rounded Rectangle 17451"/>
-          <p:cNvSpPr/>
-          <p:nvPr/>
-        </p:nvSpPr>
-        <p:spPr>
-          <a:xfrm>
-            <a:off x="6720840" y="4882896"/>
-            <a:ext cx="1298448" cy="384048"/>
-          </a:xfrm>
-          <a:prstGeom prst="roundRect">
-            <a:avLst>
-              <a:gd name="adj" fmla="val 6000"/>
-            </a:avLst>
-          </a:prstGeom>
-          <a:solidFill>
-            <a:srgbClr val="1F8A5B"/>
-          </a:solidFill>
-          <a:ln>
-            <a:noFill/>
-          </a:ln>
-          <a:effectLst/>
-        </p:spPr>
-        <p:style>
-          <a:lnRef idx="1">
-            <a:schemeClr val="accent1"/>
-          </a:lnRef>
-          <a:fillRef idx="3">
-            <a:schemeClr val="accent1"/>
-          </a:fillRef>
-          <a:effectRef idx="2">
-            <a:schemeClr val="accent1"/>
-          </a:effectRef>
-          <a:fontRef idx="minor">
-            <a:schemeClr val="lt1"/>
-          </a:fontRef>
-        </p:style>
-        <p:txBody>
-          <a:bodyPr rtlCol="0" anchor="ctr" wrap="square" lIns="109728" rIns="109728" tIns="73152" bIns="73152"/>
-          <a:lstStyle/>
-          <a:p>
-            <a:pPr algn="ctr"/>
-            <a:r>
-              <a:rPr sz="950" b="1" i="0">
-                <a:solidFill>
-                  <a:srgbClr val="FFFFFF"/>
-                </a:solidFill>
-                <a:latin typeface="Arial"/>
-              </a:rPr>
-              <a:t>TRACK</a:t>
-            </a:r>
-          </a:p>
-        </p:txBody>
-      </p:sp>
-      <p:sp>
-        <p:nvSpPr>
-          <p:cNvPr id="17453" name="Right Arrow 17452"/>
-          <p:cNvSpPr/>
-          <p:nvPr/>
-        </p:nvSpPr>
-        <p:spPr>
-          <a:xfrm>
-            <a:off x="8019288" y="5010912"/>
-            <a:ext cx="146304" cy="128016"/>
-          </a:xfrm>
-          <a:prstGeom prst="rightArrow">
-            <a:avLst/>
-          </a:prstGeom>
-          <a:solidFill>
-            <a:srgbClr val="5A6472"/>
-          </a:solidFill>
-          <a:ln>
-            <a:noFill/>
-          </a:ln>
-          <a:effectLst/>
-        </p:spPr>
-        <p:style>
-          <a:lnRef idx="1">
-            <a:schemeClr val="accent1"/>
-          </a:lnRef>
-          <a:fillRef idx="3">
-            <a:schemeClr val="accent1"/>
-          </a:fillRef>
-          <a:effectRef idx="2">
-            <a:schemeClr val="accent1"/>
-          </a:effectRef>
-          <a:fontRef idx="minor">
-            <a:schemeClr val="lt1"/>
-          </a:fontRef>
-        </p:style>
-        <p:txBody>
-          <a:bodyPr rtlCol="0" anchor="ctr"/>
-          <a:lstStyle/>
-          <a:p>
-            <a:pPr algn="ctr"/>
-          </a:p>
-        </p:txBody>
-      </p:sp>
-      <p:sp>
-        <p:nvSpPr>
-          <p:cNvPr id="17454" name="Rounded Rectangle 17453"/>
-          <p:cNvSpPr/>
-          <p:nvPr/>
-        </p:nvSpPr>
-        <p:spPr>
-          <a:xfrm>
-            <a:off x="8183879" y="4882896"/>
-            <a:ext cx="1298448" cy="384048"/>
-          </a:xfrm>
-          <a:prstGeom prst="roundRect">
-            <a:avLst>
-              <a:gd name="adj" fmla="val 6000"/>
-            </a:avLst>
-          </a:prstGeom>
-          <a:solidFill>
-            <a:srgbClr val="B06A00"/>
-          </a:solidFill>
-          <a:ln>
-            <a:noFill/>
-          </a:ln>
-          <a:effectLst/>
-        </p:spPr>
-        <p:style>
-          <a:lnRef idx="1">
-            <a:schemeClr val="accent1"/>
-          </a:lnRef>
-          <a:fillRef idx="3">
-            <a:schemeClr val="accent1"/>
-          </a:fillRef>
-          <a:effectRef idx="2">
-            <a:schemeClr val="accent1"/>
-          </a:effectRef>
-          <a:fontRef idx="minor">
-            <a:schemeClr val="lt1"/>
-          </a:fontRef>
-        </p:style>
-        <p:txBody>
-          <a:bodyPr rtlCol="0" anchor="ctr" wrap="square" lIns="109728" rIns="109728" tIns="73152" bIns="73152"/>
-          <a:lstStyle/>
-          <a:p>
-            <a:pPr algn="ctr"/>
-            <a:r>
-              <a:rPr sz="950" b="1" i="0">
-                <a:solidFill>
-                  <a:srgbClr val="FFFFFF"/>
-                </a:solidFill>
-                <a:latin typeface="Arial"/>
-              </a:rPr>
-              <a:t>COAST</a:t>
-            </a:r>
-          </a:p>
-        </p:txBody>
-      </p:sp>
-      <p:sp>
-        <p:nvSpPr>
-          <p:cNvPr id="17455" name="Right Arrow 17454"/>
-          <p:cNvSpPr/>
-          <p:nvPr/>
-        </p:nvSpPr>
-        <p:spPr>
-          <a:xfrm>
-            <a:off x="9482328" y="5010912"/>
-            <a:ext cx="146304" cy="128016"/>
-          </a:xfrm>
-          <a:prstGeom prst="rightArrow">
-            <a:avLst/>
-          </a:prstGeom>
-          <a:solidFill>
-            <a:srgbClr val="5A6472"/>
-          </a:solidFill>
-          <a:ln>
-            <a:noFill/>
-          </a:ln>
-          <a:effectLst/>
-        </p:spPr>
-        <p:style>
-          <a:lnRef idx="1">
-            <a:schemeClr val="accent1"/>
-          </a:lnRef>
-          <a:fillRef idx="3">
-            <a:schemeClr val="accent1"/>
-          </a:fillRef>
-          <a:effectRef idx="2">
-            <a:schemeClr val="accent1"/>
-          </a:effectRef>
-          <a:fontRef idx="minor">
-            <a:schemeClr val="lt1"/>
-          </a:fontRef>
-        </p:style>
-        <p:txBody>
-          <a:bodyPr rtlCol="0" anchor="ctr"/>
-          <a:lstStyle/>
-          <a:p>
-            <a:pPr algn="ctr"/>
-          </a:p>
-        </p:txBody>
-      </p:sp>
-      <p:sp>
-        <p:nvSpPr>
-          <p:cNvPr id="17456" name="Rounded Rectangle 17455"/>
-          <p:cNvSpPr/>
-          <p:nvPr/>
-        </p:nvSpPr>
-        <p:spPr>
-          <a:xfrm>
-            <a:off x="9646919" y="4882896"/>
-            <a:ext cx="1298448" cy="384048"/>
-          </a:xfrm>
-          <a:prstGeom prst="roundRect">
-            <a:avLst>
-              <a:gd name="adj" fmla="val 6000"/>
-            </a:avLst>
-          </a:prstGeom>
-          <a:solidFill>
-            <a:srgbClr val="9C2E23"/>
-          </a:solidFill>
-          <a:ln>
-            <a:noFill/>
-          </a:ln>
-          <a:effectLst/>
-        </p:spPr>
-        <p:style>
-          <a:lnRef idx="1">
-            <a:schemeClr val="accent1"/>
-          </a:lnRef>
-          <a:fillRef idx="3">
-            <a:schemeClr val="accent1"/>
-          </a:fillRef>
-          <a:effectRef idx="2">
-            <a:schemeClr val="accent1"/>
-          </a:effectRef>
-          <a:fontRef idx="minor">
-            <a:schemeClr val="lt1"/>
-          </a:fontRef>
-        </p:style>
-        <p:txBody>
-          <a:bodyPr rtlCol="0" anchor="ctr" wrap="square" lIns="109728" rIns="109728" tIns="73152" bIns="73152"/>
-          <a:lstStyle/>
-          <a:p>
-            <a:pPr algn="ctr"/>
-            <a:r>
-              <a:rPr sz="950" b="1" i="0">
-                <a:solidFill>
-                  <a:srgbClr val="FFFFFF"/>
-                </a:solidFill>
-                <a:latin typeface="Arial"/>
-              </a:rPr>
-              <a:t>REACQUIRE</a:t>
-            </a:r>
-          </a:p>
-        </p:txBody>
-      </p:sp>
-      <p:sp>
-        <p:nvSpPr>
-          <p:cNvPr id="17457" name="TextBox 17456"/>
-          <p:cNvSpPr txBox="1"/>
-          <p:nvPr/>
-        </p:nvSpPr>
-        <p:spPr>
-          <a:xfrm>
-            <a:off x="3794760" y="5431536"/>
-            <a:ext cx="7589520" cy="457200"/>
-          </a:xfrm>
-          <a:prstGeom prst="rect">
-            <a:avLst/>
-          </a:prstGeom>
-          <a:noFill/>
-        </p:spPr>
-        <p:txBody>
-          <a:bodyPr wrap="square" anchor="t" lIns="0" rIns="0" tIns="0" bIns="0">
-            <a:spAutoFit/>
-          </a:bodyPr>
-          <a:lstStyle/>
-          <a:p>
-            <a:pPr>
-              <a:spcAft>
-                <a:spcPts val="400"/>
-              </a:spcAft>
-            </a:pPr>
-            <a:r>
-              <a:rPr sz="1050" b="1" i="0">
-                <a:solidFill>
-                  <a:srgbClr val="0B2545"/>
-                </a:solidFill>
-                <a:latin typeface="Arial"/>
-              </a:rPr>
-              <a:t>One 33 ms cycle, measured:  </a:t>
-            </a:r>
-            <a:r>
-              <a:rPr sz="1050" b="0" i="0">
-                <a:solidFill>
-                  <a:srgbClr val="0B2545"/>
-                </a:solidFill>
-                <a:latin typeface="Arial"/>
-              </a:rPr>
-              <a:t>307,200 px in → ≈6 CFAR candidates → 1 beacon confirmed → 1 command out, ≈20 ms used (p50, ISS-pass run). Closed loop, within the 33 ms frame budget on a normal laptop; recovers even from 5° off-target among decoys.</a:t>
-            </a:r>
-          </a:p>
-        </p:txBody>
-      </p:sp>
     </p:spTree>
   </p:cSld>
   <p:clrMapOvr>
@@ -11723,8 +9187,8 @@
         </p:nvSpPr>
         <p:spPr>
           <a:xfrm>
-            <a:off x="384048" y="5285232"/>
-            <a:ext cx="11430000" cy="822960"/>
+            <a:off x="384048" y="5029200"/>
+            <a:ext cx="11430000" cy="274320"/>
           </a:xfrm>
           <a:prstGeom prst="rect">
             <a:avLst/>
@@ -11761,64 +9225,32 @@
               <a:t>ISRO / IN-SPACe optical-communication teams, DRDO, IITs &amp; engineering colleges, and India's growing space-tech startups.</a:t>
             </a:r>
           </a:p>
-          <a:p>
-            <a:r>
-              <a:rPr sz="1250" b="1" i="0">
-                <a:solidFill>
-                  <a:srgbClr val="0B2545"/>
-                </a:solidFill>
-                <a:latin typeface="Arial"/>
-              </a:rPr>
-              <a:t>The number that matters:  </a:t>
-            </a:r>
-            <a:r>
-              <a:rPr sz="1250" b="0" i="0">
-                <a:solidFill>
-                  <a:srgbClr val="0B2545"/>
-                </a:solidFill>
-                <a:latin typeface="Arial"/>
-              </a:rPr>
-              <a:t>on a tracked ISS pass, coarse stage + modelled fine stage closes the optical link </a:t>
-            </a:r>
-            <a:r>
-              <a:rPr sz="1400" b="1" i="0">
-                <a:solidFill>
-                  <a:srgbClr val="1F8A5B"/>
-                </a:solidFill>
-                <a:latin typeface="Arial"/>
-              </a:rPr>
-              <a:t>99.3%</a:t>
-            </a:r>
-            <a:r>
-              <a:rPr sz="1250" b="0" i="0">
-                <a:solidFill>
-                  <a:srgbClr val="0B2545"/>
-                </a:solidFill>
-                <a:latin typeface="Arial"/>
-              </a:rPr>
-              <a:t> of the time vs </a:t>
-            </a:r>
-            <a:r>
-              <a:rPr sz="1400" b="1" i="0">
-                <a:solidFill>
-                  <a:srgbClr val="9C2E23"/>
-                </a:solidFill>
-                <a:latin typeface="Arial"/>
-              </a:rPr>
-              <a:t>14.7%</a:t>
-            </a:r>
-            <a:r>
-              <a:rPr sz="1250" b="0" i="0">
-                <a:solidFill>
-                  <a:srgbClr val="0B2545"/>
-                </a:solidFill>
-                <a:latin typeface="Arial"/>
-              </a:rPr>
-              <a:t> without — measured, not asserted.</a:t>
-            </a:r>
-          </a:p>
-        </p:txBody>
-      </p:sp>
+        </p:txBody>
+      </p:sp>
+      <p:pic>
+        <p:nvPicPr>
+          <p:cNvPr id="17416" name="Picture 17415" descr="impact_bars.png"/>
+          <p:cNvPicPr>
+            <a:picLocks noChangeAspect="1"/>
+          </p:cNvPicPr>
+          <p:nvPr/>
+        </p:nvPicPr>
+        <p:blipFill>
+          <a:blip r:embed="rId4"/>
+          <a:stretch>
+            <a:fillRect/>
+          </a:stretch>
+        </p:blipFill>
+        <p:spPr>
+          <a:xfrm>
+            <a:off x="1435608" y="5266944"/>
+            <a:ext cx="9326880" cy="1057046"/>
+          </a:xfrm>
+          <a:prstGeom prst="rect">
+            <a:avLst/>
+          </a:prstGeom>
+        </p:spPr>
+      </p:pic>
     </p:spTree>
     <p:extLst>
       <p:ext uri="{BB962C8B-B14F-4D97-AF65-F5344CB8AC3E}">
